--- a/docs/DEMO_DECK.pptx
+++ b/docs/DEMO_DECK.pptx
@@ -5,18 +5,18 @@
     <p:sldMasterId id="2147483648" r:id="rId1"/>
   </p:sldMasterIdLst>
   <p:sldIdLst>
-    <p:sldId id="256" r:id="rId2"/>
-    <p:sldId id="257" r:id="rId3"/>
-    <p:sldId id="258" r:id="rId4"/>
-    <p:sldId id="259" r:id="rId5"/>
-    <p:sldId id="260" r:id="rId6"/>
-    <p:sldId id="261" r:id="rId7"/>
-    <p:sldId id="262" r:id="rId8"/>
-    <p:sldId id="263" r:id="rId9"/>
-    <p:sldId id="264" r:id="rId10"/>
-    <p:sldId id="265" r:id="rId11"/>
+    <p:sldId id="256" r:id="rId7"/>
+    <p:sldId id="257" r:id="rId8"/>
+    <p:sldId id="258" r:id="rId9"/>
+    <p:sldId id="259" r:id="rId10"/>
+    <p:sldId id="260" r:id="rId11"/>
+    <p:sldId id="261" r:id="rId12"/>
+    <p:sldId id="262" r:id="rId13"/>
+    <p:sldId id="263" r:id="rId14"/>
+    <p:sldId id="264" r:id="rId15"/>
+    <p:sldId id="265" r:id="rId16"/>
   </p:sldIdLst>
-  <p:sldSz cx="10688638" cy="7562850"/>
+  <p:sldSz cx="10689336" cy="7562088" type="screen4x3"/>
   <p:notesSz cx="6858000" cy="9144000"/>
   <p:defaultTextStyle>
     <a:defPPr>
@@ -113,22 +113,6 @@
       </a:defRPr>
     </a:lvl9pPr>
   </p:defaultTextStyle>
-  <p:extLst>
-    <p:ext uri="{EFAFB233-063F-42B5-8137-9DF3F51BA10A}">
-      <p15:sldGuideLst xmlns:p15="http://schemas.microsoft.com/office/powerpoint/2012/main">
-        <p15:guide id="1" orient="horz" pos="2160">
-          <p15:clr>
-            <a:srgbClr val="A4A3A4"/>
-          </p15:clr>
-        </p15:guide>
-        <p15:guide id="2" pos="2880">
-          <p15:clr>
-            <a:srgbClr val="A4A3A4"/>
-          </p15:clr>
-        </p15:guide>
-      </p15:sldGuideLst>
-    </p:ext>
-  </p:extLst>
 </p:presentation>
 </file>
 
@@ -170,9 +154,10 @@
           <a:lstStyle/>
           <a:p>
             <a:r>
-              <a:rPr lang="en-US"/>
+              <a:rPr lang="en-US" smtClean="0"/>
               <a:t>Click to edit Master title style</a:t>
             </a:r>
+            <a:endParaRPr lang="en-US"/>
           </a:p>
         </p:txBody>
       </p:sp>
@@ -288,9 +273,10 @@
           </a:lstStyle>
           <a:p>
             <a:r>
-              <a:rPr lang="en-US"/>
+              <a:rPr lang="en-US" smtClean="0"/>
               <a:t>Click to edit Master subtitle style</a:t>
             </a:r>
+            <a:endParaRPr lang="en-US"/>
           </a:p>
         </p:txBody>
       </p:sp>
@@ -311,7 +297,7 @@
           <a:p>
             <a:fld id="{5BCAD085-E8A6-8845-BD4E-CB4CCA059FC4}" type="datetimeFigureOut">
               <a:rPr lang="en-US" smtClean="0"/>
-              <a:t>7/16/2026</a:t>
+              <a:t>1/27/13</a:t>
             </a:fld>
             <a:endParaRPr lang="en-US"/>
           </a:p>
@@ -405,9 +391,10 @@
           <a:lstStyle/>
           <a:p>
             <a:r>
-              <a:rPr lang="en-US"/>
+              <a:rPr lang="en-US" smtClean="0"/>
               <a:t>Click to edit Master title style</a:t>
             </a:r>
+            <a:endParaRPr lang="en-US"/>
           </a:p>
         </p:txBody>
       </p:sp>
@@ -428,37 +415,38 @@
           <a:p>
             <a:pPr lvl="0"/>
             <a:r>
-              <a:rPr lang="en-US"/>
+              <a:rPr lang="en-US" smtClean="0"/>
               <a:t>Click to edit Master text styles</a:t>
             </a:r>
           </a:p>
           <a:p>
             <a:pPr lvl="1"/>
             <a:r>
-              <a:rPr lang="en-US"/>
+              <a:rPr lang="en-US" smtClean="0"/>
               <a:t>Second level</a:t>
             </a:r>
           </a:p>
           <a:p>
             <a:pPr lvl="2"/>
             <a:r>
-              <a:rPr lang="en-US"/>
+              <a:rPr lang="en-US" smtClean="0"/>
               <a:t>Third level</a:t>
             </a:r>
           </a:p>
           <a:p>
             <a:pPr lvl="3"/>
             <a:r>
-              <a:rPr lang="en-US"/>
+              <a:rPr lang="en-US" smtClean="0"/>
               <a:t>Fourth level</a:t>
             </a:r>
           </a:p>
           <a:p>
             <a:pPr lvl="4"/>
             <a:r>
-              <a:rPr lang="en-US"/>
+              <a:rPr lang="en-US" smtClean="0"/>
               <a:t>Fifth level</a:t>
             </a:r>
+            <a:endParaRPr lang="en-US"/>
           </a:p>
         </p:txBody>
       </p:sp>
@@ -479,7 +467,7 @@
           <a:p>
             <a:fld id="{5BCAD085-E8A6-8845-BD4E-CB4CCA059FC4}" type="datetimeFigureOut">
               <a:rPr lang="en-US" smtClean="0"/>
-              <a:t>7/16/2026</a:t>
+              <a:t>1/27/13</a:t>
             </a:fld>
             <a:endParaRPr lang="en-US"/>
           </a:p>
@@ -578,9 +566,10 @@
           <a:lstStyle/>
           <a:p>
             <a:r>
-              <a:rPr lang="en-US"/>
+              <a:rPr lang="en-US" smtClean="0"/>
               <a:t>Click to edit Master title style</a:t>
             </a:r>
+            <a:endParaRPr lang="en-US"/>
           </a:p>
         </p:txBody>
       </p:sp>
@@ -606,37 +595,38 @@
           <a:p>
             <a:pPr lvl="0"/>
             <a:r>
-              <a:rPr lang="en-US"/>
+              <a:rPr lang="en-US" smtClean="0"/>
               <a:t>Click to edit Master text styles</a:t>
             </a:r>
           </a:p>
           <a:p>
             <a:pPr lvl="1"/>
             <a:r>
-              <a:rPr lang="en-US"/>
+              <a:rPr lang="en-US" smtClean="0"/>
               <a:t>Second level</a:t>
             </a:r>
           </a:p>
           <a:p>
             <a:pPr lvl="2"/>
             <a:r>
-              <a:rPr lang="en-US"/>
+              <a:rPr lang="en-US" smtClean="0"/>
               <a:t>Third level</a:t>
             </a:r>
           </a:p>
           <a:p>
             <a:pPr lvl="3"/>
             <a:r>
-              <a:rPr lang="en-US"/>
+              <a:rPr lang="en-US" smtClean="0"/>
               <a:t>Fourth level</a:t>
             </a:r>
           </a:p>
           <a:p>
             <a:pPr lvl="4"/>
             <a:r>
-              <a:rPr lang="en-US"/>
+              <a:rPr lang="en-US" smtClean="0"/>
               <a:t>Fifth level</a:t>
             </a:r>
+            <a:endParaRPr lang="en-US"/>
           </a:p>
         </p:txBody>
       </p:sp>
@@ -657,7 +647,7 @@
           <a:p>
             <a:fld id="{5BCAD085-E8A6-8845-BD4E-CB4CCA059FC4}" type="datetimeFigureOut">
               <a:rPr lang="en-US" smtClean="0"/>
-              <a:t>7/16/2026</a:t>
+              <a:t>1/27/13</a:t>
             </a:fld>
             <a:endParaRPr lang="en-US"/>
           </a:p>
@@ -751,9 +741,10 @@
           <a:lstStyle/>
           <a:p>
             <a:r>
-              <a:rPr lang="en-US"/>
+              <a:rPr lang="en-US" smtClean="0"/>
               <a:t>Click to edit Master title style</a:t>
             </a:r>
+            <a:endParaRPr lang="en-US"/>
           </a:p>
         </p:txBody>
       </p:sp>
@@ -774,37 +765,38 @@
           <a:p>
             <a:pPr lvl="0"/>
             <a:r>
-              <a:rPr lang="en-US"/>
+              <a:rPr lang="en-US" smtClean="0"/>
               <a:t>Click to edit Master text styles</a:t>
             </a:r>
           </a:p>
           <a:p>
             <a:pPr lvl="1"/>
             <a:r>
-              <a:rPr lang="en-US"/>
+              <a:rPr lang="en-US" smtClean="0"/>
               <a:t>Second level</a:t>
             </a:r>
           </a:p>
           <a:p>
             <a:pPr lvl="2"/>
             <a:r>
-              <a:rPr lang="en-US"/>
+              <a:rPr lang="en-US" smtClean="0"/>
               <a:t>Third level</a:t>
             </a:r>
           </a:p>
           <a:p>
             <a:pPr lvl="3"/>
             <a:r>
-              <a:rPr lang="en-US"/>
+              <a:rPr lang="en-US" smtClean="0"/>
               <a:t>Fourth level</a:t>
             </a:r>
           </a:p>
           <a:p>
             <a:pPr lvl="4"/>
             <a:r>
-              <a:rPr lang="en-US"/>
+              <a:rPr lang="en-US" smtClean="0"/>
               <a:t>Fifth level</a:t>
             </a:r>
+            <a:endParaRPr lang="en-US"/>
           </a:p>
         </p:txBody>
       </p:sp>
@@ -825,7 +817,7 @@
           <a:p>
             <a:fld id="{5BCAD085-E8A6-8845-BD4E-CB4CCA059FC4}" type="datetimeFigureOut">
               <a:rPr lang="en-US" smtClean="0"/>
-              <a:t>7/16/2026</a:t>
+              <a:t>1/27/13</a:t>
             </a:fld>
             <a:endParaRPr lang="en-US"/>
           </a:p>
@@ -928,9 +920,10 @@
           </a:lstStyle>
           <a:p>
             <a:r>
-              <a:rPr lang="en-US"/>
+              <a:rPr lang="en-US" smtClean="0"/>
               <a:t>Click to edit Master title style</a:t>
             </a:r>
+            <a:endParaRPr lang="en-US"/>
           </a:p>
         </p:txBody>
       </p:sp>
@@ -1047,7 +1040,7 @@
           <a:p>
             <a:pPr lvl="0"/>
             <a:r>
-              <a:rPr lang="en-US"/>
+              <a:rPr lang="en-US" smtClean="0"/>
               <a:t>Click to edit Master text styles</a:t>
             </a:r>
           </a:p>
@@ -1070,7 +1063,7 @@
           <a:p>
             <a:fld id="{5BCAD085-E8A6-8845-BD4E-CB4CCA059FC4}" type="datetimeFigureOut">
               <a:rPr lang="en-US" smtClean="0"/>
-              <a:t>7/16/2026</a:t>
+              <a:t>1/27/13</a:t>
             </a:fld>
             <a:endParaRPr lang="en-US"/>
           </a:p>
@@ -1164,9 +1157,10 @@
           <a:lstStyle/>
           <a:p>
             <a:r>
-              <a:rPr lang="en-US"/>
+              <a:rPr lang="en-US" smtClean="0"/>
               <a:t>Click to edit Master title style</a:t>
             </a:r>
+            <a:endParaRPr lang="en-US"/>
           </a:p>
         </p:txBody>
       </p:sp>
@@ -1220,37 +1214,38 @@
           <a:p>
             <a:pPr lvl="0"/>
             <a:r>
-              <a:rPr lang="en-US"/>
+              <a:rPr lang="en-US" smtClean="0"/>
               <a:t>Click to edit Master text styles</a:t>
             </a:r>
           </a:p>
           <a:p>
             <a:pPr lvl="1"/>
             <a:r>
-              <a:rPr lang="en-US"/>
+              <a:rPr lang="en-US" smtClean="0"/>
               <a:t>Second level</a:t>
             </a:r>
           </a:p>
           <a:p>
             <a:pPr lvl="2"/>
             <a:r>
-              <a:rPr lang="en-US"/>
+              <a:rPr lang="en-US" smtClean="0"/>
               <a:t>Third level</a:t>
             </a:r>
           </a:p>
           <a:p>
             <a:pPr lvl="3"/>
             <a:r>
-              <a:rPr lang="en-US"/>
+              <a:rPr lang="en-US" smtClean="0"/>
               <a:t>Fourth level</a:t>
             </a:r>
           </a:p>
           <a:p>
             <a:pPr lvl="4"/>
             <a:r>
-              <a:rPr lang="en-US"/>
+              <a:rPr lang="en-US" smtClean="0"/>
               <a:t>Fifth level</a:t>
             </a:r>
+            <a:endParaRPr lang="en-US"/>
           </a:p>
         </p:txBody>
       </p:sp>
@@ -1304,37 +1299,38 @@
           <a:p>
             <a:pPr lvl="0"/>
             <a:r>
-              <a:rPr lang="en-US"/>
+              <a:rPr lang="en-US" smtClean="0"/>
               <a:t>Click to edit Master text styles</a:t>
             </a:r>
           </a:p>
           <a:p>
             <a:pPr lvl="1"/>
             <a:r>
-              <a:rPr lang="en-US"/>
+              <a:rPr lang="en-US" smtClean="0"/>
               <a:t>Second level</a:t>
             </a:r>
           </a:p>
           <a:p>
             <a:pPr lvl="2"/>
             <a:r>
-              <a:rPr lang="en-US"/>
+              <a:rPr lang="en-US" smtClean="0"/>
               <a:t>Third level</a:t>
             </a:r>
           </a:p>
           <a:p>
             <a:pPr lvl="3"/>
             <a:r>
-              <a:rPr lang="en-US"/>
+              <a:rPr lang="en-US" smtClean="0"/>
               <a:t>Fourth level</a:t>
             </a:r>
           </a:p>
           <a:p>
             <a:pPr lvl="4"/>
             <a:r>
-              <a:rPr lang="en-US"/>
+              <a:rPr lang="en-US" smtClean="0"/>
               <a:t>Fifth level</a:t>
             </a:r>
+            <a:endParaRPr lang="en-US"/>
           </a:p>
         </p:txBody>
       </p:sp>
@@ -1355,7 +1351,7 @@
           <a:p>
             <a:fld id="{5BCAD085-E8A6-8845-BD4E-CB4CCA059FC4}" type="datetimeFigureOut">
               <a:rPr lang="en-US" smtClean="0"/>
-              <a:t>7/16/2026</a:t>
+              <a:t>1/27/13</a:t>
             </a:fld>
             <a:endParaRPr lang="en-US"/>
           </a:p>
@@ -1453,9 +1449,10 @@
           </a:lstStyle>
           <a:p>
             <a:r>
-              <a:rPr lang="en-US"/>
+              <a:rPr lang="en-US" smtClean="0"/>
               <a:t>Click to edit Master title style</a:t>
             </a:r>
+            <a:endParaRPr lang="en-US"/>
           </a:p>
         </p:txBody>
       </p:sp>
@@ -1518,7 +1515,7 @@
           <a:p>
             <a:pPr lvl="0"/>
             <a:r>
-              <a:rPr lang="en-US"/>
+              <a:rPr lang="en-US" smtClean="0"/>
               <a:t>Click to edit Master text styles</a:t>
             </a:r>
           </a:p>
@@ -1574,37 +1571,38 @@
           <a:p>
             <a:pPr lvl="0"/>
             <a:r>
-              <a:rPr lang="en-US"/>
+              <a:rPr lang="en-US" smtClean="0"/>
               <a:t>Click to edit Master text styles</a:t>
             </a:r>
           </a:p>
           <a:p>
             <a:pPr lvl="1"/>
             <a:r>
-              <a:rPr lang="en-US"/>
+              <a:rPr lang="en-US" smtClean="0"/>
               <a:t>Second level</a:t>
             </a:r>
           </a:p>
           <a:p>
             <a:pPr lvl="2"/>
             <a:r>
-              <a:rPr lang="en-US"/>
+              <a:rPr lang="en-US" smtClean="0"/>
               <a:t>Third level</a:t>
             </a:r>
           </a:p>
           <a:p>
             <a:pPr lvl="3"/>
             <a:r>
-              <a:rPr lang="en-US"/>
+              <a:rPr lang="en-US" smtClean="0"/>
               <a:t>Fourth level</a:t>
             </a:r>
           </a:p>
           <a:p>
             <a:pPr lvl="4"/>
             <a:r>
-              <a:rPr lang="en-US"/>
+              <a:rPr lang="en-US" smtClean="0"/>
               <a:t>Fifth level</a:t>
             </a:r>
+            <a:endParaRPr lang="en-US"/>
           </a:p>
         </p:txBody>
       </p:sp>
@@ -1667,7 +1665,7 @@
           <a:p>
             <a:pPr lvl="0"/>
             <a:r>
-              <a:rPr lang="en-US"/>
+              <a:rPr lang="en-US" smtClean="0"/>
               <a:t>Click to edit Master text styles</a:t>
             </a:r>
           </a:p>
@@ -1723,37 +1721,38 @@
           <a:p>
             <a:pPr lvl="0"/>
             <a:r>
-              <a:rPr lang="en-US"/>
+              <a:rPr lang="en-US" smtClean="0"/>
               <a:t>Click to edit Master text styles</a:t>
             </a:r>
           </a:p>
           <a:p>
             <a:pPr lvl="1"/>
             <a:r>
-              <a:rPr lang="en-US"/>
+              <a:rPr lang="en-US" smtClean="0"/>
               <a:t>Second level</a:t>
             </a:r>
           </a:p>
           <a:p>
             <a:pPr lvl="2"/>
             <a:r>
-              <a:rPr lang="en-US"/>
+              <a:rPr lang="en-US" smtClean="0"/>
               <a:t>Third level</a:t>
             </a:r>
           </a:p>
           <a:p>
             <a:pPr lvl="3"/>
             <a:r>
-              <a:rPr lang="en-US"/>
+              <a:rPr lang="en-US" smtClean="0"/>
               <a:t>Fourth level</a:t>
             </a:r>
           </a:p>
           <a:p>
             <a:pPr lvl="4"/>
             <a:r>
-              <a:rPr lang="en-US"/>
+              <a:rPr lang="en-US" smtClean="0"/>
               <a:t>Fifth level</a:t>
             </a:r>
+            <a:endParaRPr lang="en-US"/>
           </a:p>
         </p:txBody>
       </p:sp>
@@ -1774,7 +1773,7 @@
           <a:p>
             <a:fld id="{5BCAD085-E8A6-8845-BD4E-CB4CCA059FC4}" type="datetimeFigureOut">
               <a:rPr lang="en-US" smtClean="0"/>
-              <a:t>7/16/2026</a:t>
+              <a:t>1/27/13</a:t>
             </a:fld>
             <a:endParaRPr lang="en-US"/>
           </a:p>
@@ -1868,9 +1867,10 @@
           <a:lstStyle/>
           <a:p>
             <a:r>
-              <a:rPr lang="en-US"/>
+              <a:rPr lang="en-US" smtClean="0"/>
               <a:t>Click to edit Master title style</a:t>
             </a:r>
+            <a:endParaRPr lang="en-US"/>
           </a:p>
         </p:txBody>
       </p:sp>
@@ -1891,7 +1891,7 @@
           <a:p>
             <a:fld id="{5BCAD085-E8A6-8845-BD4E-CB4CCA059FC4}" type="datetimeFigureOut">
               <a:rPr lang="en-US" smtClean="0"/>
-              <a:t>7/16/2026</a:t>
+              <a:t>1/27/13</a:t>
             </a:fld>
             <a:endParaRPr lang="en-US"/>
           </a:p>
@@ -1986,7 +1986,7 @@
           <a:p>
             <a:fld id="{5BCAD085-E8A6-8845-BD4E-CB4CCA059FC4}" type="datetimeFigureOut">
               <a:rPr lang="en-US" smtClean="0"/>
-              <a:t>7/16/2026</a:t>
+              <a:t>1/27/13</a:t>
             </a:fld>
             <a:endParaRPr lang="en-US"/>
           </a:p>
@@ -2089,9 +2089,10 @@
           </a:lstStyle>
           <a:p>
             <a:r>
-              <a:rPr lang="en-US"/>
+              <a:rPr lang="en-US" smtClean="0"/>
               <a:t>Click to edit Master title style</a:t>
             </a:r>
+            <a:endParaRPr lang="en-US"/>
           </a:p>
         </p:txBody>
       </p:sp>
@@ -2145,37 +2146,38 @@
           <a:p>
             <a:pPr lvl="0"/>
             <a:r>
-              <a:rPr lang="en-US"/>
+              <a:rPr lang="en-US" smtClean="0"/>
               <a:t>Click to edit Master text styles</a:t>
             </a:r>
           </a:p>
           <a:p>
             <a:pPr lvl="1"/>
             <a:r>
-              <a:rPr lang="en-US"/>
+              <a:rPr lang="en-US" smtClean="0"/>
               <a:t>Second level</a:t>
             </a:r>
           </a:p>
           <a:p>
             <a:pPr lvl="2"/>
             <a:r>
-              <a:rPr lang="en-US"/>
+              <a:rPr lang="en-US" smtClean="0"/>
               <a:t>Third level</a:t>
             </a:r>
           </a:p>
           <a:p>
             <a:pPr lvl="3"/>
             <a:r>
-              <a:rPr lang="en-US"/>
+              <a:rPr lang="en-US" smtClean="0"/>
               <a:t>Fourth level</a:t>
             </a:r>
           </a:p>
           <a:p>
             <a:pPr lvl="4"/>
             <a:r>
-              <a:rPr lang="en-US"/>
+              <a:rPr lang="en-US" smtClean="0"/>
               <a:t>Fifth level</a:t>
             </a:r>
+            <a:endParaRPr lang="en-US"/>
           </a:p>
         </p:txBody>
       </p:sp>
@@ -2238,7 +2240,7 @@
           <a:p>
             <a:pPr lvl="0"/>
             <a:r>
-              <a:rPr lang="en-US"/>
+              <a:rPr lang="en-US" smtClean="0"/>
               <a:t>Click to edit Master text styles</a:t>
             </a:r>
           </a:p>
@@ -2261,7 +2263,7 @@
           <a:p>
             <a:fld id="{5BCAD085-E8A6-8845-BD4E-CB4CCA059FC4}" type="datetimeFigureOut">
               <a:rPr lang="en-US" smtClean="0"/>
-              <a:t>7/16/2026</a:t>
+              <a:t>1/27/13</a:t>
             </a:fld>
             <a:endParaRPr lang="en-US"/>
           </a:p>
@@ -2364,9 +2366,10 @@
           </a:lstStyle>
           <a:p>
             <a:r>
-              <a:rPr lang="en-US"/>
+              <a:rPr lang="en-US" smtClean="0"/>
               <a:t>Click to edit Master title style</a:t>
             </a:r>
+            <a:endParaRPr lang="en-US"/>
           </a:p>
         </p:txBody>
       </p:sp>
@@ -2490,7 +2493,7 @@
           <a:p>
             <a:pPr lvl="0"/>
             <a:r>
-              <a:rPr lang="en-US"/>
+              <a:rPr lang="en-US" smtClean="0"/>
               <a:t>Click to edit Master text styles</a:t>
             </a:r>
           </a:p>
@@ -2513,7 +2516,7 @@
           <a:p>
             <a:fld id="{5BCAD085-E8A6-8845-BD4E-CB4CCA059FC4}" type="datetimeFigureOut">
               <a:rPr lang="en-US" smtClean="0"/>
-              <a:t>7/16/2026</a:t>
+              <a:t>1/27/13</a:t>
             </a:fld>
             <a:endParaRPr lang="en-US"/>
           </a:p>
@@ -2622,9 +2625,10 @@
           <a:lstStyle/>
           <a:p>
             <a:r>
-              <a:rPr lang="en-US"/>
+              <a:rPr lang="en-US" smtClean="0"/>
               <a:t>Click to edit Master title style</a:t>
             </a:r>
+            <a:endParaRPr lang="en-US"/>
           </a:p>
         </p:txBody>
       </p:sp>
@@ -2655,37 +2659,38 @@
           <a:p>
             <a:pPr lvl="0"/>
             <a:r>
-              <a:rPr lang="en-US"/>
+              <a:rPr lang="en-US" smtClean="0"/>
               <a:t>Click to edit Master text styles</a:t>
             </a:r>
           </a:p>
           <a:p>
             <a:pPr lvl="1"/>
             <a:r>
-              <a:rPr lang="en-US"/>
+              <a:rPr lang="en-US" smtClean="0"/>
               <a:t>Second level</a:t>
             </a:r>
           </a:p>
           <a:p>
             <a:pPr lvl="2"/>
             <a:r>
-              <a:rPr lang="en-US"/>
+              <a:rPr lang="en-US" smtClean="0"/>
               <a:t>Third level</a:t>
             </a:r>
           </a:p>
           <a:p>
             <a:pPr lvl="3"/>
             <a:r>
-              <a:rPr lang="en-US"/>
+              <a:rPr lang="en-US" smtClean="0"/>
               <a:t>Fourth level</a:t>
             </a:r>
           </a:p>
           <a:p>
             <a:pPr lvl="4"/>
             <a:r>
-              <a:rPr lang="en-US"/>
+              <a:rPr lang="en-US" smtClean="0"/>
               <a:t>Fifth level</a:t>
             </a:r>
+            <a:endParaRPr lang="en-US"/>
           </a:p>
         </p:txBody>
       </p:sp>
@@ -2724,7 +2729,7 @@
           <a:p>
             <a:fld id="{5BCAD085-E8A6-8845-BD4E-CB4CCA059FC4}" type="datetimeFigureOut">
               <a:rPr lang="en-US" smtClean="0"/>
-              <a:t>7/16/2026</a:t>
+              <a:t>1/27/13</a:t>
             </a:fld>
             <a:endParaRPr lang="en-US"/>
           </a:p>
@@ -3083,7 +3088,7 @@
 </file>
 
 <file path=ppt/slides/slide1.xml><?xml version="1.0" encoding="utf-8"?>
-<p:sld xmlns:a="http://schemas.openxmlformats.org/drawingml/2006/main" xmlns:r="http://schemas.openxmlformats.org/officeDocument/2006/relationships" xmlns:p="http://schemas.openxmlformats.org/presentationml/2006/main">
+<p:sld xmlns:a="http://schemas.openxmlformats.org/drawingml/2006/main" xmlns:p="http://schemas.openxmlformats.org/presentationml/2006/main" xmlns:r="http://schemas.openxmlformats.org/officeDocument/2006/relationships">
   <p:cSld>
     <p:spTree>
       <p:nvGrpSpPr>
@@ -3091,14 +3096,7 @@
         <p:cNvGrpSpPr/>
         <p:nvPr/>
       </p:nvGrpSpPr>
-      <p:grpSpPr>
-        <a:xfrm>
-          <a:off x="0" y="0"/>
-          <a:ext cx="0" cy="0"/>
-          <a:chOff x="0" y="0"/>
-          <a:chExt cx="0" cy="0"/>
-        </a:xfrm>
-      </p:grpSpPr>
+      <p:grpSpPr/>
       <p:sp>
         <p:nvSpPr>
           <p:cNvPr id="2" name="Rectangle 1"/>
@@ -3140,7 +3138,6 @@
           <a:lstStyle/>
           <a:p>
             <a:pPr algn="ctr"/>
-            <a:endParaRPr/>
           </a:p>
         </p:txBody>
       </p:sp>
@@ -3185,7 +3182,6 @@
           <a:lstStyle/>
           <a:p>
             <a:pPr algn="ctr"/>
-            <a:endParaRPr/>
           </a:p>
         </p:txBody>
       </p:sp>
@@ -3230,7 +3226,6 @@
           <a:lstStyle/>
           <a:p>
             <a:pPr algn="ctr"/>
-            <a:endParaRPr/>
           </a:p>
         </p:txBody>
       </p:sp>
@@ -3275,7 +3270,6 @@
           <a:lstStyle/>
           <a:p>
             <a:pPr algn="ctr"/>
-            <a:endParaRPr/>
           </a:p>
         </p:txBody>
       </p:sp>
@@ -3320,7 +3314,6 @@
           <a:lstStyle/>
           <a:p>
             <a:pPr algn="ctr"/>
-            <a:endParaRPr/>
           </a:p>
         </p:txBody>
       </p:sp>
@@ -3341,7 +3334,7 @@
           <a:noFill/>
         </p:spPr>
         <p:txBody>
-          <a:bodyPr wrap="square" lIns="0" tIns="0" rIns="0" bIns="0" anchor="t">
+          <a:bodyPr wrap="square" anchor="t" lIns="0" rIns="0" tIns="0" bIns="0">
             <a:spAutoFit/>
           </a:bodyPr>
           <a:lstStyle/>
@@ -3386,7 +3379,7 @@
           <a:noFill/>
         </p:spPr>
         <p:txBody>
-          <a:bodyPr wrap="square" lIns="0" tIns="0" rIns="0" bIns="0" anchor="t">
+          <a:bodyPr wrap="square" anchor="t" lIns="0" rIns="0" tIns="0" bIns="0">
             <a:spAutoFit/>
           </a:bodyPr>
           <a:lstStyle/>
@@ -3486,7 +3479,6 @@
           <a:lstStyle/>
           <a:p>
             <a:pPr algn="ctr"/>
-            <a:endParaRPr/>
           </a:p>
         </p:txBody>
       </p:sp>
@@ -3507,7 +3499,7 @@
           <a:noFill/>
         </p:spPr>
         <p:txBody>
-          <a:bodyPr wrap="square" lIns="0" tIns="0" rIns="0" bIns="0" anchor="t">
+          <a:bodyPr wrap="square" anchor="t" lIns="0" rIns="0" tIns="0" bIns="0">
             <a:spAutoFit/>
           </a:bodyPr>
           <a:lstStyle/>
@@ -3576,7 +3568,6 @@
           <a:lstStyle/>
           <a:p>
             <a:pPr algn="ctr"/>
-            <a:endParaRPr/>
           </a:p>
         </p:txBody>
       </p:sp>
@@ -3597,7 +3588,7 @@
           <a:noFill/>
         </p:spPr>
         <p:txBody>
-          <a:bodyPr wrap="none" lIns="0" tIns="0" rIns="0" bIns="0" anchor="ctr">
+          <a:bodyPr wrap="none" anchor="ctr" lIns="0" rIns="0" tIns="0" bIns="0">
             <a:spAutoFit/>
           </a:bodyPr>
           <a:lstStyle/>
@@ -3642,7 +3633,7 @@
           <a:noFill/>
         </p:spPr>
         <p:txBody>
-          <a:bodyPr wrap="square" lIns="0" tIns="0" rIns="0" bIns="0" anchor="ctr">
+          <a:bodyPr wrap="square" anchor="ctr" lIns="0" rIns="0" tIns="0" bIns="0">
             <a:spAutoFit/>
           </a:bodyPr>
           <a:lstStyle/>
@@ -3711,7 +3702,6 @@
           <a:lstStyle/>
           <a:p>
             <a:pPr algn="ctr"/>
-            <a:endParaRPr/>
           </a:p>
         </p:txBody>
       </p:sp>
@@ -3732,7 +3722,7 @@
           <a:noFill/>
         </p:spPr>
         <p:txBody>
-          <a:bodyPr wrap="none" lIns="0" tIns="0" rIns="0" bIns="0" anchor="ctr">
+          <a:bodyPr wrap="none" anchor="ctr" lIns="0" rIns="0" tIns="0" bIns="0">
             <a:spAutoFit/>
           </a:bodyPr>
           <a:lstStyle/>
@@ -3777,7 +3767,7 @@
           <a:noFill/>
         </p:spPr>
         <p:txBody>
-          <a:bodyPr wrap="square" lIns="0" tIns="0" rIns="0" bIns="0" anchor="ctr">
+          <a:bodyPr wrap="square" anchor="ctr" lIns="0" rIns="0" tIns="0" bIns="0">
             <a:spAutoFit/>
           </a:bodyPr>
           <a:lstStyle/>
@@ -3846,7 +3836,6 @@
           <a:lstStyle/>
           <a:p>
             <a:pPr algn="ctr"/>
-            <a:endParaRPr/>
           </a:p>
         </p:txBody>
       </p:sp>
@@ -3867,7 +3856,7 @@
           <a:noFill/>
         </p:spPr>
         <p:txBody>
-          <a:bodyPr wrap="none" lIns="0" tIns="0" rIns="0" bIns="0" anchor="ctr">
+          <a:bodyPr wrap="none" anchor="ctr" lIns="0" rIns="0" tIns="0" bIns="0">
             <a:spAutoFit/>
           </a:bodyPr>
           <a:lstStyle/>
@@ -3904,7 +3893,7 @@
         <p:spPr>
           <a:xfrm>
             <a:off x="603504" y="5166360"/>
-            <a:ext cx="2137867" cy="347472"/>
+            <a:ext cx="2452420" cy="347472"/>
           </a:xfrm>
           <a:prstGeom prst="rect">
             <a:avLst/>
@@ -3938,7 +3927,6 @@
           <a:lstStyle/>
           <a:p>
             <a:pPr algn="ctr"/>
-            <a:endParaRPr/>
           </a:p>
         </p:txBody>
       </p:sp>
@@ -3951,15 +3939,15 @@
         <p:spPr>
           <a:xfrm>
             <a:off x="740664" y="5166360"/>
-            <a:ext cx="1863547" cy="347472"/>
-          </a:xfrm>
-          <a:prstGeom prst="rect">
-            <a:avLst/>
-          </a:prstGeom>
-          <a:noFill/>
-        </p:spPr>
-        <p:txBody>
-          <a:bodyPr wrap="none" lIns="0" tIns="0" rIns="0" bIns="0" anchor="ctr">
+            <a:ext cx="2178100" cy="347472"/>
+          </a:xfrm>
+          <a:prstGeom prst="rect">
+            <a:avLst/>
+          </a:prstGeom>
+          <a:noFill/>
+        </p:spPr>
+        <p:txBody>
+          <a:bodyPr wrap="none" anchor="ctr" lIns="0" rIns="0" tIns="0" bIns="0">
             <a:spAutoFit/>
           </a:bodyPr>
           <a:lstStyle/>
@@ -3976,22 +3964,22 @@
               </a:spcAft>
             </a:pPr>
             <a:r>
+              <a:rPr sz="900" b="1" i="0">
+                <a:solidFill>
+                  <a:srgbClr val="0E0E0E"/>
+                </a:solidFill>
+                <a:latin typeface="Courier New"/>
+              </a:rPr>
+              <a:t>Web cockpit </a:t>
+            </a:r>
+            <a:r>
               <a:rPr sz="900" b="0" i="0">
                 <a:solidFill>
                   <a:srgbClr val="53565A"/>
                 </a:solidFill>
                 <a:latin typeface="Courier New"/>
               </a:rPr>
-              <a:t>VS Code extension </a:t>
-            </a:r>
-            <a:r>
-              <a:rPr sz="900" b="1" i="0">
-                <a:solidFill>
-                  <a:srgbClr val="0E0E0E"/>
-                </a:solidFill>
-                <a:latin typeface="Courier New"/>
-              </a:rPr>
-              <a:t>+ CLI</a:t>
+              <a:t>· VS Code · CLI</a:t>
             </a:r>
           </a:p>
         </p:txBody>
@@ -4004,7 +3992,7 @@
         </p:nvSpPr>
         <p:spPr>
           <a:xfrm>
-            <a:off x="2924251" y="5166360"/>
+            <a:off x="3238804" y="5166360"/>
             <a:ext cx="2452420" cy="347472"/>
           </a:xfrm>
           <a:prstGeom prst="rect">
@@ -4039,7 +4027,6 @@
           <a:lstStyle/>
           <a:p>
             <a:pPr algn="ctr"/>
-            <a:endParaRPr/>
           </a:p>
         </p:txBody>
       </p:sp>
@@ -4051,7 +4038,7 @@
         </p:nvSpPr>
         <p:spPr>
           <a:xfrm>
-            <a:off x="3061411" y="5166360"/>
+            <a:off x="3375964" y="5166360"/>
             <a:ext cx="2178100" cy="347472"/>
           </a:xfrm>
           <a:prstGeom prst="rect">
@@ -4060,7 +4047,7 @@
           <a:noFill/>
         </p:spPr>
         <p:txBody>
-          <a:bodyPr wrap="none" lIns="0" tIns="0" rIns="0" bIns="0" anchor="ctr">
+          <a:bodyPr wrap="none" anchor="ctr" lIns="0" rIns="0" tIns="0" bIns="0">
             <a:spAutoFit/>
           </a:bodyPr>
           <a:lstStyle/>
@@ -4099,6 +4086,106 @@
       </p:sp>
       <p:sp>
         <p:nvSpPr>
+          <p:cNvPr id="23" name="Rectangle 22"/>
+          <p:cNvSpPr/>
+          <p:nvPr/>
+        </p:nvSpPr>
+        <p:spPr>
+          <a:xfrm>
+            <a:off x="5874105" y="5166360"/>
+            <a:ext cx="2924251" cy="347472"/>
+          </a:xfrm>
+          <a:prstGeom prst="rect">
+            <a:avLst/>
+          </a:prstGeom>
+          <a:solidFill>
+            <a:srgbClr val="FFFFFF"/>
+          </a:solidFill>
+          <a:ln w="9525">
+            <a:solidFill>
+              <a:srgbClr val="D2D2CF"/>
+            </a:solidFill>
+          </a:ln>
+          <a:effectLst/>
+        </p:spPr>
+        <p:style>
+          <a:lnRef idx="1">
+            <a:schemeClr val="accent1"/>
+          </a:lnRef>
+          <a:fillRef idx="3">
+            <a:schemeClr val="accent1"/>
+          </a:fillRef>
+          <a:effectRef idx="2">
+            <a:schemeClr val="accent1"/>
+          </a:effectRef>
+          <a:fontRef idx="minor">
+            <a:schemeClr val="lt1"/>
+          </a:fontRef>
+        </p:style>
+        <p:txBody>
+          <a:bodyPr rtlCol="0" anchor="ctr"/>
+          <a:lstStyle/>
+          <a:p>
+            <a:pPr algn="ctr"/>
+          </a:p>
+        </p:txBody>
+      </p:sp>
+      <p:sp>
+        <p:nvSpPr>
+          <p:cNvPr id="24" name="TextBox 23"/>
+          <p:cNvSpPr txBox="1"/>
+          <p:nvPr/>
+        </p:nvSpPr>
+        <p:spPr>
+          <a:xfrm>
+            <a:off x="6011265" y="5166360"/>
+            <a:ext cx="2649931" cy="347472"/>
+          </a:xfrm>
+          <a:prstGeom prst="rect">
+            <a:avLst/>
+          </a:prstGeom>
+          <a:noFill/>
+        </p:spPr>
+        <p:txBody>
+          <a:bodyPr wrap="none" anchor="ctr" lIns="0" rIns="0" tIns="0" bIns="0">
+            <a:spAutoFit/>
+          </a:bodyPr>
+          <a:lstStyle/>
+          <a:p>
+            <a:pPr algn="l">
+              <a:lnSpc>
+                <a:spcPct val="100000"/>
+              </a:lnSpc>
+              <a:spcBef>
+                <a:spcPts val="0"/>
+              </a:spcBef>
+              <a:spcAft>
+                <a:spcPts val="300"/>
+              </a:spcAft>
+            </a:pPr>
+            <a:r>
+              <a:rPr sz="900" b="1" i="0">
+                <a:solidFill>
+                  <a:srgbClr val="0E0E0E"/>
+                </a:solidFill>
+                <a:latin typeface="Courier New"/>
+              </a:rPr>
+              <a:t>340</a:t>
+            </a:r>
+            <a:r>
+              <a:rPr sz="900" b="0" i="0">
+                <a:solidFill>
+                  <a:srgbClr val="53565A"/>
+                </a:solidFill>
+                <a:latin typeface="Courier New"/>
+              </a:rPr>
+              <a:t> automated tests · all passing</a:t>
+            </a:r>
+          </a:p>
+        </p:txBody>
+      </p:sp>
+      <p:sp>
+        <p:nvSpPr>
           <p:cNvPr id="25" name="TextBox 24"/>
           <p:cNvSpPr txBox="1"/>
           <p:nvPr/>
@@ -4114,7 +4201,7 @@
           <a:noFill/>
         </p:spPr>
         <p:txBody>
-          <a:bodyPr wrap="square" lIns="0" tIns="0" rIns="0" bIns="0" anchor="t">
+          <a:bodyPr wrap="square" anchor="t" lIns="0" rIns="0" tIns="0" bIns="0">
             <a:spAutoFit/>
           </a:bodyPr>
           <a:lstStyle/>
@@ -4159,7 +4246,7 @@
           <a:noFill/>
         </p:spPr>
         <p:txBody>
-          <a:bodyPr wrap="square" lIns="0" tIns="0" rIns="0" bIns="0" anchor="t">
+          <a:bodyPr wrap="square" anchor="t" lIns="0" rIns="0" tIns="0" bIns="0">
             <a:spAutoFit/>
           </a:bodyPr>
           <a:lstStyle/>
@@ -4228,7 +4315,6 @@
           <a:lstStyle/>
           <a:p>
             <a:pPr algn="ctr"/>
-            <a:endParaRPr/>
           </a:p>
         </p:txBody>
       </p:sp>
@@ -4241,7 +4327,7 @@
 </file>
 
 <file path=ppt/slides/slide10.xml><?xml version="1.0" encoding="utf-8"?>
-<p:sld xmlns:a="http://schemas.openxmlformats.org/drawingml/2006/main" xmlns:r="http://schemas.openxmlformats.org/officeDocument/2006/relationships" xmlns:p="http://schemas.openxmlformats.org/presentationml/2006/main">
+<p:sld xmlns:a="http://schemas.openxmlformats.org/drawingml/2006/main" xmlns:p="http://schemas.openxmlformats.org/presentationml/2006/main" xmlns:r="http://schemas.openxmlformats.org/officeDocument/2006/relationships">
   <p:cSld>
     <p:spTree>
       <p:nvGrpSpPr>
@@ -4249,14 +4335,7 @@
         <p:cNvGrpSpPr/>
         <p:nvPr/>
       </p:nvGrpSpPr>
-      <p:grpSpPr>
-        <a:xfrm>
-          <a:off x="0" y="0"/>
-          <a:ext cx="0" cy="0"/>
-          <a:chOff x="0" y="0"/>
-          <a:chExt cx="0" cy="0"/>
-        </a:xfrm>
-      </p:grpSpPr>
+      <p:grpSpPr/>
       <p:sp>
         <p:nvSpPr>
           <p:cNvPr id="2" name="Rectangle 1"/>
@@ -4298,7 +4377,6 @@
           <a:lstStyle/>
           <a:p>
             <a:pPr algn="ctr"/>
-            <a:endParaRPr/>
           </a:p>
         </p:txBody>
       </p:sp>
@@ -4343,7 +4421,6 @@
           <a:lstStyle/>
           <a:p>
             <a:pPr algn="ctr"/>
-            <a:endParaRPr/>
           </a:p>
         </p:txBody>
       </p:sp>
@@ -4364,7 +4441,7 @@
           <a:noFill/>
         </p:spPr>
         <p:txBody>
-          <a:bodyPr wrap="square" lIns="0" tIns="0" rIns="0" bIns="0" anchor="t">
+          <a:bodyPr wrap="square" anchor="t" lIns="0" rIns="0" tIns="0" bIns="0">
             <a:spAutoFit/>
           </a:bodyPr>
           <a:lstStyle/>
@@ -4409,7 +4486,7 @@
           <a:noFill/>
         </p:spPr>
         <p:txBody>
-          <a:bodyPr wrap="square" lIns="0" tIns="0" rIns="0" bIns="0" anchor="t">
+          <a:bodyPr wrap="square" anchor="t" lIns="0" rIns="0" tIns="0" bIns="0">
             <a:spAutoFit/>
           </a:bodyPr>
           <a:lstStyle/>
@@ -4485,7 +4562,7 @@
           <a:noFill/>
         </p:spPr>
         <p:txBody>
-          <a:bodyPr wrap="square" lIns="0" tIns="0" rIns="0" bIns="0" anchor="t">
+          <a:bodyPr wrap="square" anchor="t" lIns="0" rIns="0" tIns="0" bIns="0">
             <a:spAutoFit/>
           </a:bodyPr>
           <a:lstStyle/>
@@ -4556,7 +4633,6 @@
           <a:lstStyle/>
           <a:p>
             <a:pPr algn="ctr"/>
-            <a:endParaRPr/>
           </a:p>
         </p:txBody>
       </p:sp>
@@ -4577,7 +4653,7 @@
           <a:noFill/>
         </p:spPr>
         <p:txBody>
-          <a:bodyPr wrap="none" lIns="0" tIns="0" rIns="0" bIns="0" anchor="ctr">
+          <a:bodyPr wrap="none" anchor="ctr" lIns="0" rIns="0" tIns="0" bIns="0">
             <a:spAutoFit/>
           </a:bodyPr>
           <a:lstStyle/>
@@ -4657,7 +4733,6 @@
           <a:lstStyle/>
           <a:p>
             <a:pPr algn="ctr"/>
-            <a:endParaRPr/>
           </a:p>
         </p:txBody>
       </p:sp>
@@ -4678,7 +4753,7 @@
           <a:noFill/>
         </p:spPr>
         <p:txBody>
-          <a:bodyPr wrap="none" lIns="0" tIns="0" rIns="0" bIns="0" anchor="ctr">
+          <a:bodyPr wrap="none" anchor="ctr" lIns="0" rIns="0" tIns="0" bIns="0">
             <a:spAutoFit/>
           </a:bodyPr>
           <a:lstStyle/>
@@ -4758,7 +4833,6 @@
           <a:lstStyle/>
           <a:p>
             <a:pPr algn="ctr"/>
-            <a:endParaRPr/>
           </a:p>
         </p:txBody>
       </p:sp>
@@ -4779,7 +4853,7 @@
           <a:noFill/>
         </p:spPr>
         <p:txBody>
-          <a:bodyPr wrap="none" lIns="0" tIns="0" rIns="0" bIns="0" anchor="ctr">
+          <a:bodyPr wrap="none" anchor="ctr" lIns="0" rIns="0" tIns="0" bIns="0">
             <a:spAutoFit/>
           </a:bodyPr>
           <a:lstStyle/>
@@ -4824,7 +4898,7 @@
           <a:noFill/>
         </p:spPr>
         <p:txBody>
-          <a:bodyPr wrap="square" lIns="0" tIns="0" rIns="0" bIns="0" anchor="t">
+          <a:bodyPr wrap="square" anchor="t" lIns="0" rIns="0" tIns="0" bIns="0">
             <a:spAutoFit/>
           </a:bodyPr>
           <a:lstStyle/>
@@ -4869,7 +4943,7 @@
           <a:noFill/>
         </p:spPr>
         <p:txBody>
-          <a:bodyPr wrap="square" lIns="0" tIns="0" rIns="0" bIns="0" anchor="t">
+          <a:bodyPr wrap="square" anchor="t" lIns="0" rIns="0" tIns="0" bIns="0">
             <a:spAutoFit/>
           </a:bodyPr>
           <a:lstStyle/>
@@ -4938,7 +5012,6 @@
           <a:lstStyle/>
           <a:p>
             <a:pPr algn="ctr"/>
-            <a:endParaRPr/>
           </a:p>
         </p:txBody>
       </p:sp>
@@ -4951,7 +5024,7 @@
 </file>
 
 <file path=ppt/slides/slide2.xml><?xml version="1.0" encoding="utf-8"?>
-<p:sld xmlns:a="http://schemas.openxmlformats.org/drawingml/2006/main" xmlns:r="http://schemas.openxmlformats.org/officeDocument/2006/relationships" xmlns:p="http://schemas.openxmlformats.org/presentationml/2006/main">
+<p:sld xmlns:a="http://schemas.openxmlformats.org/drawingml/2006/main" xmlns:p="http://schemas.openxmlformats.org/presentationml/2006/main" xmlns:r="http://schemas.openxmlformats.org/officeDocument/2006/relationships">
   <p:cSld>
     <p:spTree>
       <p:nvGrpSpPr>
@@ -4959,14 +5032,7 @@
         <p:cNvGrpSpPr/>
         <p:nvPr/>
       </p:nvGrpSpPr>
-      <p:grpSpPr>
-        <a:xfrm>
-          <a:off x="0" y="0"/>
-          <a:ext cx="0" cy="0"/>
-          <a:chOff x="0" y="0"/>
-          <a:chExt cx="0" cy="0"/>
-        </a:xfrm>
-      </p:grpSpPr>
+      <p:grpSpPr/>
       <p:sp>
         <p:nvSpPr>
           <p:cNvPr id="2" name="Rectangle 1"/>
@@ -5008,7 +5074,6 @@
           <a:lstStyle/>
           <a:p>
             <a:pPr algn="ctr"/>
-            <a:endParaRPr/>
           </a:p>
         </p:txBody>
       </p:sp>
@@ -5053,7 +5118,6 @@
           <a:lstStyle/>
           <a:p>
             <a:pPr algn="ctr"/>
-            <a:endParaRPr/>
           </a:p>
         </p:txBody>
       </p:sp>
@@ -5074,7 +5138,7 @@
           <a:noFill/>
         </p:spPr>
         <p:txBody>
-          <a:bodyPr wrap="square" lIns="0" tIns="0" rIns="0" bIns="0" anchor="t">
+          <a:bodyPr wrap="square" anchor="t" lIns="0" rIns="0" tIns="0" bIns="0">
             <a:spAutoFit/>
           </a:bodyPr>
           <a:lstStyle/>
@@ -5119,7 +5183,7 @@
           <a:noFill/>
         </p:spPr>
         <p:txBody>
-          <a:bodyPr wrap="square" lIns="0" tIns="0" rIns="0" bIns="0" anchor="t">
+          <a:bodyPr wrap="square" anchor="t" lIns="0" rIns="0" tIns="0" bIns="0">
             <a:spAutoFit/>
           </a:bodyPr>
           <a:lstStyle/>
@@ -5136,7 +5200,7 @@
               </a:spcAft>
             </a:pPr>
             <a:r>
-              <a:rPr sz="2500" b="1" i="0" dirty="0">
+              <a:rPr sz="2500" b="1" i="0">
                 <a:solidFill>
                   <a:srgbClr val="0E0E0E"/>
                 </a:solidFill>
@@ -5158,7 +5222,7 @@
               </a:spcAft>
             </a:pPr>
             <a:r>
-              <a:rPr sz="2500" b="1" i="0" dirty="0">
+              <a:rPr sz="2500" b="1" i="0">
                 <a:solidFill>
                   <a:srgbClr val="0E0E0E"/>
                 </a:solidFill>
@@ -5167,7 +5231,7 @@
               <a:t>and it quietly loses business logic</a:t>
             </a:r>
             <a:r>
-              <a:rPr sz="2500" b="1" i="0" dirty="0">
+              <a:rPr sz="2500" b="1" i="0">
                 <a:solidFill>
                   <a:srgbClr val="86BC25"/>
                 </a:solidFill>
@@ -5219,7 +5283,6 @@
           <a:lstStyle/>
           <a:p>
             <a:pPr algn="ctr"/>
-            <a:endParaRPr/>
           </a:p>
         </p:txBody>
       </p:sp>
@@ -5240,7 +5303,7 @@
           <a:noFill/>
         </p:spPr>
         <p:txBody>
-          <a:bodyPr wrap="square" lIns="0" tIns="0" rIns="0" bIns="0" anchor="t">
+          <a:bodyPr wrap="square" anchor="t" lIns="0" rIns="0" tIns="0" bIns="0">
             <a:spAutoFit/>
           </a:bodyPr>
           <a:lstStyle/>
@@ -5285,7 +5348,7 @@
           <a:noFill/>
         </p:spPr>
         <p:txBody>
-          <a:bodyPr wrap="square" lIns="0" tIns="0" rIns="0" bIns="0" anchor="t">
+          <a:bodyPr wrap="square" anchor="t" lIns="0" rIns="0" tIns="0" bIns="0">
             <a:spAutoFit/>
           </a:bodyPr>
           <a:lstStyle/>
@@ -5354,7 +5417,6 @@
           <a:lstStyle/>
           <a:p>
             <a:pPr algn="ctr"/>
-            <a:endParaRPr/>
           </a:p>
         </p:txBody>
       </p:sp>
@@ -5401,7 +5463,6 @@
           <a:lstStyle/>
           <a:p>
             <a:pPr algn="ctr"/>
-            <a:endParaRPr/>
           </a:p>
         </p:txBody>
       </p:sp>
@@ -5446,7 +5507,6 @@
           <a:lstStyle/>
           <a:p>
             <a:pPr algn="ctr"/>
-            <a:endParaRPr/>
           </a:p>
         </p:txBody>
       </p:sp>
@@ -5467,7 +5527,7 @@
           <a:noFill/>
         </p:spPr>
         <p:txBody>
-          <a:bodyPr wrap="square" lIns="0" tIns="0" rIns="0" bIns="0" anchor="t">
+          <a:bodyPr wrap="square" anchor="t" lIns="0" rIns="0" tIns="0" bIns="0">
             <a:spAutoFit/>
           </a:bodyPr>
           <a:lstStyle/>
@@ -5512,7 +5572,7 @@
           <a:noFill/>
         </p:spPr>
         <p:txBody>
-          <a:bodyPr wrap="square" lIns="0" tIns="0" rIns="0" bIns="0" anchor="t">
+          <a:bodyPr wrap="square" anchor="t" lIns="0" rIns="0" tIns="0" bIns="0">
             <a:spAutoFit/>
           </a:bodyPr>
           <a:lstStyle/>
@@ -5583,7 +5643,6 @@
           <a:lstStyle/>
           <a:p>
             <a:pPr algn="ctr"/>
-            <a:endParaRPr/>
           </a:p>
         </p:txBody>
       </p:sp>
@@ -5628,7 +5687,6 @@
           <a:lstStyle/>
           <a:p>
             <a:pPr algn="ctr"/>
-            <a:endParaRPr/>
           </a:p>
         </p:txBody>
       </p:sp>
@@ -5649,7 +5707,7 @@
           <a:noFill/>
         </p:spPr>
         <p:txBody>
-          <a:bodyPr wrap="square" lIns="0" tIns="0" rIns="0" bIns="0" anchor="t">
+          <a:bodyPr wrap="square" anchor="t" lIns="0" rIns="0" tIns="0" bIns="0">
             <a:spAutoFit/>
           </a:bodyPr>
           <a:lstStyle/>
@@ -5686,53 +5744,38 @@
         <p:spPr>
           <a:xfrm>
             <a:off x="4081271" y="3227832"/>
-            <a:ext cx="2526791" cy="844655"/>
-          </a:xfrm>
-          <a:prstGeom prst="rect">
-            <a:avLst/>
-          </a:prstGeom>
-          <a:noFill/>
-        </p:spPr>
-        <p:txBody>
-          <a:bodyPr wrap="square" lIns="0" tIns="0" rIns="0" bIns="0" anchor="t">
+            <a:ext cx="2526791" cy="2103120"/>
+          </a:xfrm>
+          <a:prstGeom prst="rect">
+            <a:avLst/>
+          </a:prstGeom>
+          <a:noFill/>
+        </p:spPr>
+        <p:txBody>
+          <a:bodyPr wrap="square" anchor="t" lIns="0" rIns="0" tIns="0" bIns="0">
             <a:spAutoFit/>
           </a:bodyPr>
           <a:lstStyle/>
           <a:p>
-            <a:pPr>
+            <a:pPr algn="l">
               <a:lnSpc>
                 <a:spcPct val="128000"/>
               </a:lnSpc>
+              <a:spcBef>
+                <a:spcPts val="0"/>
+              </a:spcBef>
               <a:spcAft>
                 <a:spcPts val="300"/>
               </a:spcAft>
             </a:pPr>
             <a:r>
-              <a:rPr sz="1100" b="0" i="0" dirty="0">
+              <a:rPr sz="1100" b="0" i="0">
                 <a:solidFill>
                   <a:srgbClr val="53565A"/>
                 </a:solidFill>
                 <a:latin typeface="Arial"/>
               </a:rPr>
-              <a:t>It needs senior </a:t>
-            </a:r>
-            <a:r>
-              <a:rPr lang="en-US" sz="1100" dirty="0">
-                <a:solidFill>
-                  <a:srgbClr val="53565A"/>
-                </a:solidFill>
-                <a:latin typeface="Arial"/>
-              </a:rPr>
-              <a:t>engineers </a:t>
-            </a:r>
-            <a:r>
-              <a:rPr sz="1100" b="0" i="0" dirty="0">
-                <a:solidFill>
-                  <a:srgbClr val="53565A"/>
-                </a:solidFill>
-                <a:latin typeface="Arial"/>
-              </a:rPr>
-              <a:t>in both Hybris and Salesforce — one of the scarcest, most expensive skill combinations in the market.</a:t>
+              <a:t>It needs engineers senior in both Hybris and Salesforce — one of the scarcest, most expensive skill combinations in the market.</a:t>
             </a:r>
           </a:p>
         </p:txBody>
@@ -5780,7 +5823,6 @@
           <a:lstStyle/>
           <a:p>
             <a:pPr algn="ctr"/>
-            <a:endParaRPr/>
           </a:p>
         </p:txBody>
       </p:sp>
@@ -5825,7 +5867,6 @@
           <a:lstStyle/>
           <a:p>
             <a:pPr algn="ctr"/>
-            <a:endParaRPr/>
           </a:p>
         </p:txBody>
       </p:sp>
@@ -5846,7 +5887,7 @@
           <a:noFill/>
         </p:spPr>
         <p:txBody>
-          <a:bodyPr wrap="square" lIns="0" tIns="0" rIns="0" bIns="0" anchor="t">
+          <a:bodyPr wrap="square" anchor="t" lIns="0" rIns="0" tIns="0" bIns="0">
             <a:spAutoFit/>
           </a:bodyPr>
           <a:lstStyle/>
@@ -5891,7 +5932,7 @@
           <a:noFill/>
         </p:spPr>
         <p:txBody>
-          <a:bodyPr wrap="square" lIns="0" tIns="0" rIns="0" bIns="0" anchor="t">
+          <a:bodyPr wrap="square" anchor="t" lIns="0" rIns="0" tIns="0" bIns="0">
             <a:spAutoFit/>
           </a:bodyPr>
           <a:lstStyle/>
@@ -5960,7 +6001,6 @@
           <a:lstStyle/>
           <a:p>
             <a:pPr algn="ctr"/>
-            <a:endParaRPr/>
           </a:p>
         </p:txBody>
       </p:sp>
@@ -6005,7 +6045,6 @@
           <a:lstStyle/>
           <a:p>
             <a:pPr algn="ctr"/>
-            <a:endParaRPr/>
           </a:p>
         </p:txBody>
       </p:sp>
@@ -6026,7 +6065,7 @@
           <a:noFill/>
         </p:spPr>
         <p:txBody>
-          <a:bodyPr wrap="square" lIns="0" tIns="0" rIns="0" bIns="0" anchor="t">
+          <a:bodyPr wrap="square" anchor="t" lIns="0" rIns="0" tIns="0" bIns="0">
             <a:spAutoFit/>
           </a:bodyPr>
           <a:lstStyle/>
@@ -6085,7 +6124,7 @@
 </file>
 
 <file path=ppt/slides/slide3.xml><?xml version="1.0" encoding="utf-8"?>
-<p:sld xmlns:a="http://schemas.openxmlformats.org/drawingml/2006/main" xmlns:r="http://schemas.openxmlformats.org/officeDocument/2006/relationships" xmlns:p="http://schemas.openxmlformats.org/presentationml/2006/main">
+<p:sld xmlns:a="http://schemas.openxmlformats.org/drawingml/2006/main" xmlns:p="http://schemas.openxmlformats.org/presentationml/2006/main" xmlns:r="http://schemas.openxmlformats.org/officeDocument/2006/relationships">
   <p:cSld>
     <p:spTree>
       <p:nvGrpSpPr>
@@ -6093,14 +6132,7 @@
         <p:cNvGrpSpPr/>
         <p:nvPr/>
       </p:nvGrpSpPr>
-      <p:grpSpPr>
-        <a:xfrm>
-          <a:off x="0" y="0"/>
-          <a:ext cx="0" cy="0"/>
-          <a:chOff x="0" y="0"/>
-          <a:chExt cx="0" cy="0"/>
-        </a:xfrm>
-      </p:grpSpPr>
+      <p:grpSpPr/>
       <p:sp>
         <p:nvSpPr>
           <p:cNvPr id="2" name="Rectangle 1"/>
@@ -6142,7 +6174,6 @@
           <a:lstStyle/>
           <a:p>
             <a:pPr algn="ctr"/>
-            <a:endParaRPr/>
           </a:p>
         </p:txBody>
       </p:sp>
@@ -6187,7 +6218,6 @@
           <a:lstStyle/>
           <a:p>
             <a:pPr algn="ctr"/>
-            <a:endParaRPr/>
           </a:p>
         </p:txBody>
       </p:sp>
@@ -6208,7 +6238,7 @@
           <a:noFill/>
         </p:spPr>
         <p:txBody>
-          <a:bodyPr wrap="square" lIns="0" tIns="0" rIns="0" bIns="0" anchor="t">
+          <a:bodyPr wrap="square" anchor="t" lIns="0" rIns="0" tIns="0" bIns="0">
             <a:spAutoFit/>
           </a:bodyPr>
           <a:lstStyle/>
@@ -6253,7 +6283,7 @@
           <a:noFill/>
         </p:spPr>
         <p:txBody>
-          <a:bodyPr wrap="square" lIns="0" tIns="0" rIns="0" bIns="0" anchor="t">
+          <a:bodyPr wrap="square" anchor="t" lIns="0" rIns="0" tIns="0" bIns="0">
             <a:spAutoFit/>
           </a:bodyPr>
           <a:lstStyle/>
@@ -6353,7 +6383,6 @@
           <a:lstStyle/>
           <a:p>
             <a:pPr algn="ctr"/>
-            <a:endParaRPr/>
           </a:p>
         </p:txBody>
       </p:sp>
@@ -6374,7 +6403,7 @@
           <a:noFill/>
         </p:spPr>
         <p:txBody>
-          <a:bodyPr wrap="square" lIns="0" tIns="0" rIns="0" bIns="0" anchor="t">
+          <a:bodyPr wrap="square" anchor="t" lIns="0" rIns="0" tIns="0" bIns="0">
             <a:spAutoFit/>
           </a:bodyPr>
           <a:lstStyle/>
@@ -6419,7 +6448,7 @@
           <a:noFill/>
         </p:spPr>
         <p:txBody>
-          <a:bodyPr wrap="square" lIns="0" tIns="0" rIns="0" bIns="0" anchor="t">
+          <a:bodyPr wrap="square" anchor="t" lIns="0" rIns="0" tIns="0" bIns="0">
             <a:spAutoFit/>
           </a:bodyPr>
           <a:lstStyle/>
@@ -6488,7 +6517,6 @@
           <a:lstStyle/>
           <a:p>
             <a:pPr algn="ctr"/>
-            <a:endParaRPr/>
           </a:p>
         </p:txBody>
       </p:sp>
@@ -6535,7 +6563,6 @@
           <a:lstStyle/>
           <a:p>
             <a:pPr algn="ctr"/>
-            <a:endParaRPr/>
           </a:p>
         </p:txBody>
       </p:sp>
@@ -6580,7 +6607,6 @@
           <a:lstStyle/>
           <a:p>
             <a:pPr algn="ctr"/>
-            <a:endParaRPr/>
           </a:p>
         </p:txBody>
       </p:sp>
@@ -6601,7 +6627,7 @@
           <a:noFill/>
         </p:spPr>
         <p:txBody>
-          <a:bodyPr wrap="square" lIns="0" tIns="0" rIns="0" bIns="0" anchor="t">
+          <a:bodyPr wrap="square" anchor="t" lIns="0" rIns="0" tIns="0" bIns="0">
             <a:spAutoFit/>
           </a:bodyPr>
           <a:lstStyle/>
@@ -6646,7 +6672,7 @@
           <a:noFill/>
         </p:spPr>
         <p:txBody>
-          <a:bodyPr wrap="square" lIns="0" tIns="0" rIns="0" bIns="0" anchor="t">
+          <a:bodyPr wrap="square" anchor="t" lIns="0" rIns="0" tIns="0" bIns="0">
             <a:spAutoFit/>
           </a:bodyPr>
           <a:lstStyle/>
@@ -6817,7 +6843,6 @@
           <a:lstStyle/>
           <a:p>
             <a:pPr algn="ctr"/>
-            <a:endParaRPr/>
           </a:p>
         </p:txBody>
       </p:sp>
@@ -6838,7 +6863,7 @@
           <a:noFill/>
         </p:spPr>
         <p:txBody>
-          <a:bodyPr wrap="square" lIns="0" tIns="0" rIns="0" bIns="0" anchor="ctr">
+          <a:bodyPr wrap="square" anchor="ctr" lIns="0" rIns="0" tIns="0" bIns="0">
             <a:spAutoFit/>
           </a:bodyPr>
           <a:lstStyle/>
@@ -6908,7 +6933,6 @@
           <a:lstStyle/>
           <a:p>
             <a:pPr algn="ctr"/>
-            <a:endParaRPr/>
           </a:p>
         </p:txBody>
       </p:sp>
@@ -6929,7 +6953,7 @@
           <a:noFill/>
         </p:spPr>
         <p:txBody>
-          <a:bodyPr wrap="square" lIns="0" tIns="0" rIns="0" bIns="0" anchor="t">
+          <a:bodyPr wrap="square" anchor="t" lIns="0" rIns="0" tIns="0" bIns="0">
             <a:spAutoFit/>
           </a:bodyPr>
           <a:lstStyle/>
@@ -7000,7 +7024,6 @@
           <a:lstStyle/>
           <a:p>
             <a:pPr algn="ctr"/>
-            <a:endParaRPr/>
           </a:p>
         </p:txBody>
       </p:sp>
@@ -7045,7 +7068,6 @@
           <a:lstStyle/>
           <a:p>
             <a:pPr algn="ctr"/>
-            <a:endParaRPr/>
           </a:p>
         </p:txBody>
       </p:sp>
@@ -7066,7 +7088,7 @@
           <a:noFill/>
         </p:spPr>
         <p:txBody>
-          <a:bodyPr wrap="square" lIns="0" tIns="0" rIns="0" bIns="0" anchor="t">
+          <a:bodyPr wrap="square" anchor="t" lIns="0" rIns="0" tIns="0" bIns="0">
             <a:spAutoFit/>
           </a:bodyPr>
           <a:lstStyle/>
@@ -7111,7 +7133,7 @@
           <a:noFill/>
         </p:spPr>
         <p:txBody>
-          <a:bodyPr wrap="square" lIns="0" tIns="0" rIns="0" bIns="0" anchor="t">
+          <a:bodyPr wrap="square" anchor="t" lIns="0" rIns="0" tIns="0" bIns="0">
             <a:spAutoFit/>
           </a:bodyPr>
           <a:lstStyle/>
@@ -7205,7 +7227,7 @@
                 </a:solidFill>
                 <a:latin typeface="Arial"/>
               </a:rPr>
-              <a:t>Data model, data &amp; schedules — migrated</a:t>
+              <a:t>Data model, data, schedules &amp; LWC — migrated</a:t>
             </a:r>
           </a:p>
           <a:p>
@@ -7236,7 +7258,38 @@
                 </a:solidFill>
                 <a:latin typeface="Arial"/>
               </a:rPr>
-              <a:t>Confidence report: what to trust, what to review</a:t>
+              <a:t>The evidence: every business rule tracked, your own tests replayed</a:t>
+            </a:r>
+          </a:p>
+          <a:p>
+            <a:pPr algn="l">
+              <a:lnSpc>
+                <a:spcPct val="120000"/>
+              </a:lnSpc>
+              <a:spcBef>
+                <a:spcPts val="0"/>
+              </a:spcBef>
+              <a:spcAft>
+                <a:spcPts val="800"/>
+              </a:spcAft>
+            </a:pPr>
+            <a:r>
+              <a:rPr sz="1150" b="0" i="0">
+                <a:solidFill>
+                  <a:srgbClr val="007CB0"/>
+                </a:solidFill>
+                <a:latin typeface="Arial"/>
+              </a:rPr>
+              <a:t>—  </a:t>
+            </a:r>
+            <a:r>
+              <a:rPr sz="1150" b="0" i="0">
+                <a:solidFill>
+                  <a:srgbClr val="53565A"/>
+                </a:solidFill>
+                <a:latin typeface="Arial"/>
+              </a:rPr>
+              <a:t>Sign-off contract — and what it could NOT prove</a:t>
             </a:r>
           </a:p>
         </p:txBody>
@@ -7249,8 +7302,8 @@
         </p:nvSpPr>
         <p:spPr>
           <a:xfrm>
-            <a:off x="603504" y="6359979"/>
-            <a:ext cx="9482328" cy="808917"/>
+            <a:off x="603504" y="6455664"/>
+            <a:ext cx="9482328" cy="713232"/>
           </a:xfrm>
           <a:prstGeom prst="rect">
             <a:avLst/>
@@ -7282,7 +7335,6 @@
           <a:lstStyle/>
           <a:p>
             <a:pPr algn="ctr"/>
-            <a:endParaRPr/>
           </a:p>
         </p:txBody>
       </p:sp>
@@ -7294,8 +7346,8 @@
         </p:nvSpPr>
         <p:spPr>
           <a:xfrm>
-            <a:off x="612646" y="6359979"/>
-            <a:ext cx="54865" cy="808917"/>
+            <a:off x="603504" y="6455664"/>
+            <a:ext cx="64008" cy="713232"/>
           </a:xfrm>
           <a:prstGeom prst="rect">
             <a:avLst/>
@@ -7327,7 +7379,6 @@
           <a:lstStyle/>
           <a:p>
             <a:pPr algn="ctr"/>
-            <a:endParaRPr/>
           </a:p>
         </p:txBody>
       </p:sp>
@@ -7339,7 +7390,7 @@
         </p:nvSpPr>
         <p:spPr>
           <a:xfrm>
-            <a:off x="850392" y="6483858"/>
+            <a:off x="859536" y="6565392"/>
             <a:ext cx="8979407" cy="512064"/>
           </a:xfrm>
           <a:prstGeom prst="rect">
@@ -7348,7 +7399,7 @@
           <a:noFill/>
         </p:spPr>
         <p:txBody>
-          <a:bodyPr wrap="square" lIns="0" tIns="0" rIns="0" bIns="0" anchor="t">
+          <a:bodyPr wrap="square" anchor="t" lIns="0" rIns="0" tIns="0" bIns="0">
             <a:spAutoFit/>
           </a:bodyPr>
           <a:lstStyle/>
@@ -7365,7 +7416,7 @@
               </a:spcAft>
             </a:pPr>
             <a:r>
-              <a:rPr sz="850" b="1" i="0" spc="140" dirty="0">
+              <a:rPr sz="850" b="1" i="0" spc="140">
                 <a:solidFill>
                   <a:srgbClr val="046A38"/>
                 </a:solidFill>
@@ -7387,7 +7438,7 @@
               </a:spcAft>
             </a:pPr>
             <a:r>
-              <a:rPr sz="1150" b="0" i="0" dirty="0">
+              <a:rPr sz="1150" b="0" i="0">
                 <a:solidFill>
                   <a:srgbClr val="222427"/>
                 </a:solidFill>
@@ -7407,7 +7458,7 @@
 </file>
 
 <file path=ppt/slides/slide4.xml><?xml version="1.0" encoding="utf-8"?>
-<p:sld xmlns:a="http://schemas.openxmlformats.org/drawingml/2006/main" xmlns:r="http://schemas.openxmlformats.org/officeDocument/2006/relationships" xmlns:p="http://schemas.openxmlformats.org/presentationml/2006/main">
+<p:sld xmlns:a="http://schemas.openxmlformats.org/drawingml/2006/main" xmlns:p="http://schemas.openxmlformats.org/presentationml/2006/main" xmlns:r="http://schemas.openxmlformats.org/officeDocument/2006/relationships">
   <p:cSld>
     <p:spTree>
       <p:nvGrpSpPr>
@@ -7415,14 +7466,7 @@
         <p:cNvGrpSpPr/>
         <p:nvPr/>
       </p:nvGrpSpPr>
-      <p:grpSpPr>
-        <a:xfrm>
-          <a:off x="0" y="0"/>
-          <a:ext cx="0" cy="0"/>
-          <a:chOff x="0" y="0"/>
-          <a:chExt cx="0" cy="0"/>
-        </a:xfrm>
-      </p:grpSpPr>
+      <p:grpSpPr/>
       <p:sp>
         <p:nvSpPr>
           <p:cNvPr id="2" name="Rectangle 1"/>
@@ -7464,7 +7508,6 @@
           <a:lstStyle/>
           <a:p>
             <a:pPr algn="ctr"/>
-            <a:endParaRPr/>
           </a:p>
         </p:txBody>
       </p:sp>
@@ -7509,7 +7552,6 @@
           <a:lstStyle/>
           <a:p>
             <a:pPr algn="ctr"/>
-            <a:endParaRPr/>
           </a:p>
         </p:txBody>
       </p:sp>
@@ -7530,7 +7572,7 @@
           <a:noFill/>
         </p:spPr>
         <p:txBody>
-          <a:bodyPr wrap="square" lIns="0" tIns="0" rIns="0" bIns="0" anchor="t">
+          <a:bodyPr wrap="square" anchor="t" lIns="0" rIns="0" tIns="0" bIns="0">
             <a:spAutoFit/>
           </a:bodyPr>
           <a:lstStyle/>
@@ -7566,7 +7608,7 @@
         </p:nvSpPr>
         <p:spPr>
           <a:xfrm>
-            <a:off x="603504" y="831124"/>
+            <a:off x="603504" y="822960"/>
             <a:ext cx="9482328" cy="960120"/>
           </a:xfrm>
           <a:prstGeom prst="rect">
@@ -7575,7 +7617,7 @@
           <a:noFill/>
         </p:spPr>
         <p:txBody>
-          <a:bodyPr wrap="square" lIns="0" tIns="0" rIns="0" bIns="0" anchor="t">
+          <a:bodyPr wrap="square" anchor="t" lIns="0" rIns="0" tIns="0" bIns="0">
             <a:spAutoFit/>
           </a:bodyPr>
           <a:lstStyle/>
@@ -7598,7 +7640,7 @@
                 </a:solidFill>
                 <a:latin typeface="Arial"/>
               </a:rPr>
-              <a:t>Four layers, one engine</a:t>
+              <a:t>Three surfaces, one engine</a:t>
             </a:r>
             <a:r>
               <a:rPr sz="3000" b="1" i="0">
@@ -7653,7 +7695,6 @@
           <a:lstStyle/>
           <a:p>
             <a:pPr algn="ctr"/>
-            <a:endParaRPr/>
           </a:p>
         </p:txBody>
       </p:sp>
@@ -7674,7 +7715,7 @@
           <a:noFill/>
         </p:spPr>
         <p:txBody>
-          <a:bodyPr wrap="square" lIns="0" tIns="0" rIns="0" bIns="0" anchor="t">
+          <a:bodyPr wrap="square" anchor="t" lIns="0" rIns="0" tIns="0" bIns="0">
             <a:spAutoFit/>
           </a:bodyPr>
           <a:lstStyle/>
@@ -7719,7 +7760,7 @@
           <a:noFill/>
         </p:spPr>
         <p:txBody>
-          <a:bodyPr wrap="square" lIns="0" tIns="0" rIns="0" bIns="0" anchor="t">
+          <a:bodyPr wrap="square" anchor="t" lIns="0" rIns="0" tIns="0" bIns="0">
             <a:spAutoFit/>
           </a:bodyPr>
           <a:lstStyle/>
@@ -7788,7 +7829,6 @@
           <a:lstStyle/>
           <a:p>
             <a:pPr algn="ctr"/>
-            <a:endParaRPr/>
           </a:p>
         </p:txBody>
       </p:sp>
@@ -7835,7 +7875,6 @@
           <a:lstStyle/>
           <a:p>
             <a:pPr algn="ctr"/>
-            <a:endParaRPr/>
           </a:p>
         </p:txBody>
       </p:sp>
@@ -7880,7 +7919,6 @@
           <a:lstStyle/>
           <a:p>
             <a:pPr algn="ctr"/>
-            <a:endParaRPr/>
           </a:p>
         </p:txBody>
       </p:sp>
@@ -7901,7 +7939,7 @@
           <a:noFill/>
         </p:spPr>
         <p:txBody>
-          <a:bodyPr wrap="square" lIns="0" tIns="0" rIns="0" bIns="0" anchor="ctr">
+          <a:bodyPr wrap="square" anchor="ctr" lIns="0" rIns="0" tIns="0" bIns="0">
             <a:spAutoFit/>
           </a:bodyPr>
           <a:lstStyle/>
@@ -7924,7 +7962,7 @@
                 </a:solidFill>
                 <a:latin typeface="Courier New"/>
               </a:rPr>
-              <a:t>INTERFACES</a:t>
+              <a:t>SURFACES</a:t>
             </a:r>
           </a:p>
         </p:txBody>
@@ -7972,7 +8010,6 @@
           <a:lstStyle/>
           <a:p>
             <a:pPr algn="ctr"/>
-            <a:endParaRPr/>
           </a:p>
         </p:txBody>
       </p:sp>
@@ -7993,7 +8030,7 @@
           <a:noFill/>
         </p:spPr>
         <p:txBody>
-          <a:bodyPr wrap="square" lIns="0" tIns="0" rIns="0" bIns="0" anchor="ctr">
+          <a:bodyPr wrap="square" anchor="ctr" lIns="0" rIns="0" tIns="0" bIns="0">
             <a:spAutoFit/>
           </a:bodyPr>
           <a:lstStyle/>
@@ -8016,7 +8053,7 @@
                 </a:solidFill>
                 <a:latin typeface="Arial"/>
               </a:rPr>
-              <a:t>VS Code extension — right-click</a:t>
+              <a:t>Web cockpit — review as it runs</a:t>
             </a:r>
           </a:p>
         </p:txBody>
@@ -8030,7 +8067,7 @@
         <p:spPr>
           <a:xfrm>
             <a:off x="4824374" y="2167128"/>
-            <a:ext cx="1704441" cy="347472"/>
+            <a:ext cx="1523390" cy="347472"/>
           </a:xfrm>
           <a:prstGeom prst="rect">
             <a:avLst/>
@@ -8064,7 +8101,6 @@
           <a:lstStyle/>
           <a:p>
             <a:pPr algn="ctr"/>
-            <a:endParaRPr/>
           </a:p>
         </p:txBody>
       </p:sp>
@@ -8077,15 +8113,15 @@
         <p:spPr>
           <a:xfrm>
             <a:off x="4915814" y="2167128"/>
-            <a:ext cx="1521561" cy="347472"/>
-          </a:xfrm>
-          <a:prstGeom prst="rect">
-            <a:avLst/>
-          </a:prstGeom>
-          <a:noFill/>
-        </p:spPr>
-        <p:txBody>
-          <a:bodyPr wrap="square" lIns="0" tIns="0" rIns="0" bIns="0" anchor="ctr">
+            <a:ext cx="1340510" cy="347472"/>
+          </a:xfrm>
+          <a:prstGeom prst="rect">
+            <a:avLst/>
+          </a:prstGeom>
+          <a:noFill/>
+        </p:spPr>
+        <p:txBody>
+          <a:bodyPr wrap="square" anchor="ctr" lIns="0" rIns="0" tIns="0" bIns="0">
             <a:spAutoFit/>
           </a:bodyPr>
           <a:lstStyle/>
@@ -8108,7 +8144,7 @@
                 </a:solidFill>
                 <a:latin typeface="Arial"/>
               </a:rPr>
-              <a:t>Command line — for CI/CD</a:t>
+              <a:t>VS Code — right-click</a:t>
             </a:r>
           </a:p>
         </p:txBody>
@@ -8121,8 +8157,8 @@
         </p:nvSpPr>
         <p:spPr>
           <a:xfrm>
-            <a:off x="6656832" y="2167128"/>
-            <a:ext cx="1825142" cy="347472"/>
+            <a:off x="6475780" y="2167128"/>
+            <a:ext cx="1161288" cy="347472"/>
           </a:xfrm>
           <a:prstGeom prst="rect">
             <a:avLst/>
@@ -8156,7 +8192,6 @@
           <a:lstStyle/>
           <a:p>
             <a:pPr algn="ctr"/>
-            <a:endParaRPr/>
           </a:p>
         </p:txBody>
       </p:sp>
@@ -8168,16 +8203,16 @@
         </p:nvSpPr>
         <p:spPr>
           <a:xfrm>
-            <a:off x="6748272" y="2167128"/>
-            <a:ext cx="1642262" cy="347472"/>
-          </a:xfrm>
-          <a:prstGeom prst="rect">
-            <a:avLst/>
-          </a:prstGeom>
-          <a:noFill/>
-        </p:spPr>
-        <p:txBody>
-          <a:bodyPr wrap="square" lIns="0" tIns="0" rIns="0" bIns="0" anchor="ctr">
+            <a:off x="6567220" y="2167128"/>
+            <a:ext cx="978408" cy="347472"/>
+          </a:xfrm>
+          <a:prstGeom prst="rect">
+            <a:avLst/>
+          </a:prstGeom>
+          <a:noFill/>
+        </p:spPr>
+        <p:txBody>
+          <a:bodyPr wrap="square" anchor="ctr" lIns="0" rIns="0" tIns="0" bIns="0">
             <a:spAutoFit/>
           </a:bodyPr>
           <a:lstStyle/>
@@ -8200,7 +8235,7 @@
                 </a:solidFill>
                 <a:latin typeface="Arial"/>
               </a:rPr>
-              <a:t>both drive the same engine</a:t>
+              <a:t>CLI — for CI/CD</a:t>
             </a:r>
           </a:p>
         </p:txBody>
@@ -8222,7 +8257,7 @@
           <a:noFill/>
         </p:spPr>
         <p:txBody>
-          <a:bodyPr wrap="square" lIns="0" tIns="0" rIns="0" bIns="0" anchor="t">
+          <a:bodyPr wrap="square" anchor="t" lIns="0" rIns="0" tIns="0" bIns="0">
             <a:spAutoFit/>
           </a:bodyPr>
           <a:lstStyle/>
@@ -8293,7 +8328,6 @@
           <a:lstStyle/>
           <a:p>
             <a:pPr algn="ctr"/>
-            <a:endParaRPr/>
           </a:p>
         </p:txBody>
       </p:sp>
@@ -8338,7 +8372,6 @@
           <a:lstStyle/>
           <a:p>
             <a:pPr algn="ctr"/>
-            <a:endParaRPr/>
           </a:p>
         </p:txBody>
       </p:sp>
@@ -8359,7 +8392,7 @@
           <a:noFill/>
         </p:spPr>
         <p:txBody>
-          <a:bodyPr wrap="square" lIns="0" tIns="0" rIns="0" bIns="0" anchor="ctr">
+          <a:bodyPr wrap="square" anchor="ctr" lIns="0" rIns="0" tIns="0" bIns="0">
             <a:spAutoFit/>
           </a:bodyPr>
           <a:lstStyle/>
@@ -8396,7 +8429,7 @@
         <p:spPr>
           <a:xfrm>
             <a:off x="2569464" y="3172968"/>
-            <a:ext cx="3394252" cy="347472"/>
+            <a:ext cx="3092500" cy="347472"/>
           </a:xfrm>
           <a:prstGeom prst="rect">
             <a:avLst/>
@@ -8430,7 +8463,6 @@
           <a:lstStyle/>
           <a:p>
             <a:pPr algn="ctr"/>
-            <a:endParaRPr/>
           </a:p>
         </p:txBody>
       </p:sp>
@@ -8443,15 +8475,15 @@
         <p:spPr>
           <a:xfrm>
             <a:off x="2660904" y="3172968"/>
-            <a:ext cx="3211372" cy="347472"/>
-          </a:xfrm>
-          <a:prstGeom prst="rect">
-            <a:avLst/>
-          </a:prstGeom>
-          <a:noFill/>
-        </p:spPr>
-        <p:txBody>
-          <a:bodyPr wrap="square" lIns="0" tIns="0" rIns="0" bIns="0" anchor="ctr">
+            <a:ext cx="2909620" cy="347472"/>
+          </a:xfrm>
+          <a:prstGeom prst="rect">
+            <a:avLst/>
+          </a:prstGeom>
+          <a:noFill/>
+        </p:spPr>
+        <p:txBody>
+          <a:bodyPr wrap="square" anchor="ctr" lIns="0" rIns="0" tIns="0" bIns="0">
             <a:spAutoFit/>
           </a:bodyPr>
           <a:lstStyle/>
@@ -8474,7 +8506,7 @@
                 </a:solidFill>
                 <a:latin typeface="Arial"/>
               </a:rPr>
-              <a:t>Agentic mode — Planner · Builder · Critic · Verifier</a:t>
+              <a:t>Agentic — Planner · Builder · Critic · Verifier</a:t>
             </a:r>
           </a:p>
         </p:txBody>
@@ -8487,8 +8519,8 @@
         </p:nvSpPr>
         <p:spPr>
           <a:xfrm>
-            <a:off x="6091732" y="3172968"/>
-            <a:ext cx="2488996" cy="347472"/>
+            <a:off x="5789980" y="3172968"/>
+            <a:ext cx="1704441" cy="347472"/>
           </a:xfrm>
           <a:prstGeom prst="rect">
             <a:avLst/>
@@ -8522,7 +8554,6 @@
           <a:lstStyle/>
           <a:p>
             <a:pPr algn="ctr"/>
-            <a:endParaRPr/>
           </a:p>
         </p:txBody>
       </p:sp>
@@ -8534,16 +8565,16 @@
         </p:nvSpPr>
         <p:spPr>
           <a:xfrm>
-            <a:off x="6183172" y="3172968"/>
-            <a:ext cx="2306116" cy="347472"/>
-          </a:xfrm>
-          <a:prstGeom prst="rect">
-            <a:avLst/>
-          </a:prstGeom>
-          <a:noFill/>
-        </p:spPr>
-        <p:txBody>
-          <a:bodyPr wrap="square" lIns="0" tIns="0" rIns="0" bIns="0" anchor="ctr">
+            <a:off x="5881420" y="3172968"/>
+            <a:ext cx="1521561" cy="347472"/>
+          </a:xfrm>
+          <a:prstGeom prst="rect">
+            <a:avLst/>
+          </a:prstGeom>
+          <a:noFill/>
+        </p:spPr>
+        <p:txBody>
+          <a:bodyPr wrap="square" anchor="ctr" lIns="0" rIns="0" tIns="0" bIns="0">
             <a:spAutoFit/>
           </a:bodyPr>
           <a:lstStyle/>
@@ -8566,6 +8597,97 @@
                 </a:solidFill>
                 <a:latin typeface="Arial"/>
               </a:rPr>
+              <a:t>Three human review gates</a:t>
+            </a:r>
+          </a:p>
+        </p:txBody>
+      </p:sp>
+      <p:sp>
+        <p:nvSpPr>
+          <p:cNvPr id="27" name="Rectangle 26"/>
+          <p:cNvSpPr/>
+          <p:nvPr/>
+        </p:nvSpPr>
+        <p:spPr>
+          <a:xfrm>
+            <a:off x="7622438" y="3172968"/>
+            <a:ext cx="2488996" cy="347472"/>
+          </a:xfrm>
+          <a:prstGeom prst="rect">
+            <a:avLst/>
+          </a:prstGeom>
+          <a:solidFill>
+            <a:srgbClr val="F3F3F1"/>
+          </a:solidFill>
+          <a:ln w="6350">
+            <a:solidFill>
+              <a:srgbClr val="D2D2CF"/>
+            </a:solidFill>
+          </a:ln>
+          <a:effectLst/>
+        </p:spPr>
+        <p:style>
+          <a:lnRef idx="1">
+            <a:schemeClr val="accent1"/>
+          </a:lnRef>
+          <a:fillRef idx="3">
+            <a:schemeClr val="accent1"/>
+          </a:fillRef>
+          <a:effectRef idx="2">
+            <a:schemeClr val="accent1"/>
+          </a:effectRef>
+          <a:fontRef idx="minor">
+            <a:schemeClr val="lt1"/>
+          </a:fontRef>
+        </p:style>
+        <p:txBody>
+          <a:bodyPr rtlCol="0" anchor="ctr"/>
+          <a:lstStyle/>
+          <a:p>
+            <a:pPr algn="ctr"/>
+          </a:p>
+        </p:txBody>
+      </p:sp>
+      <p:sp>
+        <p:nvSpPr>
+          <p:cNvPr id="28" name="TextBox 27"/>
+          <p:cNvSpPr txBox="1"/>
+          <p:nvPr/>
+        </p:nvSpPr>
+        <p:spPr>
+          <a:xfrm>
+            <a:off x="7713878" y="3172968"/>
+            <a:ext cx="2306116" cy="347472"/>
+          </a:xfrm>
+          <a:prstGeom prst="rect">
+            <a:avLst/>
+          </a:prstGeom>
+          <a:noFill/>
+        </p:spPr>
+        <p:txBody>
+          <a:bodyPr wrap="square" anchor="ctr" lIns="0" rIns="0" tIns="0" bIns="0">
+            <a:spAutoFit/>
+          </a:bodyPr>
+          <a:lstStyle/>
+          <a:p>
+            <a:pPr algn="l">
+              <a:lnSpc>
+                <a:spcPct val="108000"/>
+              </a:lnSpc>
+              <a:spcBef>
+                <a:spcPts val="0"/>
+              </a:spcBef>
+              <a:spcAft>
+                <a:spcPts val="300"/>
+              </a:spcAft>
+            </a:pPr>
+            <a:r>
+              <a:rPr sz="950" b="1" i="0">
+                <a:solidFill>
+                  <a:srgbClr val="0E0E0E"/>
+                </a:solidFill>
+                <a:latin typeface="Arial"/>
+              </a:rPr>
               <a:t>Linear mode — fixed 10-stage pipeline</a:t>
             </a:r>
           </a:p>
@@ -8573,7 +8695,7 @@
       </p:sp>
       <p:sp>
         <p:nvSpPr>
-          <p:cNvPr id="27" name="TextBox 26"/>
+          <p:cNvPr id="29" name="TextBox 28"/>
           <p:cNvSpPr txBox="1"/>
           <p:nvPr/>
         </p:nvSpPr>
@@ -8588,7 +8710,7 @@
           <a:noFill/>
         </p:spPr>
         <p:txBody>
-          <a:bodyPr wrap="square" lIns="0" tIns="0" rIns="0" bIns="0" anchor="t">
+          <a:bodyPr wrap="square" anchor="t" lIns="0" rIns="0" tIns="0" bIns="0">
             <a:spAutoFit/>
           </a:bodyPr>
           <a:lstStyle/>
@@ -8618,7 +8740,7 @@
       </p:sp>
       <p:sp>
         <p:nvSpPr>
-          <p:cNvPr id="28" name="Rectangle 27"/>
+          <p:cNvPr id="30" name="Rectangle 29"/>
           <p:cNvSpPr/>
           <p:nvPr/>
         </p:nvSpPr>
@@ -8659,13 +8781,12 @@
           <a:lstStyle/>
           <a:p>
             <a:pPr algn="ctr"/>
-            <a:endParaRPr/>
-          </a:p>
-        </p:txBody>
-      </p:sp>
-      <p:sp>
-        <p:nvSpPr>
-          <p:cNvPr id="29" name="Rectangle 28"/>
+          </a:p>
+        </p:txBody>
+      </p:sp>
+      <p:sp>
+        <p:nvSpPr>
+          <p:cNvPr id="31" name="Rectangle 30"/>
           <p:cNvSpPr/>
           <p:nvPr/>
         </p:nvSpPr>
@@ -8704,13 +8825,12 @@
           <a:lstStyle/>
           <a:p>
             <a:pPr algn="ctr"/>
-            <a:endParaRPr/>
-          </a:p>
-        </p:txBody>
-      </p:sp>
-      <p:sp>
-        <p:nvSpPr>
-          <p:cNvPr id="30" name="TextBox 29"/>
+          </a:p>
+        </p:txBody>
+      </p:sp>
+      <p:sp>
+        <p:nvSpPr>
+          <p:cNvPr id="32" name="TextBox 31"/>
           <p:cNvSpPr txBox="1"/>
           <p:nvPr/>
         </p:nvSpPr>
@@ -8725,7 +8845,7 @@
           <a:noFill/>
         </p:spPr>
         <p:txBody>
-          <a:bodyPr wrap="square" lIns="0" tIns="0" rIns="0" bIns="0" anchor="ctr">
+          <a:bodyPr wrap="square" anchor="ctr" lIns="0" rIns="0" tIns="0" bIns="0">
             <a:spAutoFit/>
           </a:bodyPr>
           <a:lstStyle/>
@@ -8755,7 +8875,7 @@
       </p:sp>
       <p:sp>
         <p:nvSpPr>
-          <p:cNvPr id="31" name="Rectangle 30"/>
+          <p:cNvPr id="33" name="Rectangle 32"/>
           <p:cNvSpPr/>
           <p:nvPr/>
         </p:nvSpPr>
@@ -8796,13 +8916,12 @@
           <a:lstStyle/>
           <a:p>
             <a:pPr algn="ctr"/>
-            <a:endParaRPr/>
-          </a:p>
-        </p:txBody>
-      </p:sp>
-      <p:sp>
-        <p:nvSpPr>
-          <p:cNvPr id="32" name="TextBox 31"/>
+          </a:p>
+        </p:txBody>
+      </p:sp>
+      <p:sp>
+        <p:nvSpPr>
+          <p:cNvPr id="34" name="TextBox 33"/>
           <p:cNvSpPr txBox="1"/>
           <p:nvPr/>
         </p:nvSpPr>
@@ -8817,7 +8936,7 @@
           <a:noFill/>
         </p:spPr>
         <p:txBody>
-          <a:bodyPr wrap="square" lIns="0" tIns="0" rIns="0" bIns="0" anchor="ctr">
+          <a:bodyPr wrap="square" anchor="ctr" lIns="0" rIns="0" tIns="0" bIns="0">
             <a:spAutoFit/>
           </a:bodyPr>
           <a:lstStyle/>
@@ -8847,7 +8966,7 @@
       </p:sp>
       <p:sp>
         <p:nvSpPr>
-          <p:cNvPr id="33" name="Rectangle 32"/>
+          <p:cNvPr id="35" name="Rectangle 34"/>
           <p:cNvSpPr/>
           <p:nvPr/>
         </p:nvSpPr>
@@ -8888,13 +9007,12 @@
           <a:lstStyle/>
           <a:p>
             <a:pPr algn="ctr"/>
-            <a:endParaRPr/>
-          </a:p>
-        </p:txBody>
-      </p:sp>
-      <p:sp>
-        <p:nvSpPr>
-          <p:cNvPr id="34" name="TextBox 33"/>
+          </a:p>
+        </p:txBody>
+      </p:sp>
+      <p:sp>
+        <p:nvSpPr>
+          <p:cNvPr id="36" name="TextBox 35"/>
           <p:cNvSpPr txBox="1"/>
           <p:nvPr/>
         </p:nvSpPr>
@@ -8909,7 +9027,7 @@
           <a:noFill/>
         </p:spPr>
         <p:txBody>
-          <a:bodyPr wrap="square" lIns="0" tIns="0" rIns="0" bIns="0" anchor="ctr">
+          <a:bodyPr wrap="square" anchor="ctr" lIns="0" rIns="0" tIns="0" bIns="0">
             <a:spAutoFit/>
           </a:bodyPr>
           <a:lstStyle/>
@@ -8939,14 +9057,14 @@
       </p:sp>
       <p:sp>
         <p:nvSpPr>
-          <p:cNvPr id="35" name="Rectangle 34"/>
+          <p:cNvPr id="37" name="Rectangle 36"/>
           <p:cNvSpPr/>
           <p:nvPr/>
         </p:nvSpPr>
         <p:spPr>
           <a:xfrm>
             <a:off x="4725619" y="4178807"/>
-            <a:ext cx="1040587" cy="347472"/>
+            <a:ext cx="1402689" cy="347472"/>
           </a:xfrm>
           <a:prstGeom prst="rect">
             <a:avLst/>
@@ -8980,28 +9098,27 @@
           <a:lstStyle/>
           <a:p>
             <a:pPr algn="ctr"/>
-            <a:endParaRPr/>
-          </a:p>
-        </p:txBody>
-      </p:sp>
-      <p:sp>
-        <p:nvSpPr>
-          <p:cNvPr id="36" name="TextBox 35"/>
+          </a:p>
+        </p:txBody>
+      </p:sp>
+      <p:sp>
+        <p:nvSpPr>
+          <p:cNvPr id="38" name="TextBox 37"/>
           <p:cNvSpPr txBox="1"/>
           <p:nvPr/>
         </p:nvSpPr>
         <p:spPr>
           <a:xfrm>
             <a:off x="4817059" y="4178807"/>
-            <a:ext cx="857707" cy="347472"/>
-          </a:xfrm>
-          <a:prstGeom prst="rect">
-            <a:avLst/>
-          </a:prstGeom>
-          <a:noFill/>
-        </p:spPr>
-        <p:txBody>
-          <a:bodyPr wrap="square" lIns="0" tIns="0" rIns="0" bIns="0" anchor="ctr">
+            <a:ext cx="1219809" cy="347472"/>
+          </a:xfrm>
+          <a:prstGeom prst="rect">
+            <a:avLst/>
+          </a:prstGeom>
+          <a:noFill/>
+        </p:spPr>
+        <p:txBody>
+          <a:bodyPr wrap="square" anchor="ctr" lIns="0" rIns="0" tIns="0" bIns="0">
             <a:spAutoFit/>
           </a:bodyPr>
           <a:lstStyle/>
@@ -9024,20 +9141,20 @@
                 </a:solidFill>
                 <a:latin typeface="Arial"/>
               </a:rPr>
-              <a:t>generate Apex</a:t>
-            </a:r>
-          </a:p>
-        </p:txBody>
-      </p:sp>
-      <p:sp>
-        <p:nvSpPr>
-          <p:cNvPr id="37" name="Rectangle 36"/>
+              <a:t>generate Apex · LWC</a:t>
+            </a:r>
+          </a:p>
+        </p:txBody>
+      </p:sp>
+      <p:sp>
+        <p:nvSpPr>
+          <p:cNvPr id="39" name="Rectangle 38"/>
           <p:cNvSpPr/>
           <p:nvPr/>
         </p:nvSpPr>
         <p:spPr>
           <a:xfrm>
-            <a:off x="5894222" y="4178807"/>
+            <a:off x="6256324" y="4178807"/>
             <a:ext cx="1281988" cy="347472"/>
           </a:xfrm>
           <a:prstGeom prst="rect">
@@ -9072,19 +9189,18 @@
           <a:lstStyle/>
           <a:p>
             <a:pPr algn="ctr"/>
-            <a:endParaRPr/>
-          </a:p>
-        </p:txBody>
-      </p:sp>
-      <p:sp>
-        <p:nvSpPr>
-          <p:cNvPr id="38" name="TextBox 37"/>
+          </a:p>
+        </p:txBody>
+      </p:sp>
+      <p:sp>
+        <p:nvSpPr>
+          <p:cNvPr id="40" name="TextBox 39"/>
           <p:cNvSpPr txBox="1"/>
           <p:nvPr/>
         </p:nvSpPr>
         <p:spPr>
           <a:xfrm>
-            <a:off x="5985662" y="4178807"/>
+            <a:off x="6347764" y="4178807"/>
             <a:ext cx="1099108" cy="347472"/>
           </a:xfrm>
           <a:prstGeom prst="rect">
@@ -9093,7 +9209,7 @@
           <a:noFill/>
         </p:spPr>
         <p:txBody>
-          <a:bodyPr wrap="square" lIns="0" tIns="0" rIns="0" bIns="0" anchor="ctr">
+          <a:bodyPr wrap="square" anchor="ctr" lIns="0" rIns="0" tIns="0" bIns="0">
             <a:spAutoFit/>
           </a:bodyPr>
           <a:lstStyle/>
@@ -9123,13 +9239,13 @@
       </p:sp>
       <p:sp>
         <p:nvSpPr>
-          <p:cNvPr id="39" name="Rectangle 38"/>
+          <p:cNvPr id="41" name="Rectangle 40"/>
           <p:cNvSpPr/>
           <p:nvPr/>
         </p:nvSpPr>
         <p:spPr>
           <a:xfrm>
-            <a:off x="7304227" y="4178807"/>
+            <a:off x="7666329" y="4178807"/>
             <a:ext cx="919886" cy="347472"/>
           </a:xfrm>
           <a:prstGeom prst="rect">
@@ -9164,19 +9280,18 @@
           <a:lstStyle/>
           <a:p>
             <a:pPr algn="ctr"/>
-            <a:endParaRPr/>
-          </a:p>
-        </p:txBody>
-      </p:sp>
-      <p:sp>
-        <p:nvSpPr>
-          <p:cNvPr id="40" name="TextBox 39"/>
+          </a:p>
+        </p:txBody>
+      </p:sp>
+      <p:sp>
+        <p:nvSpPr>
+          <p:cNvPr id="42" name="TextBox 41"/>
           <p:cNvSpPr txBox="1"/>
           <p:nvPr/>
         </p:nvSpPr>
         <p:spPr>
           <a:xfrm>
-            <a:off x="7395667" y="4178807"/>
+            <a:off x="7757769" y="4178807"/>
             <a:ext cx="737006" cy="347472"/>
           </a:xfrm>
           <a:prstGeom prst="rect">
@@ -9185,7 +9300,7 @@
           <a:noFill/>
         </p:spPr>
         <p:txBody>
-          <a:bodyPr wrap="square" lIns="0" tIns="0" rIns="0" bIns="0" anchor="ctr">
+          <a:bodyPr wrap="square" anchor="ctr" lIns="0" rIns="0" tIns="0" bIns="0">
             <a:spAutoFit/>
           </a:bodyPr>
           <a:lstStyle/>
@@ -9215,13 +9330,13 @@
       </p:sp>
       <p:sp>
         <p:nvSpPr>
-          <p:cNvPr id="41" name="Rectangle 40"/>
+          <p:cNvPr id="43" name="Rectangle 42"/>
           <p:cNvSpPr/>
           <p:nvPr/>
         </p:nvSpPr>
         <p:spPr>
           <a:xfrm>
-            <a:off x="8352129" y="4178807"/>
+            <a:off x="8714232" y="4178807"/>
             <a:ext cx="1161288" cy="347472"/>
           </a:xfrm>
           <a:prstGeom prst="rect">
@@ -9256,19 +9371,18 @@
           <a:lstStyle/>
           <a:p>
             <a:pPr algn="ctr"/>
-            <a:endParaRPr/>
-          </a:p>
-        </p:txBody>
-      </p:sp>
-      <p:sp>
-        <p:nvSpPr>
-          <p:cNvPr id="42" name="TextBox 41"/>
+          </a:p>
+        </p:txBody>
+      </p:sp>
+      <p:sp>
+        <p:nvSpPr>
+          <p:cNvPr id="44" name="TextBox 43"/>
           <p:cNvSpPr txBox="1"/>
           <p:nvPr/>
         </p:nvSpPr>
         <p:spPr>
           <a:xfrm>
-            <a:off x="8443569" y="4178807"/>
+            <a:off x="8805672" y="4178807"/>
             <a:ext cx="978408" cy="347472"/>
           </a:xfrm>
           <a:prstGeom prst="rect">
@@ -9277,7 +9391,7 @@
           <a:noFill/>
         </p:spPr>
         <p:txBody>
-          <a:bodyPr wrap="square" lIns="0" tIns="0" rIns="0" bIns="0" anchor="ctr">
+          <a:bodyPr wrap="square" anchor="ctr" lIns="0" rIns="0" tIns="0" bIns="0">
             <a:spAutoFit/>
           </a:bodyPr>
           <a:lstStyle/>
@@ -9307,13 +9421,13 @@
       </p:sp>
       <p:sp>
         <p:nvSpPr>
-          <p:cNvPr id="43" name="TextBox 42"/>
+          <p:cNvPr id="45" name="TextBox 44"/>
           <p:cNvSpPr txBox="1"/>
           <p:nvPr/>
         </p:nvSpPr>
         <p:spPr>
           <a:xfrm>
-            <a:off x="603504" y="4743776"/>
+            <a:off x="603504" y="4727448"/>
             <a:ext cx="9482328" cy="219456"/>
           </a:xfrm>
           <a:prstGeom prst="rect">
@@ -9322,7 +9436,7 @@
           <a:noFill/>
         </p:spPr>
         <p:txBody>
-          <a:bodyPr wrap="square" lIns="0" tIns="0" rIns="0" bIns="0" anchor="t">
+          <a:bodyPr wrap="square" anchor="t" lIns="0" rIns="0" tIns="0" bIns="0">
             <a:spAutoFit/>
           </a:bodyPr>
           <a:lstStyle/>
@@ -9352,7 +9466,7 @@
       </p:sp>
       <p:sp>
         <p:nvSpPr>
-          <p:cNvPr id="44" name="Rectangle 43"/>
+          <p:cNvPr id="46" name="Rectangle 45"/>
           <p:cNvSpPr/>
           <p:nvPr/>
         </p:nvSpPr>
@@ -9393,13 +9507,12 @@
           <a:lstStyle/>
           <a:p>
             <a:pPr algn="ctr"/>
-            <a:endParaRPr/>
-          </a:p>
-        </p:txBody>
-      </p:sp>
-      <p:sp>
-        <p:nvSpPr>
-          <p:cNvPr id="45" name="Rectangle 44"/>
+          </a:p>
+        </p:txBody>
+      </p:sp>
+      <p:sp>
+        <p:nvSpPr>
+          <p:cNvPr id="47" name="Rectangle 46"/>
           <p:cNvSpPr/>
           <p:nvPr/>
         </p:nvSpPr>
@@ -9412,7 +9525,7 @@
             <a:avLst/>
           </a:prstGeom>
           <a:solidFill>
-            <a:srgbClr val="0E0E0E"/>
+            <a:srgbClr val="046A38"/>
           </a:solidFill>
           <a:ln>
             <a:noFill/>
@@ -9438,13 +9551,12 @@
           <a:lstStyle/>
           <a:p>
             <a:pPr algn="ctr"/>
-            <a:endParaRPr/>
-          </a:p>
-        </p:txBody>
-      </p:sp>
-      <p:sp>
-        <p:nvSpPr>
-          <p:cNvPr id="46" name="TextBox 45"/>
+          </a:p>
+        </p:txBody>
+      </p:sp>
+      <p:sp>
+        <p:nvSpPr>
+          <p:cNvPr id="48" name="TextBox 47"/>
           <p:cNvSpPr txBox="1"/>
           <p:nvPr/>
         </p:nvSpPr>
@@ -9459,7 +9571,7 @@
           <a:noFill/>
         </p:spPr>
         <p:txBody>
-          <a:bodyPr wrap="square" lIns="0" tIns="0" rIns="0" bIns="0" anchor="ctr">
+          <a:bodyPr wrap="square" anchor="ctr" lIns="0" rIns="0" tIns="0" bIns="0">
             <a:spAutoFit/>
           </a:bodyPr>
           <a:lstStyle/>
@@ -9482,21 +9594,21 @@
                 </a:solidFill>
                 <a:latin typeface="Courier New"/>
               </a:rPr>
-              <a:t>AI PROVIDERS</a:t>
-            </a:r>
-          </a:p>
-        </p:txBody>
-      </p:sp>
-      <p:sp>
-        <p:nvSpPr>
-          <p:cNvPr id="47" name="Rectangle 46"/>
+              <a:t>ASSURANCE</a:t>
+            </a:r>
+          </a:p>
+        </p:txBody>
+      </p:sp>
+      <p:sp>
+        <p:nvSpPr>
+          <p:cNvPr id="49" name="Rectangle 48"/>
           <p:cNvSpPr/>
           <p:nvPr/>
         </p:nvSpPr>
         <p:spPr>
           <a:xfrm>
             <a:off x="2569464" y="5184647"/>
-            <a:ext cx="2126894" cy="347472"/>
+            <a:ext cx="919886" cy="347472"/>
           </a:xfrm>
           <a:prstGeom prst="rect">
             <a:avLst/>
@@ -9530,28 +9642,27 @@
           <a:lstStyle/>
           <a:p>
             <a:pPr algn="ctr"/>
-            <a:endParaRPr/>
-          </a:p>
-        </p:txBody>
-      </p:sp>
-      <p:sp>
-        <p:nvSpPr>
-          <p:cNvPr id="48" name="TextBox 47"/>
+          </a:p>
+        </p:txBody>
+      </p:sp>
+      <p:sp>
+        <p:nvSpPr>
+          <p:cNvPr id="50" name="TextBox 49"/>
           <p:cNvSpPr txBox="1"/>
           <p:nvPr/>
         </p:nvSpPr>
         <p:spPr>
           <a:xfrm>
             <a:off x="2660904" y="5184647"/>
-            <a:ext cx="1944014" cy="347472"/>
-          </a:xfrm>
-          <a:prstGeom prst="rect">
-            <a:avLst/>
-          </a:prstGeom>
-          <a:noFill/>
-        </p:spPr>
-        <p:txBody>
-          <a:bodyPr wrap="square" lIns="0" tIns="0" rIns="0" bIns="0" anchor="ctr">
+            <a:ext cx="737006" cy="347472"/>
+          </a:xfrm>
+          <a:prstGeom prst="rect">
+            <a:avLst/>
+          </a:prstGeom>
+          <a:noFill/>
+        </p:spPr>
+        <p:txBody>
+          <a:bodyPr wrap="square" anchor="ctr" lIns="0" rIns="0" tIns="0" bIns="0">
             <a:spAutoFit/>
           </a:bodyPr>
           <a:lstStyle/>
@@ -9574,21 +9685,21 @@
                 </a:solidFill>
                 <a:latin typeface="Arial"/>
               </a:rPr>
-              <a:t>Anthropic Claude — best quality</a:t>
-            </a:r>
-          </a:p>
-        </p:txBody>
-      </p:sp>
-      <p:sp>
-        <p:nvSpPr>
-          <p:cNvPr id="49" name="Rectangle 48"/>
+              <a:t>rule ledger</a:t>
+            </a:r>
+          </a:p>
+        </p:txBody>
+      </p:sp>
+      <p:sp>
+        <p:nvSpPr>
+          <p:cNvPr id="51" name="Rectangle 50"/>
           <p:cNvSpPr/>
           <p:nvPr/>
         </p:nvSpPr>
         <p:spPr>
           <a:xfrm>
-            <a:off x="4824374" y="5184647"/>
-            <a:ext cx="1945843" cy="347472"/>
+            <a:off x="3617366" y="5184647"/>
+            <a:ext cx="1281988" cy="347472"/>
           </a:xfrm>
           <a:prstGeom prst="rect">
             <a:avLst/>
@@ -9622,28 +9733,27 @@
           <a:lstStyle/>
           <a:p>
             <a:pPr algn="ctr"/>
-            <a:endParaRPr/>
-          </a:p>
-        </p:txBody>
-      </p:sp>
-      <p:sp>
-        <p:nvSpPr>
-          <p:cNvPr id="50" name="TextBox 49"/>
+          </a:p>
+        </p:txBody>
+      </p:sp>
+      <p:sp>
+        <p:nvSpPr>
+          <p:cNvPr id="52" name="TextBox 51"/>
           <p:cNvSpPr txBox="1"/>
           <p:nvPr/>
         </p:nvSpPr>
         <p:spPr>
           <a:xfrm>
-            <a:off x="4915814" y="5184647"/>
-            <a:ext cx="1762963" cy="347472"/>
-          </a:xfrm>
-          <a:prstGeom prst="rect">
-            <a:avLst/>
-          </a:prstGeom>
-          <a:noFill/>
-        </p:spPr>
-        <p:txBody>
-          <a:bodyPr wrap="square" lIns="0" tIns="0" rIns="0" bIns="0" anchor="ctr">
+            <a:off x="3708806" y="5184647"/>
+            <a:ext cx="1099108" cy="347472"/>
+          </a:xfrm>
+          <a:prstGeom prst="rect">
+            <a:avLst/>
+          </a:prstGeom>
+          <a:noFill/>
+        </p:spPr>
+        <p:txBody>
+          <a:bodyPr wrap="square" anchor="ctr" lIns="0" rIns="0" tIns="0" bIns="0">
             <a:spAutoFit/>
           </a:bodyPr>
           <a:lstStyle/>
@@ -9666,21 +9776,21 @@
                 </a:solidFill>
                 <a:latin typeface="Arial"/>
               </a:rPr>
-              <a:t>OpenRouter — cheap iteration</a:t>
-            </a:r>
-          </a:p>
-        </p:txBody>
-      </p:sp>
-      <p:sp>
-        <p:nvSpPr>
-          <p:cNvPr id="51" name="Rectangle 50"/>
+              <a:t>replay your JUnit</a:t>
+            </a:r>
+          </a:p>
+        </p:txBody>
+      </p:sp>
+      <p:sp>
+        <p:nvSpPr>
+          <p:cNvPr id="53" name="Rectangle 52"/>
           <p:cNvSpPr/>
           <p:nvPr/>
         </p:nvSpPr>
         <p:spPr>
           <a:xfrm>
-            <a:off x="6898233" y="5184647"/>
-            <a:ext cx="2368296" cy="347472"/>
+            <a:off x="5027371" y="5184647"/>
+            <a:ext cx="859536" cy="347472"/>
           </a:xfrm>
           <a:prstGeom prst="rect">
             <a:avLst/>
@@ -9714,28 +9824,27 @@
           <a:lstStyle/>
           <a:p>
             <a:pPr algn="ctr"/>
-            <a:endParaRPr/>
-          </a:p>
-        </p:txBody>
-      </p:sp>
-      <p:sp>
-        <p:nvSpPr>
-          <p:cNvPr id="52" name="TextBox 51"/>
+          </a:p>
+        </p:txBody>
+      </p:sp>
+      <p:sp>
+        <p:nvSpPr>
+          <p:cNvPr id="54" name="TextBox 53"/>
           <p:cNvSpPr txBox="1"/>
           <p:nvPr/>
         </p:nvSpPr>
         <p:spPr>
           <a:xfrm>
-            <a:off x="6989673" y="5184647"/>
-            <a:ext cx="2185415" cy="347472"/>
-          </a:xfrm>
-          <a:prstGeom prst="rect">
-            <a:avLst/>
-          </a:prstGeom>
-          <a:noFill/>
-        </p:spPr>
-        <p:txBody>
-          <a:bodyPr wrap="square" lIns="0" tIns="0" rIns="0" bIns="0" anchor="ctr">
+            <a:off x="5118811" y="5184647"/>
+            <a:ext cx="676656" cy="347472"/>
+          </a:xfrm>
+          <a:prstGeom prst="rect">
+            <a:avLst/>
+          </a:prstGeom>
+          <a:noFill/>
+        </p:spPr>
+        <p:txBody>
+          <a:bodyPr wrap="square" anchor="ctr" lIns="0" rIns="0" tIns="0" bIns="0">
             <a:spAutoFit/>
           </a:bodyPr>
           <a:lstStyle/>
@@ -9758,6 +9867,596 @@
                 </a:solidFill>
                 <a:latin typeface="Arial"/>
               </a:rPr>
+              <a:t>provenance</a:t>
+            </a:r>
+          </a:p>
+        </p:txBody>
+      </p:sp>
+      <p:sp>
+        <p:nvSpPr>
+          <p:cNvPr id="55" name="Rectangle 54"/>
+          <p:cNvSpPr/>
+          <p:nvPr/>
+        </p:nvSpPr>
+        <p:spPr>
+          <a:xfrm>
+            <a:off x="6014923" y="5184647"/>
+            <a:ext cx="618134" cy="347472"/>
+          </a:xfrm>
+          <a:prstGeom prst="rect">
+            <a:avLst/>
+          </a:prstGeom>
+          <a:solidFill>
+            <a:srgbClr val="F3F3F1"/>
+          </a:solidFill>
+          <a:ln w="6350">
+            <a:solidFill>
+              <a:srgbClr val="D2D2CF"/>
+            </a:solidFill>
+          </a:ln>
+          <a:effectLst/>
+        </p:spPr>
+        <p:style>
+          <a:lnRef idx="1">
+            <a:schemeClr val="accent1"/>
+          </a:lnRef>
+          <a:fillRef idx="3">
+            <a:schemeClr val="accent1"/>
+          </a:fillRef>
+          <a:effectRef idx="2">
+            <a:schemeClr val="accent1"/>
+          </a:effectRef>
+          <a:fontRef idx="minor">
+            <a:schemeClr val="lt1"/>
+          </a:fontRef>
+        </p:style>
+        <p:txBody>
+          <a:bodyPr rtlCol="0" anchor="ctr"/>
+          <a:lstStyle/>
+          <a:p>
+            <a:pPr algn="ctr"/>
+          </a:p>
+        </p:txBody>
+      </p:sp>
+      <p:sp>
+        <p:nvSpPr>
+          <p:cNvPr id="56" name="TextBox 55"/>
+          <p:cNvSpPr txBox="1"/>
+          <p:nvPr/>
+        </p:nvSpPr>
+        <p:spPr>
+          <a:xfrm>
+            <a:off x="6106363" y="5184647"/>
+            <a:ext cx="435254" cy="347472"/>
+          </a:xfrm>
+          <a:prstGeom prst="rect">
+            <a:avLst/>
+          </a:prstGeom>
+          <a:noFill/>
+        </p:spPr>
+        <p:txBody>
+          <a:bodyPr wrap="square" anchor="ctr" lIns="0" rIns="0" tIns="0" bIns="0">
+            <a:spAutoFit/>
+          </a:bodyPr>
+          <a:lstStyle/>
+          <a:p>
+            <a:pPr algn="l">
+              <a:lnSpc>
+                <a:spcPct val="108000"/>
+              </a:lnSpc>
+              <a:spcBef>
+                <a:spcPts val="0"/>
+              </a:spcBef>
+              <a:spcAft>
+                <a:spcPts val="300"/>
+              </a:spcAft>
+            </a:pPr>
+            <a:r>
+              <a:rPr sz="950" b="1" i="0">
+                <a:solidFill>
+                  <a:srgbClr val="0E0E0E"/>
+                </a:solidFill>
+                <a:latin typeface="Arial"/>
+              </a:rPr>
+              <a:t>triage</a:t>
+            </a:r>
+          </a:p>
+        </p:txBody>
+      </p:sp>
+      <p:sp>
+        <p:nvSpPr>
+          <p:cNvPr id="57" name="Rectangle 56"/>
+          <p:cNvSpPr/>
+          <p:nvPr/>
+        </p:nvSpPr>
+        <p:spPr>
+          <a:xfrm>
+            <a:off x="6761073" y="5184647"/>
+            <a:ext cx="738835" cy="347472"/>
+          </a:xfrm>
+          <a:prstGeom prst="rect">
+            <a:avLst/>
+          </a:prstGeom>
+          <a:solidFill>
+            <a:srgbClr val="F3F3F1"/>
+          </a:solidFill>
+          <a:ln w="6350">
+            <a:solidFill>
+              <a:srgbClr val="D2D2CF"/>
+            </a:solidFill>
+          </a:ln>
+          <a:effectLst/>
+        </p:spPr>
+        <p:style>
+          <a:lnRef idx="1">
+            <a:schemeClr val="accent1"/>
+          </a:lnRef>
+          <a:fillRef idx="3">
+            <a:schemeClr val="accent1"/>
+          </a:fillRef>
+          <a:effectRef idx="2">
+            <a:schemeClr val="accent1"/>
+          </a:effectRef>
+          <a:fontRef idx="minor">
+            <a:schemeClr val="lt1"/>
+          </a:fontRef>
+        </p:style>
+        <p:txBody>
+          <a:bodyPr rtlCol="0" anchor="ctr"/>
+          <a:lstStyle/>
+          <a:p>
+            <a:pPr algn="ctr"/>
+          </a:p>
+        </p:txBody>
+      </p:sp>
+      <p:sp>
+        <p:nvSpPr>
+          <p:cNvPr id="58" name="TextBox 57"/>
+          <p:cNvSpPr txBox="1"/>
+          <p:nvPr/>
+        </p:nvSpPr>
+        <p:spPr>
+          <a:xfrm>
+            <a:off x="6852513" y="5184647"/>
+            <a:ext cx="555955" cy="347472"/>
+          </a:xfrm>
+          <a:prstGeom prst="rect">
+            <a:avLst/>
+          </a:prstGeom>
+          <a:noFill/>
+        </p:spPr>
+        <p:txBody>
+          <a:bodyPr wrap="square" anchor="ctr" lIns="0" rIns="0" tIns="0" bIns="0">
+            <a:spAutoFit/>
+          </a:bodyPr>
+          <a:lstStyle/>
+          <a:p>
+            <a:pPr algn="l">
+              <a:lnSpc>
+                <a:spcPct val="108000"/>
+              </a:lnSpc>
+              <a:spcBef>
+                <a:spcPts val="0"/>
+              </a:spcBef>
+              <a:spcAft>
+                <a:spcPts val="300"/>
+              </a:spcAft>
+            </a:pPr>
+            <a:r>
+              <a:rPr sz="950" b="1" i="0">
+                <a:solidFill>
+                  <a:srgbClr val="0E0E0E"/>
+                </a:solidFill>
+                <a:latin typeface="Arial"/>
+              </a:rPr>
+              <a:t>sign-off</a:t>
+            </a:r>
+          </a:p>
+        </p:txBody>
+      </p:sp>
+      <p:sp>
+        <p:nvSpPr>
+          <p:cNvPr id="59" name="Rectangle 58"/>
+          <p:cNvSpPr/>
+          <p:nvPr/>
+        </p:nvSpPr>
+        <p:spPr>
+          <a:xfrm>
+            <a:off x="603504" y="5971031"/>
+            <a:ext cx="9482328" cy="786384"/>
+          </a:xfrm>
+          <a:prstGeom prst="rect">
+            <a:avLst/>
+          </a:prstGeom>
+          <a:solidFill>
+            <a:srgbClr val="FFFFFF"/>
+          </a:solidFill>
+          <a:ln w="9525">
+            <a:solidFill>
+              <a:srgbClr val="D2D2CF"/>
+            </a:solidFill>
+          </a:ln>
+          <a:effectLst/>
+        </p:spPr>
+        <p:style>
+          <a:lnRef idx="1">
+            <a:schemeClr val="accent1"/>
+          </a:lnRef>
+          <a:fillRef idx="3">
+            <a:schemeClr val="accent1"/>
+          </a:fillRef>
+          <a:effectRef idx="2">
+            <a:schemeClr val="accent1"/>
+          </a:effectRef>
+          <a:fontRef idx="minor">
+            <a:schemeClr val="lt1"/>
+          </a:fontRef>
+        </p:style>
+        <p:txBody>
+          <a:bodyPr rtlCol="0" anchor="ctr"/>
+          <a:lstStyle/>
+          <a:p>
+            <a:pPr algn="ctr"/>
+          </a:p>
+        </p:txBody>
+      </p:sp>
+      <p:sp>
+        <p:nvSpPr>
+          <p:cNvPr id="60" name="Rectangle 59"/>
+          <p:cNvSpPr/>
+          <p:nvPr/>
+        </p:nvSpPr>
+        <p:spPr>
+          <a:xfrm>
+            <a:off x="603504" y="5971031"/>
+            <a:ext cx="1783080" cy="786384"/>
+          </a:xfrm>
+          <a:prstGeom prst="rect">
+            <a:avLst/>
+          </a:prstGeom>
+          <a:solidFill>
+            <a:srgbClr val="0E0E0E"/>
+          </a:solidFill>
+          <a:ln>
+            <a:noFill/>
+          </a:ln>
+          <a:effectLst/>
+        </p:spPr>
+        <p:style>
+          <a:lnRef idx="1">
+            <a:schemeClr val="accent1"/>
+          </a:lnRef>
+          <a:fillRef idx="3">
+            <a:schemeClr val="accent1"/>
+          </a:fillRef>
+          <a:effectRef idx="2">
+            <a:schemeClr val="accent1"/>
+          </a:effectRef>
+          <a:fontRef idx="minor">
+            <a:schemeClr val="lt1"/>
+          </a:fontRef>
+        </p:style>
+        <p:txBody>
+          <a:bodyPr rtlCol="0" anchor="ctr"/>
+          <a:lstStyle/>
+          <a:p>
+            <a:pPr algn="ctr"/>
+          </a:p>
+        </p:txBody>
+      </p:sp>
+      <p:sp>
+        <p:nvSpPr>
+          <p:cNvPr id="61" name="TextBox 60"/>
+          <p:cNvSpPr txBox="1"/>
+          <p:nvPr/>
+        </p:nvSpPr>
+        <p:spPr>
+          <a:xfrm>
+            <a:off x="749808" y="5971031"/>
+            <a:ext cx="1554480" cy="786384"/>
+          </a:xfrm>
+          <a:prstGeom prst="rect">
+            <a:avLst/>
+          </a:prstGeom>
+          <a:noFill/>
+        </p:spPr>
+        <p:txBody>
+          <a:bodyPr wrap="square" anchor="ctr" lIns="0" rIns="0" tIns="0" bIns="0">
+            <a:spAutoFit/>
+          </a:bodyPr>
+          <a:lstStyle/>
+          <a:p>
+            <a:pPr algn="l">
+              <a:lnSpc>
+                <a:spcPct val="110000"/>
+              </a:lnSpc>
+              <a:spcBef>
+                <a:spcPts val="0"/>
+              </a:spcBef>
+              <a:spcAft>
+                <a:spcPts val="300"/>
+              </a:spcAft>
+            </a:pPr>
+            <a:r>
+              <a:rPr sz="850" b="1" i="0" spc="80">
+                <a:solidFill>
+                  <a:srgbClr val="FFFFFF"/>
+                </a:solidFill>
+                <a:latin typeface="Courier New"/>
+              </a:rPr>
+              <a:t>AI PROVIDERS</a:t>
+            </a:r>
+          </a:p>
+        </p:txBody>
+      </p:sp>
+      <p:sp>
+        <p:nvSpPr>
+          <p:cNvPr id="62" name="Rectangle 61"/>
+          <p:cNvSpPr/>
+          <p:nvPr/>
+        </p:nvSpPr>
+        <p:spPr>
+          <a:xfrm>
+            <a:off x="2569464" y="6190487"/>
+            <a:ext cx="2126894" cy="347472"/>
+          </a:xfrm>
+          <a:prstGeom prst="rect">
+            <a:avLst/>
+          </a:prstGeom>
+          <a:solidFill>
+            <a:srgbClr val="F3F3F1"/>
+          </a:solidFill>
+          <a:ln w="6350">
+            <a:solidFill>
+              <a:srgbClr val="D2D2CF"/>
+            </a:solidFill>
+          </a:ln>
+          <a:effectLst/>
+        </p:spPr>
+        <p:style>
+          <a:lnRef idx="1">
+            <a:schemeClr val="accent1"/>
+          </a:lnRef>
+          <a:fillRef idx="3">
+            <a:schemeClr val="accent1"/>
+          </a:fillRef>
+          <a:effectRef idx="2">
+            <a:schemeClr val="accent1"/>
+          </a:effectRef>
+          <a:fontRef idx="minor">
+            <a:schemeClr val="lt1"/>
+          </a:fontRef>
+        </p:style>
+        <p:txBody>
+          <a:bodyPr rtlCol="0" anchor="ctr"/>
+          <a:lstStyle/>
+          <a:p>
+            <a:pPr algn="ctr"/>
+          </a:p>
+        </p:txBody>
+      </p:sp>
+      <p:sp>
+        <p:nvSpPr>
+          <p:cNvPr id="63" name="TextBox 62"/>
+          <p:cNvSpPr txBox="1"/>
+          <p:nvPr/>
+        </p:nvSpPr>
+        <p:spPr>
+          <a:xfrm>
+            <a:off x="2660904" y="6190487"/>
+            <a:ext cx="1944014" cy="347472"/>
+          </a:xfrm>
+          <a:prstGeom prst="rect">
+            <a:avLst/>
+          </a:prstGeom>
+          <a:noFill/>
+        </p:spPr>
+        <p:txBody>
+          <a:bodyPr wrap="square" anchor="ctr" lIns="0" rIns="0" tIns="0" bIns="0">
+            <a:spAutoFit/>
+          </a:bodyPr>
+          <a:lstStyle/>
+          <a:p>
+            <a:pPr algn="l">
+              <a:lnSpc>
+                <a:spcPct val="108000"/>
+              </a:lnSpc>
+              <a:spcBef>
+                <a:spcPts val="0"/>
+              </a:spcBef>
+              <a:spcAft>
+                <a:spcPts val="300"/>
+              </a:spcAft>
+            </a:pPr>
+            <a:r>
+              <a:rPr sz="950" b="1" i="0">
+                <a:solidFill>
+                  <a:srgbClr val="0E0E0E"/>
+                </a:solidFill>
+                <a:latin typeface="Arial"/>
+              </a:rPr>
+              <a:t>Anthropic Claude — best quality</a:t>
+            </a:r>
+          </a:p>
+        </p:txBody>
+      </p:sp>
+      <p:sp>
+        <p:nvSpPr>
+          <p:cNvPr id="64" name="Rectangle 63"/>
+          <p:cNvSpPr/>
+          <p:nvPr/>
+        </p:nvSpPr>
+        <p:spPr>
+          <a:xfrm>
+            <a:off x="4824374" y="6190487"/>
+            <a:ext cx="1945843" cy="347472"/>
+          </a:xfrm>
+          <a:prstGeom prst="rect">
+            <a:avLst/>
+          </a:prstGeom>
+          <a:solidFill>
+            <a:srgbClr val="F3F3F1"/>
+          </a:solidFill>
+          <a:ln w="6350">
+            <a:solidFill>
+              <a:srgbClr val="D2D2CF"/>
+            </a:solidFill>
+          </a:ln>
+          <a:effectLst/>
+        </p:spPr>
+        <p:style>
+          <a:lnRef idx="1">
+            <a:schemeClr val="accent1"/>
+          </a:lnRef>
+          <a:fillRef idx="3">
+            <a:schemeClr val="accent1"/>
+          </a:fillRef>
+          <a:effectRef idx="2">
+            <a:schemeClr val="accent1"/>
+          </a:effectRef>
+          <a:fontRef idx="minor">
+            <a:schemeClr val="lt1"/>
+          </a:fontRef>
+        </p:style>
+        <p:txBody>
+          <a:bodyPr rtlCol="0" anchor="ctr"/>
+          <a:lstStyle/>
+          <a:p>
+            <a:pPr algn="ctr"/>
+          </a:p>
+        </p:txBody>
+      </p:sp>
+      <p:sp>
+        <p:nvSpPr>
+          <p:cNvPr id="65" name="TextBox 64"/>
+          <p:cNvSpPr txBox="1"/>
+          <p:nvPr/>
+        </p:nvSpPr>
+        <p:spPr>
+          <a:xfrm>
+            <a:off x="4915814" y="6190487"/>
+            <a:ext cx="1762963" cy="347472"/>
+          </a:xfrm>
+          <a:prstGeom prst="rect">
+            <a:avLst/>
+          </a:prstGeom>
+          <a:noFill/>
+        </p:spPr>
+        <p:txBody>
+          <a:bodyPr wrap="square" anchor="ctr" lIns="0" rIns="0" tIns="0" bIns="0">
+            <a:spAutoFit/>
+          </a:bodyPr>
+          <a:lstStyle/>
+          <a:p>
+            <a:pPr algn="l">
+              <a:lnSpc>
+                <a:spcPct val="108000"/>
+              </a:lnSpc>
+              <a:spcBef>
+                <a:spcPts val="0"/>
+              </a:spcBef>
+              <a:spcAft>
+                <a:spcPts val="300"/>
+              </a:spcAft>
+            </a:pPr>
+            <a:r>
+              <a:rPr sz="950" b="1" i="0">
+                <a:solidFill>
+                  <a:srgbClr val="0E0E0E"/>
+                </a:solidFill>
+                <a:latin typeface="Arial"/>
+              </a:rPr>
+              <a:t>OpenRouter — cheap iteration</a:t>
+            </a:r>
+          </a:p>
+        </p:txBody>
+      </p:sp>
+      <p:sp>
+        <p:nvSpPr>
+          <p:cNvPr id="66" name="Rectangle 65"/>
+          <p:cNvSpPr/>
+          <p:nvPr/>
+        </p:nvSpPr>
+        <p:spPr>
+          <a:xfrm>
+            <a:off x="6898233" y="6190487"/>
+            <a:ext cx="2368296" cy="347472"/>
+          </a:xfrm>
+          <a:prstGeom prst="rect">
+            <a:avLst/>
+          </a:prstGeom>
+          <a:solidFill>
+            <a:srgbClr val="F3F3F1"/>
+          </a:solidFill>
+          <a:ln w="6350">
+            <a:solidFill>
+              <a:srgbClr val="D2D2CF"/>
+            </a:solidFill>
+          </a:ln>
+          <a:effectLst/>
+        </p:spPr>
+        <p:style>
+          <a:lnRef idx="1">
+            <a:schemeClr val="accent1"/>
+          </a:lnRef>
+          <a:fillRef idx="3">
+            <a:schemeClr val="accent1"/>
+          </a:fillRef>
+          <a:effectRef idx="2">
+            <a:schemeClr val="accent1"/>
+          </a:effectRef>
+          <a:fontRef idx="minor">
+            <a:schemeClr val="lt1"/>
+          </a:fontRef>
+        </p:style>
+        <p:txBody>
+          <a:bodyPr rtlCol="0" anchor="ctr"/>
+          <a:lstStyle/>
+          <a:p>
+            <a:pPr algn="ctr"/>
+          </a:p>
+        </p:txBody>
+      </p:sp>
+      <p:sp>
+        <p:nvSpPr>
+          <p:cNvPr id="67" name="TextBox 66"/>
+          <p:cNvSpPr txBox="1"/>
+          <p:nvPr/>
+        </p:nvSpPr>
+        <p:spPr>
+          <a:xfrm>
+            <a:off x="6989673" y="6190487"/>
+            <a:ext cx="2185415" cy="347472"/>
+          </a:xfrm>
+          <a:prstGeom prst="rect">
+            <a:avLst/>
+          </a:prstGeom>
+          <a:noFill/>
+        </p:spPr>
+        <p:txBody>
+          <a:bodyPr wrap="square" anchor="ctr" lIns="0" rIns="0" tIns="0" bIns="0">
+            <a:spAutoFit/>
+          </a:bodyPr>
+          <a:lstStyle/>
+          <a:p>
+            <a:pPr algn="l">
+              <a:lnSpc>
+                <a:spcPct val="108000"/>
+              </a:lnSpc>
+              <a:spcBef>
+                <a:spcPts val="0"/>
+              </a:spcBef>
+              <a:spcAft>
+                <a:spcPts val="300"/>
+              </a:spcAft>
+            </a:pPr>
+            <a:r>
+              <a:rPr sz="950" b="1" i="0">
+                <a:solidFill>
+                  <a:srgbClr val="0E0E0E"/>
+                </a:solidFill>
+                <a:latin typeface="Arial"/>
+              </a:rPr>
               <a:t>Mock — free, offline, zero exposure</a:t>
             </a:r>
           </a:p>
@@ -9765,14 +10464,14 @@
       </p:sp>
       <p:sp>
         <p:nvSpPr>
-          <p:cNvPr id="53" name="Rectangle 52"/>
+          <p:cNvPr id="68" name="Rectangle 67"/>
           <p:cNvSpPr/>
           <p:nvPr/>
         </p:nvSpPr>
         <p:spPr>
           <a:xfrm>
-            <a:off x="603504" y="6382512"/>
-            <a:ext cx="9482328" cy="786384"/>
+            <a:off x="603504" y="6455664"/>
+            <a:ext cx="9482328" cy="713232"/>
           </a:xfrm>
           <a:prstGeom prst="rect">
             <a:avLst/>
@@ -9804,20 +10503,19 @@
           <a:lstStyle/>
           <a:p>
             <a:pPr algn="ctr"/>
-            <a:endParaRPr/>
-          </a:p>
-        </p:txBody>
-      </p:sp>
-      <p:sp>
-        <p:nvSpPr>
-          <p:cNvPr id="54" name="Rectangle 53"/>
+          </a:p>
+        </p:txBody>
+      </p:sp>
+      <p:sp>
+        <p:nvSpPr>
+          <p:cNvPr id="69" name="Rectangle 68"/>
           <p:cNvSpPr/>
           <p:nvPr/>
         </p:nvSpPr>
         <p:spPr>
           <a:xfrm>
-            <a:off x="602806" y="6382512"/>
-            <a:ext cx="64706" cy="786384"/>
+            <a:off x="603504" y="6455664"/>
+            <a:ext cx="64008" cy="713232"/>
           </a:xfrm>
           <a:prstGeom prst="rect">
             <a:avLst/>
@@ -9849,19 +10547,18 @@
           <a:lstStyle/>
           <a:p>
             <a:pPr algn="ctr"/>
-            <a:endParaRPr/>
-          </a:p>
-        </p:txBody>
-      </p:sp>
-      <p:sp>
-        <p:nvSpPr>
-          <p:cNvPr id="55" name="TextBox 54"/>
+          </a:p>
+        </p:txBody>
+      </p:sp>
+      <p:sp>
+        <p:nvSpPr>
+          <p:cNvPr id="70" name="TextBox 69"/>
           <p:cNvSpPr txBox="1"/>
           <p:nvPr/>
         </p:nvSpPr>
         <p:spPr>
           <a:xfrm>
-            <a:off x="848890" y="6483858"/>
+            <a:off x="859536" y="6565392"/>
             <a:ext cx="8979407" cy="512064"/>
           </a:xfrm>
           <a:prstGeom prst="rect">
@@ -9870,7 +10567,7 @@
           <a:noFill/>
         </p:spPr>
         <p:txBody>
-          <a:bodyPr wrap="square" lIns="0" tIns="0" rIns="0" bIns="0" anchor="t">
+          <a:bodyPr wrap="square" anchor="t" lIns="0" rIns="0" tIns="0" bIns="0">
             <a:spAutoFit/>
           </a:bodyPr>
           <a:lstStyle/>
@@ -9887,7 +10584,7 @@
               </a:spcAft>
             </a:pPr>
             <a:r>
-              <a:rPr sz="850" b="1" i="0" spc="140" dirty="0">
+              <a:rPr sz="850" b="1" i="0" spc="140">
                 <a:solidFill>
                   <a:srgbClr val="046A38"/>
                 </a:solidFill>
@@ -9909,7 +10606,7 @@
               </a:spcAft>
             </a:pPr>
             <a:r>
-              <a:rPr sz="1150" b="0" i="0" dirty="0">
+              <a:rPr sz="1150" b="0" i="0">
                 <a:solidFill>
                   <a:srgbClr val="222427"/>
                 </a:solidFill>
@@ -9929,7 +10626,7 @@
 </file>
 
 <file path=ppt/slides/slide5.xml><?xml version="1.0" encoding="utf-8"?>
-<p:sld xmlns:a="http://schemas.openxmlformats.org/drawingml/2006/main" xmlns:r="http://schemas.openxmlformats.org/officeDocument/2006/relationships" xmlns:p="http://schemas.openxmlformats.org/presentationml/2006/main">
+<p:sld xmlns:a="http://schemas.openxmlformats.org/drawingml/2006/main" xmlns:p="http://schemas.openxmlformats.org/presentationml/2006/main" xmlns:r="http://schemas.openxmlformats.org/officeDocument/2006/relationships">
   <p:cSld>
     <p:spTree>
       <p:nvGrpSpPr>
@@ -9937,14 +10634,7 @@
         <p:cNvGrpSpPr/>
         <p:nvPr/>
       </p:nvGrpSpPr>
-      <p:grpSpPr>
-        <a:xfrm>
-          <a:off x="0" y="0"/>
-          <a:ext cx="0" cy="0"/>
-          <a:chOff x="0" y="0"/>
-          <a:chExt cx="0" cy="0"/>
-        </a:xfrm>
-      </p:grpSpPr>
+      <p:grpSpPr/>
       <p:sp>
         <p:nvSpPr>
           <p:cNvPr id="2" name="Rectangle 1"/>
@@ -9986,7 +10676,6 @@
           <a:lstStyle/>
           <a:p>
             <a:pPr algn="ctr"/>
-            <a:endParaRPr/>
           </a:p>
         </p:txBody>
       </p:sp>
@@ -10031,7 +10720,6 @@
           <a:lstStyle/>
           <a:p>
             <a:pPr algn="ctr"/>
-            <a:endParaRPr/>
           </a:p>
         </p:txBody>
       </p:sp>
@@ -10052,7 +10740,7 @@
           <a:noFill/>
         </p:spPr>
         <p:txBody>
-          <a:bodyPr wrap="square" lIns="0" tIns="0" rIns="0" bIns="0" anchor="t">
+          <a:bodyPr wrap="square" anchor="t" lIns="0" rIns="0" tIns="0" bIns="0">
             <a:spAutoFit/>
           </a:bodyPr>
           <a:lstStyle/>
@@ -10097,7 +10785,7 @@
           <a:noFill/>
         </p:spPr>
         <p:txBody>
-          <a:bodyPr wrap="square" lIns="0" tIns="0" rIns="0" bIns="0" anchor="t">
+          <a:bodyPr wrap="square" anchor="t" lIns="0" rIns="0" tIns="0" bIns="0">
             <a:spAutoFit/>
           </a:bodyPr>
           <a:lstStyle/>
@@ -10175,7 +10863,6 @@
           <a:lstStyle/>
           <a:p>
             <a:pPr algn="ctr"/>
-            <a:endParaRPr/>
           </a:p>
         </p:txBody>
       </p:sp>
@@ -10196,7 +10883,7 @@
           <a:noFill/>
         </p:spPr>
         <p:txBody>
-          <a:bodyPr wrap="square" lIns="0" tIns="0" rIns="0" bIns="0" anchor="t">
+          <a:bodyPr wrap="square" anchor="t" lIns="0" rIns="0" tIns="0" bIns="0">
             <a:spAutoFit/>
           </a:bodyPr>
           <a:lstStyle/>
@@ -10241,7 +10928,7 @@
           <a:noFill/>
         </p:spPr>
         <p:txBody>
-          <a:bodyPr wrap="square" lIns="0" tIns="0" rIns="0" bIns="0" anchor="t">
+          <a:bodyPr wrap="square" anchor="t" lIns="0" rIns="0" tIns="0" bIns="0">
             <a:spAutoFit/>
           </a:bodyPr>
           <a:lstStyle/>
@@ -10310,7 +10997,6 @@
           <a:lstStyle/>
           <a:p>
             <a:pPr algn="ctr"/>
-            <a:endParaRPr/>
           </a:p>
         </p:txBody>
       </p:sp>
@@ -10355,7 +11041,6 @@
           <a:lstStyle/>
           <a:p>
             <a:pPr algn="ctr"/>
-            <a:endParaRPr/>
           </a:p>
         </p:txBody>
       </p:sp>
@@ -10376,7 +11061,7 @@
           <a:noFill/>
         </p:spPr>
         <p:txBody>
-          <a:bodyPr wrap="square" lIns="0" tIns="0" rIns="0" bIns="0" anchor="ctr">
+          <a:bodyPr wrap="square" anchor="ctr" lIns="0" rIns="0" tIns="0" bIns="0">
             <a:spAutoFit/>
           </a:bodyPr>
           <a:lstStyle/>
@@ -10430,7 +11115,7 @@
           <a:noFill/>
         </p:spPr>
         <p:txBody>
-          <a:bodyPr wrap="square" lIns="0" tIns="0" rIns="0" bIns="0" anchor="t">
+          <a:bodyPr wrap="square" anchor="t" lIns="0" rIns="0" tIns="0" bIns="0">
             <a:spAutoFit/>
           </a:bodyPr>
           <a:lstStyle/>
@@ -10501,7 +11186,6 @@
           <a:lstStyle/>
           <a:p>
             <a:pPr algn="ctr"/>
-            <a:endParaRPr/>
           </a:p>
         </p:txBody>
       </p:sp>
@@ -10522,7 +11206,7 @@
           <a:noFill/>
         </p:spPr>
         <p:txBody>
-          <a:bodyPr wrap="square" lIns="0" tIns="0" rIns="0" bIns="0" anchor="ctr">
+          <a:bodyPr wrap="square" anchor="ctr" lIns="0" rIns="0" tIns="0" bIns="0">
             <a:spAutoFit/>
           </a:bodyPr>
           <a:lstStyle/>
@@ -10594,7 +11278,7 @@
           <a:noFill/>
         </p:spPr>
         <p:txBody>
-          <a:bodyPr wrap="square" lIns="0" tIns="0" rIns="0" bIns="0" anchor="t">
+          <a:bodyPr wrap="square" anchor="t" lIns="0" rIns="0" tIns="0" bIns="0">
             <a:spAutoFit/>
           </a:bodyPr>
           <a:lstStyle/>
@@ -10665,7 +11349,6 @@
           <a:lstStyle/>
           <a:p>
             <a:pPr algn="ctr"/>
-            <a:endParaRPr/>
           </a:p>
         </p:txBody>
       </p:sp>
@@ -10710,7 +11393,6 @@
           <a:lstStyle/>
           <a:p>
             <a:pPr algn="ctr"/>
-            <a:endParaRPr/>
           </a:p>
         </p:txBody>
       </p:sp>
@@ -10731,7 +11413,7 @@
           <a:noFill/>
         </p:spPr>
         <p:txBody>
-          <a:bodyPr wrap="square" lIns="0" tIns="0" rIns="0" bIns="0" anchor="t">
+          <a:bodyPr wrap="square" anchor="t" lIns="0" rIns="0" tIns="0" bIns="0">
             <a:spAutoFit/>
           </a:bodyPr>
           <a:lstStyle/>
@@ -10776,7 +11458,7 @@
           <a:noFill/>
         </p:spPr>
         <p:txBody>
-          <a:bodyPr wrap="square" lIns="0" tIns="0" rIns="0" bIns="0" anchor="t">
+          <a:bodyPr wrap="square" anchor="t" lIns="0" rIns="0" tIns="0" bIns="0">
             <a:spAutoFit/>
           </a:bodyPr>
           <a:lstStyle/>
@@ -10821,7 +11503,7 @@
           <a:noFill/>
         </p:spPr>
         <p:txBody>
-          <a:bodyPr wrap="square" lIns="0" tIns="0" rIns="0" bIns="0" anchor="t">
+          <a:bodyPr wrap="square" anchor="t" lIns="0" rIns="0" tIns="0" bIns="0">
             <a:spAutoFit/>
           </a:bodyPr>
           <a:lstStyle/>
@@ -10890,7 +11572,6 @@
           <a:lstStyle/>
           <a:p>
             <a:pPr algn="ctr"/>
-            <a:endParaRPr/>
           </a:p>
         </p:txBody>
       </p:sp>
@@ -10911,7 +11592,7 @@
           <a:noFill/>
         </p:spPr>
         <p:txBody>
-          <a:bodyPr wrap="square" lIns="0" tIns="0" rIns="0" bIns="0" anchor="t">
+          <a:bodyPr wrap="square" anchor="t" lIns="0" rIns="0" tIns="0" bIns="0">
             <a:spAutoFit/>
           </a:bodyPr>
           <a:lstStyle/>
@@ -10982,7 +11663,6 @@
           <a:lstStyle/>
           <a:p>
             <a:pPr algn="ctr"/>
-            <a:endParaRPr/>
           </a:p>
         </p:txBody>
       </p:sp>
@@ -11027,7 +11707,6 @@
           <a:lstStyle/>
           <a:p>
             <a:pPr algn="ctr"/>
-            <a:endParaRPr/>
           </a:p>
         </p:txBody>
       </p:sp>
@@ -11048,7 +11727,7 @@
           <a:noFill/>
         </p:spPr>
         <p:txBody>
-          <a:bodyPr wrap="square" lIns="0" tIns="0" rIns="0" bIns="0" anchor="t">
+          <a:bodyPr wrap="square" anchor="t" lIns="0" rIns="0" tIns="0" bIns="0">
             <a:spAutoFit/>
           </a:bodyPr>
           <a:lstStyle/>
@@ -11093,7 +11772,7 @@
           <a:noFill/>
         </p:spPr>
         <p:txBody>
-          <a:bodyPr wrap="square" lIns="0" tIns="0" rIns="0" bIns="0" anchor="t">
+          <a:bodyPr wrap="square" anchor="t" lIns="0" rIns="0" tIns="0" bIns="0">
             <a:spAutoFit/>
           </a:bodyPr>
           <a:lstStyle/>
@@ -11138,7 +11817,7 @@
           <a:noFill/>
         </p:spPr>
         <p:txBody>
-          <a:bodyPr wrap="square" lIns="0" tIns="0" rIns="0" bIns="0" anchor="t">
+          <a:bodyPr wrap="square" anchor="t" lIns="0" rIns="0" tIns="0" bIns="0">
             <a:spAutoFit/>
           </a:bodyPr>
           <a:lstStyle/>
@@ -11207,7 +11886,6 @@
           <a:lstStyle/>
           <a:p>
             <a:pPr algn="ctr"/>
-            <a:endParaRPr/>
           </a:p>
         </p:txBody>
       </p:sp>
@@ -11228,7 +11906,7 @@
           <a:noFill/>
         </p:spPr>
         <p:txBody>
-          <a:bodyPr wrap="square" lIns="0" tIns="0" rIns="0" bIns="0" anchor="t">
+          <a:bodyPr wrap="square" anchor="t" lIns="0" rIns="0" tIns="0" bIns="0">
             <a:spAutoFit/>
           </a:bodyPr>
           <a:lstStyle/>
@@ -11299,7 +11977,6 @@
           <a:lstStyle/>
           <a:p>
             <a:pPr algn="ctr"/>
-            <a:endParaRPr/>
           </a:p>
         </p:txBody>
       </p:sp>
@@ -11344,7 +12021,6 @@
           <a:lstStyle/>
           <a:p>
             <a:pPr algn="ctr"/>
-            <a:endParaRPr/>
           </a:p>
         </p:txBody>
       </p:sp>
@@ -11365,7 +12041,7 @@
           <a:noFill/>
         </p:spPr>
         <p:txBody>
-          <a:bodyPr wrap="square" lIns="0" tIns="0" rIns="0" bIns="0" anchor="t">
+          <a:bodyPr wrap="square" anchor="t" lIns="0" rIns="0" tIns="0" bIns="0">
             <a:spAutoFit/>
           </a:bodyPr>
           <a:lstStyle/>
@@ -11410,7 +12086,7 @@
           <a:noFill/>
         </p:spPr>
         <p:txBody>
-          <a:bodyPr wrap="square" lIns="0" tIns="0" rIns="0" bIns="0" anchor="t">
+          <a:bodyPr wrap="square" anchor="t" lIns="0" rIns="0" tIns="0" bIns="0">
             <a:spAutoFit/>
           </a:bodyPr>
           <a:lstStyle/>
@@ -11455,7 +12131,7 @@
           <a:noFill/>
         </p:spPr>
         <p:txBody>
-          <a:bodyPr wrap="square" lIns="0" tIns="0" rIns="0" bIns="0" anchor="t">
+          <a:bodyPr wrap="square" anchor="t" lIns="0" rIns="0" tIns="0" bIns="0">
             <a:spAutoFit/>
           </a:bodyPr>
           <a:lstStyle/>
@@ -11524,7 +12200,6 @@
           <a:lstStyle/>
           <a:p>
             <a:pPr algn="ctr"/>
-            <a:endParaRPr/>
           </a:p>
         </p:txBody>
       </p:sp>
@@ -11545,7 +12220,7 @@
           <a:noFill/>
         </p:spPr>
         <p:txBody>
-          <a:bodyPr wrap="square" lIns="0" tIns="0" rIns="0" bIns="0" anchor="t">
+          <a:bodyPr wrap="square" anchor="t" lIns="0" rIns="0" tIns="0" bIns="0">
             <a:spAutoFit/>
           </a:bodyPr>
           <a:lstStyle/>
@@ -11616,7 +12291,6 @@
           <a:lstStyle/>
           <a:p>
             <a:pPr algn="ctr"/>
-            <a:endParaRPr/>
           </a:p>
         </p:txBody>
       </p:sp>
@@ -11661,7 +12335,6 @@
           <a:lstStyle/>
           <a:p>
             <a:pPr algn="ctr"/>
-            <a:endParaRPr/>
           </a:p>
         </p:txBody>
       </p:sp>
@@ -11682,7 +12355,7 @@
           <a:noFill/>
         </p:spPr>
         <p:txBody>
-          <a:bodyPr wrap="square" lIns="0" tIns="0" rIns="0" bIns="0" anchor="t">
+          <a:bodyPr wrap="square" anchor="t" lIns="0" rIns="0" tIns="0" bIns="0">
             <a:spAutoFit/>
           </a:bodyPr>
           <a:lstStyle/>
@@ -11727,7 +12400,7 @@
           <a:noFill/>
         </p:spPr>
         <p:txBody>
-          <a:bodyPr wrap="square" lIns="0" tIns="0" rIns="0" bIns="0" anchor="t">
+          <a:bodyPr wrap="square" anchor="t" lIns="0" rIns="0" tIns="0" bIns="0">
             <a:spAutoFit/>
           </a:bodyPr>
           <a:lstStyle/>
@@ -11772,7 +12445,7 @@
           <a:noFill/>
         </p:spPr>
         <p:txBody>
-          <a:bodyPr wrap="square" lIns="0" tIns="0" rIns="0" bIns="0" anchor="t">
+          <a:bodyPr wrap="square" anchor="t" lIns="0" rIns="0" tIns="0" bIns="0">
             <a:spAutoFit/>
           </a:bodyPr>
           <a:lstStyle/>
@@ -11841,7 +12514,6 @@
           <a:lstStyle/>
           <a:p>
             <a:pPr algn="ctr"/>
-            <a:endParaRPr/>
           </a:p>
         </p:txBody>
       </p:sp>
@@ -11862,7 +12534,7 @@
           <a:noFill/>
         </p:spPr>
         <p:txBody>
-          <a:bodyPr wrap="square" lIns="0" tIns="0" rIns="0" bIns="0" anchor="t">
+          <a:bodyPr wrap="square" anchor="t" lIns="0" rIns="0" tIns="0" bIns="0">
             <a:spAutoFit/>
           </a:bodyPr>
           <a:lstStyle/>
@@ -11907,7 +12579,7 @@
           <a:noFill/>
         </p:spPr>
         <p:txBody>
-          <a:bodyPr wrap="square" lIns="0" tIns="0" rIns="0" bIns="0" anchor="t">
+          <a:bodyPr wrap="square" anchor="t" lIns="0" rIns="0" tIns="0" bIns="0">
             <a:spAutoFit/>
           </a:bodyPr>
           <a:lstStyle/>
@@ -11952,7 +12624,7 @@
           <a:noFill/>
         </p:spPr>
         <p:txBody>
-          <a:bodyPr wrap="square" lIns="0" tIns="0" rIns="0" bIns="0" anchor="t">
+          <a:bodyPr wrap="square" anchor="t" lIns="0" rIns="0" tIns="0" bIns="0">
             <a:spAutoFit/>
           </a:bodyPr>
           <a:lstStyle/>
@@ -12021,7 +12693,6 @@
           <a:lstStyle/>
           <a:p>
             <a:pPr algn="ctr"/>
-            <a:endParaRPr/>
           </a:p>
         </p:txBody>
       </p:sp>
@@ -12034,7 +12705,7 @@
 </file>
 
 <file path=ppt/slides/slide6.xml><?xml version="1.0" encoding="utf-8"?>
-<p:sld xmlns:a="http://schemas.openxmlformats.org/drawingml/2006/main" xmlns:r="http://schemas.openxmlformats.org/officeDocument/2006/relationships" xmlns:p="http://schemas.openxmlformats.org/presentationml/2006/main">
+<p:sld xmlns:a="http://schemas.openxmlformats.org/drawingml/2006/main" xmlns:p="http://schemas.openxmlformats.org/presentationml/2006/main" xmlns:r="http://schemas.openxmlformats.org/officeDocument/2006/relationships">
   <p:cSld>
     <p:spTree>
       <p:nvGrpSpPr>
@@ -12042,14 +12713,7 @@
         <p:cNvGrpSpPr/>
         <p:nvPr/>
       </p:nvGrpSpPr>
-      <p:grpSpPr>
-        <a:xfrm>
-          <a:off x="0" y="0"/>
-          <a:ext cx="0" cy="0"/>
-          <a:chOff x="0" y="0"/>
-          <a:chExt cx="0" cy="0"/>
-        </a:xfrm>
-      </p:grpSpPr>
+      <p:grpSpPr/>
       <p:sp>
         <p:nvSpPr>
           <p:cNvPr id="2" name="Rectangle 1"/>
@@ -12058,7 +12722,7 @@
         </p:nvSpPr>
         <p:spPr>
           <a:xfrm>
-            <a:off x="0" y="8164"/>
+            <a:off x="0" y="0"/>
             <a:ext cx="10689336" cy="7562088"/>
           </a:xfrm>
           <a:prstGeom prst="rect">
@@ -12091,7 +12755,6 @@
           <a:lstStyle/>
           <a:p>
             <a:pPr algn="ctr"/>
-            <a:endParaRPr/>
           </a:p>
         </p:txBody>
       </p:sp>
@@ -12136,7 +12799,6 @@
           <a:lstStyle/>
           <a:p>
             <a:pPr algn="ctr"/>
-            <a:endParaRPr/>
           </a:p>
         </p:txBody>
       </p:sp>
@@ -12157,7 +12819,7 @@
           <a:noFill/>
         </p:spPr>
         <p:txBody>
-          <a:bodyPr wrap="square" lIns="0" tIns="0" rIns="0" bIns="0" anchor="t">
+          <a:bodyPr wrap="square" anchor="t" lIns="0" rIns="0" tIns="0" bIns="0">
             <a:spAutoFit/>
           </a:bodyPr>
           <a:lstStyle/>
@@ -12202,7 +12864,7 @@
           <a:noFill/>
         </p:spPr>
         <p:txBody>
-          <a:bodyPr wrap="square" lIns="0" tIns="0" rIns="0" bIns="0" anchor="t">
+          <a:bodyPr wrap="square" anchor="t" lIns="0" rIns="0" tIns="0" bIns="0">
             <a:spAutoFit/>
           </a:bodyPr>
           <a:lstStyle/>
@@ -12280,7 +12942,6 @@
           <a:lstStyle/>
           <a:p>
             <a:pPr algn="ctr"/>
-            <a:endParaRPr/>
           </a:p>
         </p:txBody>
       </p:sp>
@@ -12301,7 +12962,7 @@
           <a:noFill/>
         </p:spPr>
         <p:txBody>
-          <a:bodyPr wrap="square" lIns="0" tIns="0" rIns="0" bIns="0" anchor="t">
+          <a:bodyPr wrap="square" anchor="t" lIns="0" rIns="0" tIns="0" bIns="0">
             <a:spAutoFit/>
           </a:bodyPr>
           <a:lstStyle/>
@@ -12346,7 +13007,7 @@
           <a:noFill/>
         </p:spPr>
         <p:txBody>
-          <a:bodyPr wrap="square" lIns="0" tIns="0" rIns="0" bIns="0" anchor="t">
+          <a:bodyPr wrap="square" anchor="t" lIns="0" rIns="0" tIns="0" bIns="0">
             <a:spAutoFit/>
           </a:bodyPr>
           <a:lstStyle/>
@@ -12415,7 +13076,6 @@
           <a:lstStyle/>
           <a:p>
             <a:pPr algn="ctr"/>
-            <a:endParaRPr/>
           </a:p>
         </p:txBody>
       </p:sp>
@@ -12462,7 +13122,6 @@
           <a:lstStyle/>
           <a:p>
             <a:pPr algn="ctr"/>
-            <a:endParaRPr/>
           </a:p>
         </p:txBody>
       </p:sp>
@@ -12483,7 +13142,7 @@
           <a:noFill/>
         </p:spPr>
         <p:txBody>
-          <a:bodyPr wrap="square" lIns="0" tIns="0" rIns="0" bIns="0" anchor="t">
+          <a:bodyPr wrap="square" anchor="t" lIns="0" rIns="0" tIns="0" bIns="0">
             <a:spAutoFit/>
           </a:bodyPr>
           <a:lstStyle/>
@@ -12528,7 +13187,7 @@
           <a:noFill/>
         </p:spPr>
         <p:txBody>
-          <a:bodyPr wrap="square" lIns="0" tIns="0" rIns="0" bIns="0" anchor="t">
+          <a:bodyPr wrap="square" anchor="t" lIns="0" rIns="0" tIns="0" bIns="0">
             <a:spAutoFit/>
           </a:bodyPr>
           <a:lstStyle/>
@@ -12573,7 +13232,7 @@
           <a:noFill/>
         </p:spPr>
         <p:txBody>
-          <a:bodyPr wrap="square" lIns="0" tIns="0" rIns="0" bIns="0" anchor="t">
+          <a:bodyPr wrap="square" anchor="t" lIns="0" rIns="0" tIns="0" bIns="0">
             <a:spAutoFit/>
           </a:bodyPr>
           <a:lstStyle/>
@@ -12644,7 +13303,6 @@
           <a:lstStyle/>
           <a:p>
             <a:pPr algn="ctr"/>
-            <a:endParaRPr/>
           </a:p>
         </p:txBody>
       </p:sp>
@@ -12665,7 +13323,7 @@
           <a:noFill/>
         </p:spPr>
         <p:txBody>
-          <a:bodyPr wrap="square" lIns="0" tIns="0" rIns="0" bIns="0" anchor="t">
+          <a:bodyPr wrap="square" anchor="t" lIns="0" rIns="0" tIns="0" bIns="0">
             <a:spAutoFit/>
           </a:bodyPr>
           <a:lstStyle/>
@@ -12710,7 +13368,7 @@
           <a:noFill/>
         </p:spPr>
         <p:txBody>
-          <a:bodyPr wrap="square" lIns="0" tIns="0" rIns="0" bIns="0" anchor="t">
+          <a:bodyPr wrap="square" anchor="t" lIns="0" rIns="0" tIns="0" bIns="0">
             <a:spAutoFit/>
           </a:bodyPr>
           <a:lstStyle/>
@@ -12755,7 +13413,7 @@
           <a:noFill/>
         </p:spPr>
         <p:txBody>
-          <a:bodyPr wrap="square" lIns="0" tIns="0" rIns="0" bIns="0" anchor="t">
+          <a:bodyPr wrap="square" anchor="t" lIns="0" rIns="0" tIns="0" bIns="0">
             <a:spAutoFit/>
           </a:bodyPr>
           <a:lstStyle/>
@@ -12826,7 +13484,6 @@
           <a:lstStyle/>
           <a:p>
             <a:pPr algn="ctr"/>
-            <a:endParaRPr/>
           </a:p>
         </p:txBody>
       </p:sp>
@@ -12847,7 +13504,7 @@
           <a:noFill/>
         </p:spPr>
         <p:txBody>
-          <a:bodyPr wrap="square" lIns="0" tIns="0" rIns="0" bIns="0" anchor="t">
+          <a:bodyPr wrap="square" anchor="t" lIns="0" rIns="0" tIns="0" bIns="0">
             <a:spAutoFit/>
           </a:bodyPr>
           <a:lstStyle/>
@@ -12892,7 +13549,7 @@
           <a:noFill/>
         </p:spPr>
         <p:txBody>
-          <a:bodyPr wrap="square" lIns="0" tIns="0" rIns="0" bIns="0" anchor="t">
+          <a:bodyPr wrap="square" anchor="t" lIns="0" rIns="0" tIns="0" bIns="0">
             <a:spAutoFit/>
           </a:bodyPr>
           <a:lstStyle/>
@@ -12937,7 +13594,7 @@
           <a:noFill/>
         </p:spPr>
         <p:txBody>
-          <a:bodyPr wrap="square" lIns="0" tIns="0" rIns="0" bIns="0" anchor="t">
+          <a:bodyPr wrap="square" anchor="t" lIns="0" rIns="0" tIns="0" bIns="0">
             <a:spAutoFit/>
           </a:bodyPr>
           <a:lstStyle/>
@@ -13008,7 +13665,6 @@
           <a:lstStyle/>
           <a:p>
             <a:pPr algn="ctr"/>
-            <a:endParaRPr/>
           </a:p>
         </p:txBody>
       </p:sp>
@@ -13029,7 +13685,7 @@
           <a:noFill/>
         </p:spPr>
         <p:txBody>
-          <a:bodyPr wrap="square" lIns="0" tIns="0" rIns="0" bIns="0" anchor="t">
+          <a:bodyPr wrap="square" anchor="t" lIns="0" rIns="0" tIns="0" bIns="0">
             <a:spAutoFit/>
           </a:bodyPr>
           <a:lstStyle/>
@@ -13074,7 +13730,7 @@
           <a:noFill/>
         </p:spPr>
         <p:txBody>
-          <a:bodyPr wrap="square" lIns="0" tIns="0" rIns="0" bIns="0" anchor="t">
+          <a:bodyPr wrap="square" anchor="t" lIns="0" rIns="0" tIns="0" bIns="0">
             <a:spAutoFit/>
           </a:bodyPr>
           <a:lstStyle/>
@@ -13119,7 +13775,7 @@
           <a:noFill/>
         </p:spPr>
         <p:txBody>
-          <a:bodyPr wrap="square" lIns="0" tIns="0" rIns="0" bIns="0" anchor="t">
+          <a:bodyPr wrap="square" anchor="t" lIns="0" rIns="0" tIns="0" bIns="0">
             <a:spAutoFit/>
           </a:bodyPr>
           <a:lstStyle/>
@@ -13190,7 +13846,6 @@
           <a:lstStyle/>
           <a:p>
             <a:pPr algn="ctr"/>
-            <a:endParaRPr/>
           </a:p>
         </p:txBody>
       </p:sp>
@@ -13211,7 +13866,7 @@
           <a:noFill/>
         </p:spPr>
         <p:txBody>
-          <a:bodyPr wrap="square" lIns="0" tIns="0" rIns="0" bIns="0" anchor="t">
+          <a:bodyPr wrap="square" anchor="t" lIns="0" rIns="0" tIns="0" bIns="0">
             <a:spAutoFit/>
           </a:bodyPr>
           <a:lstStyle/>
@@ -13280,7 +13935,6 @@
           <a:lstStyle/>
           <a:p>
             <a:pPr algn="ctr"/>
-            <a:endParaRPr/>
           </a:p>
         </p:txBody>
       </p:sp>
@@ -13301,7 +13955,7 @@
           <a:noFill/>
         </p:spPr>
         <p:txBody>
-          <a:bodyPr wrap="square" lIns="0" tIns="0" rIns="0" bIns="0" anchor="ctr">
+          <a:bodyPr wrap="square" anchor="ctr" lIns="0" rIns="0" tIns="0" bIns="0">
             <a:spAutoFit/>
           </a:bodyPr>
           <a:lstStyle/>
@@ -13346,7 +14000,7 @@
           <a:noFill/>
         </p:spPr>
         <p:txBody>
-          <a:bodyPr wrap="square" lIns="0" tIns="0" rIns="0" bIns="0" anchor="t">
+          <a:bodyPr wrap="square" anchor="t" lIns="0" rIns="0" tIns="0" bIns="0">
             <a:spAutoFit/>
           </a:bodyPr>
           <a:lstStyle/>
@@ -13391,7 +14045,7 @@
           <a:noFill/>
         </p:spPr>
         <p:txBody>
-          <a:bodyPr wrap="square" lIns="0" tIns="0" rIns="0" bIns="0" anchor="t">
+          <a:bodyPr wrap="square" anchor="t" lIns="0" rIns="0" tIns="0" bIns="0">
             <a:spAutoFit/>
           </a:bodyPr>
           <a:lstStyle/>
@@ -13462,7 +14116,6 @@
           <a:lstStyle/>
           <a:p>
             <a:pPr algn="ctr"/>
-            <a:endParaRPr/>
           </a:p>
         </p:txBody>
       </p:sp>
@@ -13483,7 +14136,7 @@
           <a:noFill/>
         </p:spPr>
         <p:txBody>
-          <a:bodyPr wrap="square" lIns="0" tIns="0" rIns="0" bIns="0" anchor="t">
+          <a:bodyPr wrap="square" anchor="t" lIns="0" rIns="0" tIns="0" bIns="0">
             <a:spAutoFit/>
           </a:bodyPr>
           <a:lstStyle/>
@@ -13552,7 +14205,6 @@
           <a:lstStyle/>
           <a:p>
             <a:pPr algn="ctr"/>
-            <a:endParaRPr/>
           </a:p>
         </p:txBody>
       </p:sp>
@@ -13573,7 +14225,7 @@
           <a:noFill/>
         </p:spPr>
         <p:txBody>
-          <a:bodyPr wrap="square" lIns="0" tIns="0" rIns="0" bIns="0" anchor="ctr">
+          <a:bodyPr wrap="square" anchor="ctr" lIns="0" rIns="0" tIns="0" bIns="0">
             <a:spAutoFit/>
           </a:bodyPr>
           <a:lstStyle/>
@@ -13618,7 +14270,7 @@
           <a:noFill/>
         </p:spPr>
         <p:txBody>
-          <a:bodyPr wrap="square" lIns="0" tIns="0" rIns="0" bIns="0" anchor="t">
+          <a:bodyPr wrap="square" anchor="t" lIns="0" rIns="0" tIns="0" bIns="0">
             <a:spAutoFit/>
           </a:bodyPr>
           <a:lstStyle/>
@@ -13663,7 +14315,7 @@
           <a:noFill/>
         </p:spPr>
         <p:txBody>
-          <a:bodyPr wrap="square" lIns="0" tIns="0" rIns="0" bIns="0" anchor="t">
+          <a:bodyPr wrap="square" anchor="t" lIns="0" rIns="0" tIns="0" bIns="0">
             <a:spAutoFit/>
           </a:bodyPr>
           <a:lstStyle/>
@@ -13734,7 +14386,6 @@
           <a:lstStyle/>
           <a:p>
             <a:pPr algn="ctr"/>
-            <a:endParaRPr/>
           </a:p>
         </p:txBody>
       </p:sp>
@@ -13755,7 +14406,7 @@
           <a:noFill/>
         </p:spPr>
         <p:txBody>
-          <a:bodyPr wrap="square" lIns="0" tIns="0" rIns="0" bIns="0" anchor="t">
+          <a:bodyPr wrap="square" anchor="t" lIns="0" rIns="0" tIns="0" bIns="0">
             <a:spAutoFit/>
           </a:bodyPr>
           <a:lstStyle/>
@@ -13824,7 +14475,6 @@
           <a:lstStyle/>
           <a:p>
             <a:pPr algn="ctr"/>
-            <a:endParaRPr/>
           </a:p>
         </p:txBody>
       </p:sp>
@@ -13845,7 +14495,7 @@
           <a:noFill/>
         </p:spPr>
         <p:txBody>
-          <a:bodyPr wrap="square" lIns="0" tIns="0" rIns="0" bIns="0" anchor="ctr">
+          <a:bodyPr wrap="square" anchor="ctr" lIns="0" rIns="0" tIns="0" bIns="0">
             <a:spAutoFit/>
           </a:bodyPr>
           <a:lstStyle/>
@@ -13890,7 +14540,7 @@
           <a:noFill/>
         </p:spPr>
         <p:txBody>
-          <a:bodyPr wrap="square" lIns="0" tIns="0" rIns="0" bIns="0" anchor="t">
+          <a:bodyPr wrap="square" anchor="t" lIns="0" rIns="0" tIns="0" bIns="0">
             <a:spAutoFit/>
           </a:bodyPr>
           <a:lstStyle/>
@@ -13935,7 +14585,7 @@
           <a:noFill/>
         </p:spPr>
         <p:txBody>
-          <a:bodyPr wrap="square" lIns="0" tIns="0" rIns="0" bIns="0" anchor="t">
+          <a:bodyPr wrap="square" anchor="t" lIns="0" rIns="0" tIns="0" bIns="0">
             <a:spAutoFit/>
           </a:bodyPr>
           <a:lstStyle/>
@@ -14006,7 +14656,6 @@
           <a:lstStyle/>
           <a:p>
             <a:pPr algn="ctr"/>
-            <a:endParaRPr/>
           </a:p>
         </p:txBody>
       </p:sp>
@@ -14027,7 +14676,7 @@
           <a:noFill/>
         </p:spPr>
         <p:txBody>
-          <a:bodyPr wrap="square" lIns="0" tIns="0" rIns="0" bIns="0" anchor="t">
+          <a:bodyPr wrap="square" anchor="t" lIns="0" rIns="0" tIns="0" bIns="0">
             <a:spAutoFit/>
           </a:bodyPr>
           <a:lstStyle/>
@@ -14072,7 +14721,7 @@
           <a:noFill/>
         </p:spPr>
         <p:txBody>
-          <a:bodyPr wrap="square" lIns="0" tIns="0" rIns="0" bIns="0" anchor="t">
+          <a:bodyPr wrap="square" anchor="t" lIns="0" rIns="0" tIns="0" bIns="0">
             <a:spAutoFit/>
           </a:bodyPr>
           <a:lstStyle/>
@@ -14117,7 +14766,7 @@
           <a:noFill/>
         </p:spPr>
         <p:txBody>
-          <a:bodyPr wrap="square" lIns="0" tIns="0" rIns="0" bIns="0" anchor="t">
+          <a:bodyPr wrap="square" anchor="t" lIns="0" rIns="0" tIns="0" bIns="0">
             <a:spAutoFit/>
           </a:bodyPr>
           <a:lstStyle/>
@@ -14188,7 +14837,6 @@
           <a:lstStyle/>
           <a:p>
             <a:pPr algn="ctr"/>
-            <a:endParaRPr/>
           </a:p>
         </p:txBody>
       </p:sp>
@@ -14209,7 +14857,7 @@
           <a:noFill/>
         </p:spPr>
         <p:txBody>
-          <a:bodyPr wrap="square" lIns="0" tIns="0" rIns="0" bIns="0" anchor="t">
+          <a:bodyPr wrap="square" anchor="t" lIns="0" rIns="0" tIns="0" bIns="0">
             <a:spAutoFit/>
           </a:bodyPr>
           <a:lstStyle/>
@@ -14254,7 +14902,7 @@
           <a:noFill/>
         </p:spPr>
         <p:txBody>
-          <a:bodyPr wrap="square" lIns="0" tIns="0" rIns="0" bIns="0" anchor="t">
+          <a:bodyPr wrap="square" anchor="t" lIns="0" rIns="0" tIns="0" bIns="0">
             <a:spAutoFit/>
           </a:bodyPr>
           <a:lstStyle/>
@@ -14299,7 +14947,7 @@
           <a:noFill/>
         </p:spPr>
         <p:txBody>
-          <a:bodyPr wrap="square" lIns="0" tIns="0" rIns="0" bIns="0" anchor="t">
+          <a:bodyPr wrap="square" anchor="t" lIns="0" rIns="0" tIns="0" bIns="0">
             <a:spAutoFit/>
           </a:bodyPr>
           <a:lstStyle/>
@@ -14370,7 +15018,6 @@
           <a:lstStyle/>
           <a:p>
             <a:pPr algn="ctr"/>
-            <a:endParaRPr/>
           </a:p>
         </p:txBody>
       </p:sp>
@@ -14391,7 +15038,7 @@
           <a:noFill/>
         </p:spPr>
         <p:txBody>
-          <a:bodyPr wrap="square" lIns="0" tIns="0" rIns="0" bIns="0" anchor="t">
+          <a:bodyPr wrap="square" anchor="t" lIns="0" rIns="0" tIns="0" bIns="0">
             <a:spAutoFit/>
           </a:bodyPr>
           <a:lstStyle/>
@@ -14460,7 +15107,6 @@
           <a:lstStyle/>
           <a:p>
             <a:pPr algn="ctr"/>
-            <a:endParaRPr/>
           </a:p>
         </p:txBody>
       </p:sp>
@@ -14481,7 +15127,7 @@
           <a:noFill/>
         </p:spPr>
         <p:txBody>
-          <a:bodyPr wrap="square" lIns="0" tIns="0" rIns="0" bIns="0" anchor="ctr">
+          <a:bodyPr wrap="square" anchor="ctr" lIns="0" rIns="0" tIns="0" bIns="0">
             <a:spAutoFit/>
           </a:bodyPr>
           <a:lstStyle/>
@@ -14526,7 +15172,7 @@
           <a:noFill/>
         </p:spPr>
         <p:txBody>
-          <a:bodyPr wrap="square" lIns="0" tIns="0" rIns="0" bIns="0" anchor="t">
+          <a:bodyPr wrap="square" anchor="t" lIns="0" rIns="0" tIns="0" bIns="0">
             <a:spAutoFit/>
           </a:bodyPr>
           <a:lstStyle/>
@@ -14571,7 +15217,7 @@
           <a:noFill/>
         </p:spPr>
         <p:txBody>
-          <a:bodyPr wrap="square" lIns="0" tIns="0" rIns="0" bIns="0" anchor="t">
+          <a:bodyPr wrap="square" anchor="t" lIns="0" rIns="0" tIns="0" bIns="0">
             <a:spAutoFit/>
           </a:bodyPr>
           <a:lstStyle/>
@@ -14607,8 +15253,8 @@
         </p:nvSpPr>
         <p:spPr>
           <a:xfrm>
-            <a:off x="603504" y="6343650"/>
-            <a:ext cx="9482328" cy="825246"/>
+            <a:off x="603504" y="6455664"/>
+            <a:ext cx="9482328" cy="713232"/>
           </a:xfrm>
           <a:prstGeom prst="rect">
             <a:avLst/>
@@ -14640,7 +15286,6 @@
           <a:lstStyle/>
           <a:p>
             <a:pPr algn="ctr"/>
-            <a:endParaRPr/>
           </a:p>
         </p:txBody>
       </p:sp>
@@ -14652,8 +15297,8 @@
         </p:nvSpPr>
         <p:spPr>
           <a:xfrm>
-            <a:off x="612646" y="6343650"/>
-            <a:ext cx="54865" cy="825246"/>
+            <a:off x="603504" y="6455664"/>
+            <a:ext cx="64008" cy="713232"/>
           </a:xfrm>
           <a:prstGeom prst="rect">
             <a:avLst/>
@@ -14685,7 +15330,6 @@
           <a:lstStyle/>
           <a:p>
             <a:pPr algn="ctr"/>
-            <a:endParaRPr/>
           </a:p>
         </p:txBody>
       </p:sp>
@@ -14697,7 +15341,7 @@
         </p:nvSpPr>
         <p:spPr>
           <a:xfrm>
-            <a:off x="850392" y="6483858"/>
+            <a:off x="859536" y="6565392"/>
             <a:ext cx="8979407" cy="512064"/>
           </a:xfrm>
           <a:prstGeom prst="rect">
@@ -14706,7 +15350,7 @@
           <a:noFill/>
         </p:spPr>
         <p:txBody>
-          <a:bodyPr wrap="square" lIns="0" tIns="0" rIns="0" bIns="0" anchor="t">
+          <a:bodyPr wrap="square" anchor="t" lIns="0" rIns="0" tIns="0" bIns="0">
             <a:spAutoFit/>
           </a:bodyPr>
           <a:lstStyle/>
@@ -14723,7 +15367,7 @@
               </a:spcAft>
             </a:pPr>
             <a:r>
-              <a:rPr sz="850" b="1" i="0" spc="140" dirty="0">
+              <a:rPr sz="850" b="1" i="0" spc="140">
                 <a:solidFill>
                   <a:srgbClr val="046A38"/>
                 </a:solidFill>
@@ -14745,7 +15389,7 @@
               </a:spcAft>
             </a:pPr>
             <a:r>
-              <a:rPr sz="1150" b="0" i="0" dirty="0">
+              <a:rPr sz="1150" b="0" i="0">
                 <a:solidFill>
                   <a:srgbClr val="222427"/>
                 </a:solidFill>
@@ -14754,7 +15398,7 @@
               <a:t>The </a:t>
             </a:r>
             <a:r>
-              <a:rPr sz="1150" b="1" i="0" dirty="0">
+              <a:rPr sz="1150" b="1" i="0">
                 <a:solidFill>
                   <a:srgbClr val="0E0E0E"/>
                 </a:solidFill>
@@ -14763,7 +15407,7 @@
               <a:t>AI</a:t>
             </a:r>
             <a:r>
-              <a:rPr sz="1150" b="0" i="0" dirty="0">
+              <a:rPr sz="1150" b="0" i="0">
                 <a:solidFill>
                   <a:srgbClr val="222427"/>
                 </a:solidFill>
@@ -14783,7 +15427,7 @@
 </file>
 
 <file path=ppt/slides/slide7.xml><?xml version="1.0" encoding="utf-8"?>
-<p:sld xmlns:a="http://schemas.openxmlformats.org/drawingml/2006/main" xmlns:r="http://schemas.openxmlformats.org/officeDocument/2006/relationships" xmlns:p="http://schemas.openxmlformats.org/presentationml/2006/main">
+<p:sld xmlns:a="http://schemas.openxmlformats.org/drawingml/2006/main" xmlns:p="http://schemas.openxmlformats.org/presentationml/2006/main" xmlns:r="http://schemas.openxmlformats.org/officeDocument/2006/relationships">
   <p:cSld>
     <p:spTree>
       <p:nvGrpSpPr>
@@ -14791,14 +15435,7 @@
         <p:cNvGrpSpPr/>
         <p:nvPr/>
       </p:nvGrpSpPr>
-      <p:grpSpPr>
-        <a:xfrm>
-          <a:off x="0" y="0"/>
-          <a:ext cx="0" cy="0"/>
-          <a:chOff x="0" y="0"/>
-          <a:chExt cx="0" cy="0"/>
-        </a:xfrm>
-      </p:grpSpPr>
+      <p:grpSpPr/>
       <p:sp>
         <p:nvSpPr>
           <p:cNvPr id="2" name="Rectangle 1"/>
@@ -14840,7 +15477,6 @@
           <a:lstStyle/>
           <a:p>
             <a:pPr algn="ctr"/>
-            <a:endParaRPr/>
           </a:p>
         </p:txBody>
       </p:sp>
@@ -14885,7 +15521,6 @@
           <a:lstStyle/>
           <a:p>
             <a:pPr algn="ctr"/>
-            <a:endParaRPr/>
           </a:p>
         </p:txBody>
       </p:sp>
@@ -14906,7 +15541,7 @@
           <a:noFill/>
         </p:spPr>
         <p:txBody>
-          <a:bodyPr wrap="square" lIns="0" tIns="0" rIns="0" bIns="0" anchor="t">
+          <a:bodyPr wrap="square" anchor="t" lIns="0" rIns="0" tIns="0" bIns="0">
             <a:spAutoFit/>
           </a:bodyPr>
           <a:lstStyle/>
@@ -14951,7 +15586,7 @@
           <a:noFill/>
         </p:spPr>
         <p:txBody>
-          <a:bodyPr wrap="square" lIns="0" tIns="0" rIns="0" bIns="0" anchor="t">
+          <a:bodyPr wrap="square" anchor="t" lIns="0" rIns="0" tIns="0" bIns="0">
             <a:spAutoFit/>
           </a:bodyPr>
           <a:lstStyle/>
@@ -15029,7 +15664,6 @@
           <a:lstStyle/>
           <a:p>
             <a:pPr algn="ctr"/>
-            <a:endParaRPr/>
           </a:p>
         </p:txBody>
       </p:sp>
@@ -15050,7 +15684,7 @@
           <a:noFill/>
         </p:spPr>
         <p:txBody>
-          <a:bodyPr wrap="square" lIns="0" tIns="0" rIns="0" bIns="0" anchor="t">
+          <a:bodyPr wrap="square" anchor="t" lIns="0" rIns="0" tIns="0" bIns="0">
             <a:spAutoFit/>
           </a:bodyPr>
           <a:lstStyle/>
@@ -15095,7 +15729,7 @@
           <a:noFill/>
         </p:spPr>
         <p:txBody>
-          <a:bodyPr wrap="square" lIns="0" tIns="0" rIns="0" bIns="0" anchor="t">
+          <a:bodyPr wrap="square" anchor="t" lIns="0" rIns="0" tIns="0" bIns="0">
             <a:spAutoFit/>
           </a:bodyPr>
           <a:lstStyle/>
@@ -15164,7 +15798,6 @@
           <a:lstStyle/>
           <a:p>
             <a:pPr algn="ctr"/>
-            <a:endParaRPr/>
           </a:p>
         </p:txBody>
       </p:sp>
@@ -15211,7 +15844,6 @@
           <a:lstStyle/>
           <a:p>
             <a:pPr algn="ctr"/>
-            <a:endParaRPr/>
           </a:p>
         </p:txBody>
       </p:sp>
@@ -15232,7 +15864,7 @@
           <a:noFill/>
         </p:spPr>
         <p:txBody>
-          <a:bodyPr wrap="square" lIns="0" tIns="0" rIns="0" bIns="0" anchor="t">
+          <a:bodyPr wrap="square" anchor="t" lIns="0" rIns="0" tIns="0" bIns="0">
             <a:spAutoFit/>
           </a:bodyPr>
           <a:lstStyle/>
@@ -15277,7 +15909,7 @@
           <a:noFill/>
         </p:spPr>
         <p:txBody>
-          <a:bodyPr wrap="square" lIns="0" tIns="0" rIns="0" bIns="0" anchor="t">
+          <a:bodyPr wrap="square" anchor="t" lIns="0" rIns="0" tIns="0" bIns="0">
             <a:spAutoFit/>
           </a:bodyPr>
           <a:lstStyle/>
@@ -15322,7 +15954,7 @@
           <a:noFill/>
         </p:spPr>
         <p:txBody>
-          <a:bodyPr wrap="square" lIns="0" tIns="0" rIns="0" bIns="0" anchor="ctr">
+          <a:bodyPr wrap="square" anchor="ctr" lIns="0" rIns="0" tIns="0" bIns="0">
             <a:spAutoFit/>
           </a:bodyPr>
           <a:lstStyle/>
@@ -15393,7 +16025,6 @@
           <a:lstStyle/>
           <a:p>
             <a:pPr algn="ctr"/>
-            <a:endParaRPr/>
           </a:p>
         </p:txBody>
       </p:sp>
@@ -15414,7 +16045,7 @@
           <a:noFill/>
         </p:spPr>
         <p:txBody>
-          <a:bodyPr wrap="square" lIns="0" tIns="0" rIns="0" bIns="0" anchor="t">
+          <a:bodyPr wrap="square" anchor="t" lIns="0" rIns="0" tIns="0" bIns="0">
             <a:spAutoFit/>
           </a:bodyPr>
           <a:lstStyle/>
@@ -15459,7 +16090,7 @@
           <a:noFill/>
         </p:spPr>
         <p:txBody>
-          <a:bodyPr wrap="square" lIns="0" tIns="0" rIns="0" bIns="0" anchor="t">
+          <a:bodyPr wrap="square" anchor="t" lIns="0" rIns="0" tIns="0" bIns="0">
             <a:spAutoFit/>
           </a:bodyPr>
           <a:lstStyle/>
@@ -15504,7 +16135,7 @@
           <a:noFill/>
         </p:spPr>
         <p:txBody>
-          <a:bodyPr wrap="square" lIns="0" tIns="0" rIns="0" bIns="0" anchor="ctr">
+          <a:bodyPr wrap="square" anchor="ctr" lIns="0" rIns="0" tIns="0" bIns="0">
             <a:spAutoFit/>
           </a:bodyPr>
           <a:lstStyle/>
@@ -15575,7 +16206,6 @@
           <a:lstStyle/>
           <a:p>
             <a:pPr algn="ctr"/>
-            <a:endParaRPr/>
           </a:p>
         </p:txBody>
       </p:sp>
@@ -15596,7 +16226,7 @@
           <a:noFill/>
         </p:spPr>
         <p:txBody>
-          <a:bodyPr wrap="square" lIns="0" tIns="0" rIns="0" bIns="0" anchor="t">
+          <a:bodyPr wrap="square" anchor="t" lIns="0" rIns="0" tIns="0" bIns="0">
             <a:spAutoFit/>
           </a:bodyPr>
           <a:lstStyle/>
@@ -15641,7 +16271,7 @@
           <a:noFill/>
         </p:spPr>
         <p:txBody>
-          <a:bodyPr wrap="square" lIns="0" tIns="0" rIns="0" bIns="0" anchor="t">
+          <a:bodyPr wrap="square" anchor="t" lIns="0" rIns="0" tIns="0" bIns="0">
             <a:spAutoFit/>
           </a:bodyPr>
           <a:lstStyle/>
@@ -15686,7 +16316,7 @@
           <a:noFill/>
         </p:spPr>
         <p:txBody>
-          <a:bodyPr wrap="square" lIns="0" tIns="0" rIns="0" bIns="0" anchor="ctr">
+          <a:bodyPr wrap="square" anchor="ctr" lIns="0" rIns="0" tIns="0" bIns="0">
             <a:spAutoFit/>
           </a:bodyPr>
           <a:lstStyle/>
@@ -15757,7 +16387,6 @@
           <a:lstStyle/>
           <a:p>
             <a:pPr algn="ctr"/>
-            <a:endParaRPr/>
           </a:p>
         </p:txBody>
       </p:sp>
@@ -15778,7 +16407,7 @@
           <a:noFill/>
         </p:spPr>
         <p:txBody>
-          <a:bodyPr wrap="square" lIns="0" tIns="0" rIns="0" bIns="0" anchor="t">
+          <a:bodyPr wrap="square" anchor="t" lIns="0" rIns="0" tIns="0" bIns="0">
             <a:spAutoFit/>
           </a:bodyPr>
           <a:lstStyle/>
@@ -15823,7 +16452,7 @@
           <a:noFill/>
         </p:spPr>
         <p:txBody>
-          <a:bodyPr wrap="square" lIns="0" tIns="0" rIns="0" bIns="0" anchor="t">
+          <a:bodyPr wrap="square" anchor="t" lIns="0" rIns="0" tIns="0" bIns="0">
             <a:spAutoFit/>
           </a:bodyPr>
           <a:lstStyle/>
@@ -15868,7 +16497,7 @@
           <a:noFill/>
         </p:spPr>
         <p:txBody>
-          <a:bodyPr wrap="square" lIns="0" tIns="0" rIns="0" bIns="0" anchor="t">
+          <a:bodyPr wrap="square" anchor="t" lIns="0" rIns="0" tIns="0" bIns="0">
             <a:spAutoFit/>
           </a:bodyPr>
           <a:lstStyle/>
@@ -15939,7 +16568,6 @@
           <a:lstStyle/>
           <a:p>
             <a:pPr algn="ctr"/>
-            <a:endParaRPr/>
           </a:p>
         </p:txBody>
       </p:sp>
@@ -15984,7 +16612,6 @@
           <a:lstStyle/>
           <a:p>
             <a:pPr algn="ctr"/>
-            <a:endParaRPr/>
           </a:p>
         </p:txBody>
       </p:sp>
@@ -16005,7 +16632,7 @@
           <a:noFill/>
         </p:spPr>
         <p:txBody>
-          <a:bodyPr wrap="square" lIns="0" tIns="0" rIns="0" bIns="0" anchor="t">
+          <a:bodyPr wrap="square" anchor="t" lIns="0" rIns="0" tIns="0" bIns="0">
             <a:spAutoFit/>
           </a:bodyPr>
           <a:lstStyle/>
@@ -16050,7 +16677,7 @@
           <a:noFill/>
         </p:spPr>
         <p:txBody>
-          <a:bodyPr wrap="square" lIns="0" tIns="0" rIns="0" bIns="0" anchor="t">
+          <a:bodyPr wrap="square" anchor="t" lIns="0" rIns="0" tIns="0" bIns="0">
             <a:spAutoFit/>
           </a:bodyPr>
           <a:lstStyle/>
@@ -16121,7 +16748,6 @@
           <a:lstStyle/>
           <a:p>
             <a:pPr algn="ctr"/>
-            <a:endParaRPr/>
           </a:p>
         </p:txBody>
       </p:sp>
@@ -16166,7 +16792,6 @@
           <a:lstStyle/>
           <a:p>
             <a:pPr algn="ctr"/>
-            <a:endParaRPr/>
           </a:p>
         </p:txBody>
       </p:sp>
@@ -16187,7 +16812,7 @@
           <a:noFill/>
         </p:spPr>
         <p:txBody>
-          <a:bodyPr wrap="square" lIns="0" tIns="0" rIns="0" bIns="0" anchor="t">
+          <a:bodyPr wrap="square" anchor="t" lIns="0" rIns="0" tIns="0" bIns="0">
             <a:spAutoFit/>
           </a:bodyPr>
           <a:lstStyle/>
@@ -16232,7 +16857,7 @@
           <a:noFill/>
         </p:spPr>
         <p:txBody>
-          <a:bodyPr wrap="square" lIns="0" tIns="0" rIns="0" bIns="0" anchor="t">
+          <a:bodyPr wrap="square" anchor="t" lIns="0" rIns="0" tIns="0" bIns="0">
             <a:spAutoFit/>
           </a:bodyPr>
           <a:lstStyle/>
@@ -16303,7 +16928,6 @@
           <a:lstStyle/>
           <a:p>
             <a:pPr algn="ctr"/>
-            <a:endParaRPr/>
           </a:p>
         </p:txBody>
       </p:sp>
@@ -16348,7 +16972,6 @@
           <a:lstStyle/>
           <a:p>
             <a:pPr algn="ctr"/>
-            <a:endParaRPr/>
           </a:p>
         </p:txBody>
       </p:sp>
@@ -16369,7 +16992,7 @@
           <a:noFill/>
         </p:spPr>
         <p:txBody>
-          <a:bodyPr wrap="square" lIns="0" tIns="0" rIns="0" bIns="0" anchor="t">
+          <a:bodyPr wrap="square" anchor="t" lIns="0" rIns="0" tIns="0" bIns="0">
             <a:spAutoFit/>
           </a:bodyPr>
           <a:lstStyle/>
@@ -16414,7 +17037,7 @@
           <a:noFill/>
         </p:spPr>
         <p:txBody>
-          <a:bodyPr wrap="square" lIns="0" tIns="0" rIns="0" bIns="0" anchor="t">
+          <a:bodyPr wrap="square" anchor="t" lIns="0" rIns="0" tIns="0" bIns="0">
             <a:spAutoFit/>
           </a:bodyPr>
           <a:lstStyle/>
@@ -16450,8 +17073,8 @@
         </p:nvSpPr>
         <p:spPr>
           <a:xfrm>
-            <a:off x="603504" y="6351814"/>
-            <a:ext cx="9482328" cy="817082"/>
+            <a:off x="603504" y="6455664"/>
+            <a:ext cx="9482328" cy="713232"/>
           </a:xfrm>
           <a:prstGeom prst="rect">
             <a:avLst/>
@@ -16483,7 +17106,6 @@
           <a:lstStyle/>
           <a:p>
             <a:pPr algn="ctr"/>
-            <a:endParaRPr/>
           </a:p>
         </p:txBody>
       </p:sp>
@@ -16495,8 +17117,8 @@
         </p:nvSpPr>
         <p:spPr>
           <a:xfrm>
-            <a:off x="602806" y="6351814"/>
-            <a:ext cx="64706" cy="817082"/>
+            <a:off x="603504" y="6455664"/>
+            <a:ext cx="64008" cy="713232"/>
           </a:xfrm>
           <a:prstGeom prst="rect">
             <a:avLst/>
@@ -16528,7 +17150,6 @@
           <a:lstStyle/>
           <a:p>
             <a:pPr algn="ctr"/>
-            <a:endParaRPr/>
           </a:p>
         </p:txBody>
       </p:sp>
@@ -16540,7 +17161,7 @@
         </p:nvSpPr>
         <p:spPr>
           <a:xfrm>
-            <a:off x="859536" y="6483858"/>
+            <a:off x="859536" y="6565392"/>
             <a:ext cx="8979407" cy="512064"/>
           </a:xfrm>
           <a:prstGeom prst="rect">
@@ -16549,7 +17170,7 @@
           <a:noFill/>
         </p:spPr>
         <p:txBody>
-          <a:bodyPr wrap="square" lIns="0" tIns="0" rIns="0" bIns="0" anchor="t">
+          <a:bodyPr wrap="square" anchor="t" lIns="0" rIns="0" tIns="0" bIns="0">
             <a:spAutoFit/>
           </a:bodyPr>
           <a:lstStyle/>
@@ -16566,7 +17187,7 @@
               </a:spcAft>
             </a:pPr>
             <a:r>
-              <a:rPr sz="850" b="1" i="0" spc="140" dirty="0">
+              <a:rPr sz="850" b="1" i="0" spc="140">
                 <a:solidFill>
                   <a:srgbClr val="046A38"/>
                 </a:solidFill>
@@ -16588,7 +17209,7 @@
               </a:spcAft>
             </a:pPr>
             <a:r>
-              <a:rPr sz="1150" b="0" i="0" dirty="0">
+              <a:rPr sz="1150" b="0" i="0">
                 <a:solidFill>
                   <a:srgbClr val="222427"/>
                 </a:solidFill>
@@ -16608,7 +17229,7 @@
 </file>
 
 <file path=ppt/slides/slide8.xml><?xml version="1.0" encoding="utf-8"?>
-<p:sld xmlns:a="http://schemas.openxmlformats.org/drawingml/2006/main" xmlns:r="http://schemas.openxmlformats.org/officeDocument/2006/relationships" xmlns:p="http://schemas.openxmlformats.org/presentationml/2006/main">
+<p:sld xmlns:a="http://schemas.openxmlformats.org/drawingml/2006/main" xmlns:p="http://schemas.openxmlformats.org/presentationml/2006/main" xmlns:r="http://schemas.openxmlformats.org/officeDocument/2006/relationships">
   <p:cSld>
     <p:spTree>
       <p:nvGrpSpPr>
@@ -16616,14 +17237,7 @@
         <p:cNvGrpSpPr/>
         <p:nvPr/>
       </p:nvGrpSpPr>
-      <p:grpSpPr>
-        <a:xfrm>
-          <a:off x="0" y="0"/>
-          <a:ext cx="0" cy="0"/>
-          <a:chOff x="0" y="0"/>
-          <a:chExt cx="0" cy="0"/>
-        </a:xfrm>
-      </p:grpSpPr>
+      <p:grpSpPr/>
       <p:sp>
         <p:nvSpPr>
           <p:cNvPr id="2" name="Rectangle 1"/>
@@ -16665,7 +17279,6 @@
           <a:lstStyle/>
           <a:p>
             <a:pPr algn="ctr"/>
-            <a:endParaRPr/>
           </a:p>
         </p:txBody>
       </p:sp>
@@ -16710,7 +17323,6 @@
           <a:lstStyle/>
           <a:p>
             <a:pPr algn="ctr"/>
-            <a:endParaRPr/>
           </a:p>
         </p:txBody>
       </p:sp>
@@ -16731,7 +17343,7 @@
           <a:noFill/>
         </p:spPr>
         <p:txBody>
-          <a:bodyPr wrap="square" lIns="0" tIns="0" rIns="0" bIns="0" anchor="t">
+          <a:bodyPr wrap="square" anchor="t" lIns="0" rIns="0" tIns="0" bIns="0">
             <a:spAutoFit/>
           </a:bodyPr>
           <a:lstStyle/>
@@ -16776,7 +17388,7 @@
           <a:noFill/>
         </p:spPr>
         <p:txBody>
-          <a:bodyPr wrap="square" lIns="0" tIns="0" rIns="0" bIns="0" anchor="t">
+          <a:bodyPr wrap="square" anchor="t" lIns="0" rIns="0" tIns="0" bIns="0">
             <a:spAutoFit/>
           </a:bodyPr>
           <a:lstStyle/>
@@ -16793,7 +17405,7 @@
               </a:spcAft>
             </a:pPr>
             <a:r>
-              <a:rPr sz="3000" b="1" i="0" dirty="0">
+              <a:rPr sz="3000" b="1" i="0">
                 <a:solidFill>
                   <a:srgbClr val="0E0E0E"/>
                 </a:solidFill>
@@ -16802,7 +17414,7 @@
               <a:t>What lands in the output folder</a:t>
             </a:r>
             <a:r>
-              <a:rPr sz="3000" b="1" i="0" dirty="0">
+              <a:rPr sz="3000" b="1" i="0">
                 <a:solidFill>
                   <a:srgbClr val="86BC25"/>
                 </a:solidFill>
@@ -16854,7 +17466,6 @@
           <a:lstStyle/>
           <a:p>
             <a:pPr algn="ctr"/>
-            <a:endParaRPr/>
           </a:p>
         </p:txBody>
       </p:sp>
@@ -16875,7 +17486,7 @@
           <a:noFill/>
         </p:spPr>
         <p:txBody>
-          <a:bodyPr wrap="square" lIns="0" tIns="0" rIns="0" bIns="0" anchor="t">
+          <a:bodyPr wrap="square" anchor="t" lIns="0" rIns="0" tIns="0" bIns="0">
             <a:spAutoFit/>
           </a:bodyPr>
           <a:lstStyle/>
@@ -16920,7 +17531,7 @@
           <a:noFill/>
         </p:spPr>
         <p:txBody>
-          <a:bodyPr wrap="square" lIns="0" tIns="0" rIns="0" bIns="0" anchor="t">
+          <a:bodyPr wrap="square" anchor="t" lIns="0" rIns="0" tIns="0" bIns="0">
             <a:spAutoFit/>
           </a:bodyPr>
           <a:lstStyle/>
@@ -16989,7 +17600,6 @@
           <a:lstStyle/>
           <a:p>
             <a:pPr algn="ctr"/>
-            <a:endParaRPr/>
           </a:p>
         </p:txBody>
       </p:sp>
@@ -17036,7 +17646,6 @@
           <a:lstStyle/>
           <a:p>
             <a:pPr algn="ctr"/>
-            <a:endParaRPr/>
           </a:p>
         </p:txBody>
       </p:sp>
@@ -17049,7 +17658,7 @@
         <p:spPr>
           <a:xfrm>
             <a:off x="786384" y="2157984"/>
-            <a:ext cx="1401645" cy="292608"/>
+            <a:ext cx="1260043" cy="274320"/>
           </a:xfrm>
           <a:prstGeom prst="rect">
             <a:avLst/>
@@ -17081,7 +17690,6 @@
           <a:lstStyle/>
           <a:p>
             <a:pPr algn="ctr"/>
-            <a:endParaRPr/>
           </a:p>
         </p:txBody>
       </p:sp>
@@ -17102,7 +17710,7 @@
           <a:noFill/>
         </p:spPr>
         <p:txBody>
-          <a:bodyPr wrap="square" lIns="0" tIns="0" rIns="0" bIns="0" anchor="ctr">
+          <a:bodyPr wrap="square" anchor="ctr" lIns="0" rIns="0" tIns="0" bIns="0">
             <a:spAutoFit/>
           </a:bodyPr>
           <a:lstStyle/>
@@ -17147,7 +17755,7 @@
           <a:noFill/>
         </p:spPr>
         <p:txBody>
-          <a:bodyPr wrap="square" lIns="0" tIns="0" rIns="0" bIns="0" anchor="t">
+          <a:bodyPr wrap="square" anchor="t" lIns="0" rIns="0" tIns="0" bIns="0">
             <a:spAutoFit/>
           </a:bodyPr>
           <a:lstStyle/>
@@ -17192,7 +17800,7 @@
           <a:noFill/>
         </p:spPr>
         <p:txBody>
-          <a:bodyPr wrap="square" lIns="0" tIns="0" rIns="0" bIns="0" anchor="t">
+          <a:bodyPr wrap="square" anchor="t" lIns="0" rIns="0" tIns="0" bIns="0">
             <a:spAutoFit/>
           </a:bodyPr>
           <a:lstStyle/>
@@ -17263,7 +17871,6 @@
           <a:lstStyle/>
           <a:p>
             <a:pPr algn="ctr"/>
-            <a:endParaRPr/>
           </a:p>
         </p:txBody>
       </p:sp>
@@ -17276,7 +17883,7 @@
         <p:spPr>
           <a:xfrm>
             <a:off x="4038599" y="2157984"/>
-            <a:ext cx="1447801" cy="292608"/>
+            <a:ext cx="1260043" cy="274320"/>
           </a:xfrm>
           <a:prstGeom prst="rect">
             <a:avLst/>
@@ -17308,7 +17915,6 @@
           <a:lstStyle/>
           <a:p>
             <a:pPr algn="ctr"/>
-            <a:endParaRPr/>
           </a:p>
         </p:txBody>
       </p:sp>
@@ -17329,7 +17935,7 @@
           <a:noFill/>
         </p:spPr>
         <p:txBody>
-          <a:bodyPr wrap="square" lIns="0" tIns="0" rIns="0" bIns="0" anchor="ctr">
+          <a:bodyPr wrap="square" anchor="ctr" lIns="0" rIns="0" tIns="0" bIns="0">
             <a:spAutoFit/>
           </a:bodyPr>
           <a:lstStyle/>
@@ -17374,7 +17980,7 @@
           <a:noFill/>
         </p:spPr>
         <p:txBody>
-          <a:bodyPr wrap="square" lIns="0" tIns="0" rIns="0" bIns="0" anchor="t">
+          <a:bodyPr wrap="square" anchor="t" lIns="0" rIns="0" tIns="0" bIns="0">
             <a:spAutoFit/>
           </a:bodyPr>
           <a:lstStyle/>
@@ -17419,7 +18025,7 @@
           <a:noFill/>
         </p:spPr>
         <p:txBody>
-          <a:bodyPr wrap="square" lIns="0" tIns="0" rIns="0" bIns="0" anchor="t">
+          <a:bodyPr wrap="square" anchor="t" lIns="0" rIns="0" tIns="0" bIns="0">
             <a:spAutoFit/>
           </a:bodyPr>
           <a:lstStyle/>
@@ -17436,7 +18042,7 @@
               </a:spcAft>
             </a:pPr>
             <a:r>
-              <a:rPr sz="950" b="0" i="0" dirty="0">
+              <a:rPr sz="950" b="0" i="0">
                 <a:solidFill>
                   <a:srgbClr val="53565A"/>
                 </a:solidFill>
@@ -17490,7 +18096,6 @@
           <a:lstStyle/>
           <a:p>
             <a:pPr algn="ctr"/>
-            <a:endParaRPr/>
           </a:p>
         </p:txBody>
       </p:sp>
@@ -17503,7 +18108,7 @@
         <p:spPr>
           <a:xfrm>
             <a:off x="7290815" y="2157984"/>
-            <a:ext cx="1779706" cy="274320"/>
+            <a:ext cx="1600200" cy="274320"/>
           </a:xfrm>
           <a:prstGeom prst="rect">
             <a:avLst/>
@@ -17535,7 +18140,6 @@
           <a:lstStyle/>
           <a:p>
             <a:pPr algn="ctr"/>
-            <a:endParaRPr/>
           </a:p>
         </p:txBody>
       </p:sp>
@@ -17556,7 +18160,7 @@
           <a:noFill/>
         </p:spPr>
         <p:txBody>
-          <a:bodyPr wrap="square" lIns="0" tIns="0" rIns="0" bIns="0" anchor="ctr">
+          <a:bodyPr wrap="square" anchor="ctr" lIns="0" rIns="0" tIns="0" bIns="0">
             <a:spAutoFit/>
           </a:bodyPr>
           <a:lstStyle/>
@@ -17601,7 +18205,7 @@
           <a:noFill/>
         </p:spPr>
         <p:txBody>
-          <a:bodyPr wrap="square" lIns="0" tIns="0" rIns="0" bIns="0" anchor="t">
+          <a:bodyPr wrap="square" anchor="t" lIns="0" rIns="0" tIns="0" bIns="0">
             <a:spAutoFit/>
           </a:bodyPr>
           <a:lstStyle/>
@@ -17646,7 +18250,7 @@
           <a:noFill/>
         </p:spPr>
         <p:txBody>
-          <a:bodyPr wrap="square" lIns="0" tIns="0" rIns="0" bIns="0" anchor="t">
+          <a:bodyPr wrap="square" anchor="t" lIns="0" rIns="0" tIns="0" bIns="0">
             <a:spAutoFit/>
           </a:bodyPr>
           <a:lstStyle/>
@@ -17663,7 +18267,7 @@
               </a:spcAft>
             </a:pPr>
             <a:r>
-              <a:rPr sz="950" b="0" i="0" dirty="0">
+              <a:rPr sz="950" b="0" i="0">
                 <a:solidFill>
                   <a:srgbClr val="53565A"/>
                 </a:solidFill>
@@ -17717,7 +18321,6 @@
           <a:lstStyle/>
           <a:p>
             <a:pPr algn="ctr"/>
-            <a:endParaRPr/>
           </a:p>
         </p:txBody>
       </p:sp>
@@ -17730,7 +18333,7 @@
         <p:spPr>
           <a:xfrm>
             <a:off x="786384" y="3849624"/>
-            <a:ext cx="1973145" cy="265176"/>
+            <a:ext cx="1770278" cy="274320"/>
           </a:xfrm>
           <a:prstGeom prst="rect">
             <a:avLst/>
@@ -17762,7 +18365,6 @@
           <a:lstStyle/>
           <a:p>
             <a:pPr algn="ctr"/>
-            <a:endParaRPr/>
           </a:p>
         </p:txBody>
       </p:sp>
@@ -17783,7 +18385,7 @@
           <a:noFill/>
         </p:spPr>
         <p:txBody>
-          <a:bodyPr wrap="square" lIns="0" tIns="0" rIns="0" bIns="0" anchor="ctr">
+          <a:bodyPr wrap="square" anchor="ctr" lIns="0" rIns="0" tIns="0" bIns="0">
             <a:spAutoFit/>
           </a:bodyPr>
           <a:lstStyle/>
@@ -17828,7 +18430,7 @@
           <a:noFill/>
         </p:spPr>
         <p:txBody>
-          <a:bodyPr wrap="square" lIns="0" tIns="0" rIns="0" bIns="0" anchor="t">
+          <a:bodyPr wrap="square" anchor="t" lIns="0" rIns="0" tIns="0" bIns="0">
             <a:spAutoFit/>
           </a:bodyPr>
           <a:lstStyle/>
@@ -17873,7 +18475,7 @@
           <a:noFill/>
         </p:spPr>
         <p:txBody>
-          <a:bodyPr wrap="square" lIns="0" tIns="0" rIns="0" bIns="0" anchor="t">
+          <a:bodyPr wrap="square" anchor="t" lIns="0" rIns="0" tIns="0" bIns="0">
             <a:spAutoFit/>
           </a:bodyPr>
           <a:lstStyle/>
@@ -17944,7 +18546,6 @@
           <a:lstStyle/>
           <a:p>
             <a:pPr algn="ctr"/>
-            <a:endParaRPr/>
           </a:p>
         </p:txBody>
       </p:sp>
@@ -17957,7 +18558,7 @@
         <p:spPr>
           <a:xfrm>
             <a:off x="4038599" y="3849624"/>
-            <a:ext cx="1235530" cy="274320"/>
+            <a:ext cx="1146657" cy="274320"/>
           </a:xfrm>
           <a:prstGeom prst="rect">
             <a:avLst/>
@@ -17989,7 +18590,6 @@
           <a:lstStyle/>
           <a:p>
             <a:pPr algn="ctr"/>
-            <a:endParaRPr/>
           </a:p>
         </p:txBody>
       </p:sp>
@@ -18010,7 +18610,7 @@
           <a:noFill/>
         </p:spPr>
         <p:txBody>
-          <a:bodyPr wrap="square" lIns="0" tIns="0" rIns="0" bIns="0" anchor="ctr">
+          <a:bodyPr wrap="square" anchor="ctr" lIns="0" rIns="0" tIns="0" bIns="0">
             <a:spAutoFit/>
           </a:bodyPr>
           <a:lstStyle/>
@@ -18055,7 +18655,7 @@
           <a:noFill/>
         </p:spPr>
         <p:txBody>
-          <a:bodyPr wrap="square" lIns="0" tIns="0" rIns="0" bIns="0" anchor="t">
+          <a:bodyPr wrap="square" anchor="t" lIns="0" rIns="0" tIns="0" bIns="0">
             <a:spAutoFit/>
           </a:bodyPr>
           <a:lstStyle/>
@@ -18100,7 +18700,7 @@
           <a:noFill/>
         </p:spPr>
         <p:txBody>
-          <a:bodyPr wrap="square" lIns="0" tIns="0" rIns="0" bIns="0" anchor="t">
+          <a:bodyPr wrap="square" anchor="t" lIns="0" rIns="0" tIns="0" bIns="0">
             <a:spAutoFit/>
           </a:bodyPr>
           <a:lstStyle/>
@@ -18171,7 +18771,6 @@
           <a:lstStyle/>
           <a:p>
             <a:pPr algn="ctr"/>
-            <a:endParaRPr/>
           </a:p>
         </p:txBody>
       </p:sp>
@@ -18184,7 +18783,7 @@
         <p:spPr>
           <a:xfrm>
             <a:off x="7290815" y="3849624"/>
-            <a:ext cx="1526614" cy="274320"/>
+            <a:ext cx="1373428" cy="274320"/>
           </a:xfrm>
           <a:prstGeom prst="rect">
             <a:avLst/>
@@ -18216,7 +18815,6 @@
           <a:lstStyle/>
           <a:p>
             <a:pPr algn="ctr"/>
-            <a:endParaRPr/>
           </a:p>
         </p:txBody>
       </p:sp>
@@ -18237,7 +18835,7 @@
           <a:noFill/>
         </p:spPr>
         <p:txBody>
-          <a:bodyPr wrap="square" lIns="0" tIns="0" rIns="0" bIns="0" anchor="ctr">
+          <a:bodyPr wrap="square" anchor="ctr" lIns="0" rIns="0" tIns="0" bIns="0">
             <a:spAutoFit/>
           </a:bodyPr>
           <a:lstStyle/>
@@ -18282,7 +18880,7 @@
           <a:noFill/>
         </p:spPr>
         <p:txBody>
-          <a:bodyPr wrap="square" lIns="0" tIns="0" rIns="0" bIns="0" anchor="t">
+          <a:bodyPr wrap="square" anchor="t" lIns="0" rIns="0" tIns="0" bIns="0">
             <a:spAutoFit/>
           </a:bodyPr>
           <a:lstStyle/>
@@ -18327,7 +18925,7 @@
           <a:noFill/>
         </p:spPr>
         <p:txBody>
-          <a:bodyPr wrap="square" lIns="0" tIns="0" rIns="0" bIns="0" anchor="t">
+          <a:bodyPr wrap="square" anchor="t" lIns="0" rIns="0" tIns="0" bIns="0">
             <a:spAutoFit/>
           </a:bodyPr>
           <a:lstStyle/>
@@ -18364,7 +18962,7 @@
         <p:spPr>
           <a:xfrm>
             <a:off x="603504" y="5513832"/>
-            <a:ext cx="2766974" cy="347472"/>
+            <a:ext cx="2845612" cy="347472"/>
           </a:xfrm>
           <a:prstGeom prst="rect">
             <a:avLst/>
@@ -18398,7 +18996,6 @@
           <a:lstStyle/>
           <a:p>
             <a:pPr algn="ctr"/>
-            <a:endParaRPr/>
           </a:p>
         </p:txBody>
       </p:sp>
@@ -18411,15 +19008,15 @@
         <p:spPr>
           <a:xfrm>
             <a:off x="740664" y="5513832"/>
-            <a:ext cx="2492654" cy="347472"/>
-          </a:xfrm>
-          <a:prstGeom prst="rect">
-            <a:avLst/>
-          </a:prstGeom>
-          <a:noFill/>
-        </p:spPr>
-        <p:txBody>
-          <a:bodyPr wrap="none" lIns="0" tIns="0" rIns="0" bIns="0" anchor="ctr">
+            <a:ext cx="2571292" cy="347472"/>
+          </a:xfrm>
+          <a:prstGeom prst="rect">
+            <a:avLst/>
+          </a:prstGeom>
+          <a:noFill/>
+        </p:spPr>
+        <p:txBody>
+          <a:bodyPr wrap="none" anchor="ctr" lIns="0" rIns="0" tIns="0" bIns="0">
             <a:spAutoFit/>
           </a:bodyPr>
           <a:lstStyle/>
@@ -18442,7 +19039,7 @@
                 </a:solidFill>
                 <a:latin typeface="Courier New"/>
               </a:rPr>
-              <a:t>63</a:t>
+              <a:t>340</a:t>
             </a:r>
             <a:r>
               <a:rPr sz="900" b="0" i="0">
@@ -18464,7 +19061,7 @@
         </p:nvSpPr>
         <p:spPr>
           <a:xfrm>
-            <a:off x="3553358" y="5513832"/>
+            <a:off x="3631996" y="5513832"/>
             <a:ext cx="2924251" cy="347472"/>
           </a:xfrm>
           <a:prstGeom prst="rect">
@@ -18499,7 +19096,6 @@
           <a:lstStyle/>
           <a:p>
             <a:pPr algn="ctr"/>
-            <a:endParaRPr/>
           </a:p>
         </p:txBody>
       </p:sp>
@@ -18511,7 +19107,7 @@
         </p:nvSpPr>
         <p:spPr>
           <a:xfrm>
-            <a:off x="3690518" y="5513832"/>
+            <a:off x="3769156" y="5513832"/>
             <a:ext cx="2649931" cy="347472"/>
           </a:xfrm>
           <a:prstGeom prst="rect">
@@ -18520,7 +19116,7 @@
           <a:noFill/>
         </p:spPr>
         <p:txBody>
-          <a:bodyPr wrap="none" lIns="0" tIns="0" rIns="0" bIns="0" anchor="ctr">
+          <a:bodyPr wrap="none" anchor="ctr" lIns="0" rIns="0" tIns="0" bIns="0">
             <a:spAutoFit/>
           </a:bodyPr>
           <a:lstStyle/>
@@ -18565,7 +19161,7 @@
         </p:nvSpPr>
         <p:spPr>
           <a:xfrm>
-            <a:off x="6660489" y="5513832"/>
+            <a:off x="6739127" y="5513832"/>
             <a:ext cx="2688335" cy="347472"/>
           </a:xfrm>
           <a:prstGeom prst="rect">
@@ -18600,7 +19196,6 @@
           <a:lstStyle/>
           <a:p>
             <a:pPr algn="ctr"/>
-            <a:endParaRPr/>
           </a:p>
         </p:txBody>
       </p:sp>
@@ -18612,7 +19207,7 @@
         </p:nvSpPr>
         <p:spPr>
           <a:xfrm>
-            <a:off x="6797649" y="5513832"/>
+            <a:off x="6876288" y="5513832"/>
             <a:ext cx="2414015" cy="347472"/>
           </a:xfrm>
           <a:prstGeom prst="rect">
@@ -18621,7 +19216,7 @@
           <a:noFill/>
         </p:spPr>
         <p:txBody>
-          <a:bodyPr wrap="none" lIns="0" tIns="0" rIns="0" bIns="0" anchor="ctr">
+          <a:bodyPr wrap="none" anchor="ctr" lIns="0" rIns="0" tIns="0" bIns="0">
             <a:spAutoFit/>
           </a:bodyPr>
           <a:lstStyle/>
@@ -18699,7 +19294,6 @@
           <a:lstStyle/>
           <a:p>
             <a:pPr algn="ctr"/>
-            <a:endParaRPr/>
           </a:p>
         </p:txBody>
       </p:sp>
@@ -18744,7 +19338,6 @@
           <a:lstStyle/>
           <a:p>
             <a:pPr algn="ctr"/>
-            <a:endParaRPr/>
           </a:p>
         </p:txBody>
       </p:sp>
@@ -18765,7 +19358,7 @@
           <a:noFill/>
         </p:spPr>
         <p:txBody>
-          <a:bodyPr wrap="square" lIns="0" tIns="0" rIns="0" bIns="0" anchor="t">
+          <a:bodyPr wrap="square" anchor="t" lIns="0" rIns="0" tIns="0" bIns="0">
             <a:spAutoFit/>
           </a:bodyPr>
           <a:lstStyle/>
@@ -18824,7 +19417,7 @@
 </file>
 
 <file path=ppt/slides/slide9.xml><?xml version="1.0" encoding="utf-8"?>
-<p:sld xmlns:a="http://schemas.openxmlformats.org/drawingml/2006/main" xmlns:r="http://schemas.openxmlformats.org/officeDocument/2006/relationships" xmlns:p="http://schemas.openxmlformats.org/presentationml/2006/main">
+<p:sld xmlns:a="http://schemas.openxmlformats.org/drawingml/2006/main" xmlns:p="http://schemas.openxmlformats.org/presentationml/2006/main" xmlns:r="http://schemas.openxmlformats.org/officeDocument/2006/relationships">
   <p:cSld>
     <p:spTree>
       <p:nvGrpSpPr>
@@ -18832,14 +19425,7 @@
         <p:cNvGrpSpPr/>
         <p:nvPr/>
       </p:nvGrpSpPr>
-      <p:grpSpPr>
-        <a:xfrm>
-          <a:off x="0" y="0"/>
-          <a:ext cx="0" cy="0"/>
-          <a:chOff x="0" y="0"/>
-          <a:chExt cx="0" cy="0"/>
-        </a:xfrm>
-      </p:grpSpPr>
+      <p:grpSpPr/>
       <p:sp>
         <p:nvSpPr>
           <p:cNvPr id="2" name="Rectangle 1"/>
@@ -18881,7 +19467,6 @@
           <a:lstStyle/>
           <a:p>
             <a:pPr algn="ctr"/>
-            <a:endParaRPr/>
           </a:p>
         </p:txBody>
       </p:sp>
@@ -18926,7 +19511,6 @@
           <a:lstStyle/>
           <a:p>
             <a:pPr algn="ctr"/>
-            <a:endParaRPr/>
           </a:p>
         </p:txBody>
       </p:sp>
@@ -18947,7 +19531,7 @@
           <a:noFill/>
         </p:spPr>
         <p:txBody>
-          <a:bodyPr wrap="square" lIns="0" tIns="0" rIns="0" bIns="0" anchor="t">
+          <a:bodyPr wrap="square" anchor="t" lIns="0" rIns="0" tIns="0" bIns="0">
             <a:spAutoFit/>
           </a:bodyPr>
           <a:lstStyle/>
@@ -18992,7 +19576,7 @@
           <a:noFill/>
         </p:spPr>
         <p:txBody>
-          <a:bodyPr wrap="square" lIns="0" tIns="0" rIns="0" bIns="0" anchor="t">
+          <a:bodyPr wrap="square" anchor="t" lIns="0" rIns="0" tIns="0" bIns="0">
             <a:spAutoFit/>
           </a:bodyPr>
           <a:lstStyle/>
@@ -19070,7 +19654,6 @@
           <a:lstStyle/>
           <a:p>
             <a:pPr algn="ctr"/>
-            <a:endParaRPr/>
           </a:p>
         </p:txBody>
       </p:sp>
@@ -19091,7 +19674,7 @@
           <a:noFill/>
         </p:spPr>
         <p:txBody>
-          <a:bodyPr wrap="square" lIns="0" tIns="0" rIns="0" bIns="0" anchor="t">
+          <a:bodyPr wrap="square" anchor="t" lIns="0" rIns="0" tIns="0" bIns="0">
             <a:spAutoFit/>
           </a:bodyPr>
           <a:lstStyle/>
@@ -19136,7 +19719,7 @@
           <a:noFill/>
         </p:spPr>
         <p:txBody>
-          <a:bodyPr wrap="square" lIns="0" tIns="0" rIns="0" bIns="0" anchor="t">
+          <a:bodyPr wrap="square" anchor="t" lIns="0" rIns="0" tIns="0" bIns="0">
             <a:spAutoFit/>
           </a:bodyPr>
           <a:lstStyle/>
@@ -19205,7 +19788,6 @@
           <a:lstStyle/>
           <a:p>
             <a:pPr algn="ctr"/>
-            <a:endParaRPr/>
           </a:p>
         </p:txBody>
       </p:sp>
@@ -19226,7 +19808,7 @@
           <a:noFill/>
         </p:spPr>
         <p:txBody>
-          <a:bodyPr wrap="square" lIns="0" tIns="0" rIns="0" bIns="0" anchor="t">
+          <a:bodyPr wrap="square" anchor="t" lIns="0" rIns="0" tIns="0" bIns="0">
             <a:spAutoFit/>
           </a:bodyPr>
           <a:lstStyle/>
@@ -19271,7 +19853,7 @@
           <a:noFill/>
         </p:spPr>
         <p:txBody>
-          <a:bodyPr wrap="square" lIns="0" tIns="0" rIns="0" bIns="0" anchor="t">
+          <a:bodyPr wrap="square" anchor="t" lIns="0" rIns="0" tIns="0" bIns="0">
             <a:spAutoFit/>
           </a:bodyPr>
           <a:lstStyle/>
@@ -19340,7 +19922,6 @@
           <a:lstStyle/>
           <a:p>
             <a:pPr algn="ctr"/>
-            <a:endParaRPr/>
           </a:p>
         </p:txBody>
       </p:sp>
@@ -19361,7 +19942,7 @@
           <a:noFill/>
         </p:spPr>
         <p:txBody>
-          <a:bodyPr wrap="square" lIns="0" tIns="0" rIns="0" bIns="0" anchor="ctr">
+          <a:bodyPr wrap="square" anchor="ctr" lIns="0" rIns="0" tIns="0" bIns="0">
             <a:spAutoFit/>
           </a:bodyPr>
           <a:lstStyle/>
@@ -19406,7 +19987,7 @@
           <a:noFill/>
         </p:spPr>
         <p:txBody>
-          <a:bodyPr wrap="square" lIns="0" tIns="0" rIns="0" bIns="0" anchor="ctr">
+          <a:bodyPr wrap="square" anchor="ctr" lIns="0" rIns="0" tIns="0" bIns="0">
             <a:spAutoFit/>
           </a:bodyPr>
           <a:lstStyle/>
@@ -19475,7 +20056,6 @@
           <a:lstStyle/>
           <a:p>
             <a:pPr algn="ctr"/>
-            <a:endParaRPr/>
           </a:p>
         </p:txBody>
       </p:sp>
@@ -19496,7 +20076,7 @@
           <a:noFill/>
         </p:spPr>
         <p:txBody>
-          <a:bodyPr wrap="square" lIns="0" tIns="0" rIns="0" bIns="0" anchor="ctr">
+          <a:bodyPr wrap="square" anchor="ctr" lIns="0" rIns="0" tIns="0" bIns="0">
             <a:spAutoFit/>
           </a:bodyPr>
           <a:lstStyle/>
@@ -19541,7 +20121,7 @@
           <a:noFill/>
         </p:spPr>
         <p:txBody>
-          <a:bodyPr wrap="square" lIns="0" tIns="0" rIns="0" bIns="0" anchor="ctr">
+          <a:bodyPr wrap="square" anchor="ctr" lIns="0" rIns="0" tIns="0" bIns="0">
             <a:spAutoFit/>
           </a:bodyPr>
           <a:lstStyle/>
@@ -19610,7 +20190,6 @@
           <a:lstStyle/>
           <a:p>
             <a:pPr algn="ctr"/>
-            <a:endParaRPr/>
           </a:p>
         </p:txBody>
       </p:sp>
@@ -19631,7 +20210,7 @@
           <a:noFill/>
         </p:spPr>
         <p:txBody>
-          <a:bodyPr wrap="square" lIns="0" tIns="0" rIns="0" bIns="0" anchor="ctr">
+          <a:bodyPr wrap="square" anchor="ctr" lIns="0" rIns="0" tIns="0" bIns="0">
             <a:spAutoFit/>
           </a:bodyPr>
           <a:lstStyle/>
@@ -19676,7 +20255,7 @@
           <a:noFill/>
         </p:spPr>
         <p:txBody>
-          <a:bodyPr wrap="square" lIns="0" tIns="0" rIns="0" bIns="0" anchor="ctr">
+          <a:bodyPr wrap="square" anchor="ctr" lIns="0" rIns="0" tIns="0" bIns="0">
             <a:spAutoFit/>
           </a:bodyPr>
           <a:lstStyle/>
@@ -19745,7 +20324,6 @@
           <a:lstStyle/>
           <a:p>
             <a:pPr algn="ctr"/>
-            <a:endParaRPr/>
           </a:p>
         </p:txBody>
       </p:sp>
@@ -19766,7 +20344,7 @@
           <a:noFill/>
         </p:spPr>
         <p:txBody>
-          <a:bodyPr wrap="square" lIns="0" tIns="0" rIns="0" bIns="0" anchor="ctr">
+          <a:bodyPr wrap="square" anchor="ctr" lIns="0" rIns="0" tIns="0" bIns="0">
             <a:spAutoFit/>
           </a:bodyPr>
           <a:lstStyle/>
@@ -19811,7 +20389,7 @@
           <a:noFill/>
         </p:spPr>
         <p:txBody>
-          <a:bodyPr wrap="square" lIns="0" tIns="0" rIns="0" bIns="0" anchor="ctr">
+          <a:bodyPr wrap="square" anchor="ctr" lIns="0" rIns="0" tIns="0" bIns="0">
             <a:spAutoFit/>
           </a:bodyPr>
           <a:lstStyle/>
@@ -19880,7 +20458,6 @@
           <a:lstStyle/>
           <a:p>
             <a:pPr algn="ctr"/>
-            <a:endParaRPr/>
           </a:p>
         </p:txBody>
       </p:sp>
@@ -19901,7 +20478,7 @@
           <a:noFill/>
         </p:spPr>
         <p:txBody>
-          <a:bodyPr wrap="square" lIns="0" tIns="0" rIns="0" bIns="0" anchor="ctr">
+          <a:bodyPr wrap="square" anchor="ctr" lIns="0" rIns="0" tIns="0" bIns="0">
             <a:spAutoFit/>
           </a:bodyPr>
           <a:lstStyle/>
@@ -19946,7 +20523,7 @@
           <a:noFill/>
         </p:spPr>
         <p:txBody>
-          <a:bodyPr wrap="square" lIns="0" tIns="0" rIns="0" bIns="0" anchor="ctr">
+          <a:bodyPr wrap="square" anchor="ctr" lIns="0" rIns="0" tIns="0" bIns="0">
             <a:spAutoFit/>
           </a:bodyPr>
           <a:lstStyle/>
@@ -20015,7 +20592,6 @@
           <a:lstStyle/>
           <a:p>
             <a:pPr algn="ctr"/>
-            <a:endParaRPr/>
           </a:p>
         </p:txBody>
       </p:sp>
@@ -20060,7 +20636,6 @@
           <a:lstStyle/>
           <a:p>
             <a:pPr algn="ctr"/>
-            <a:endParaRPr/>
           </a:p>
         </p:txBody>
       </p:sp>
@@ -20105,7 +20680,6 @@
           <a:lstStyle/>
           <a:p>
             <a:pPr algn="ctr"/>
-            <a:endParaRPr/>
           </a:p>
         </p:txBody>
       </p:sp>
@@ -20126,7 +20700,7 @@
           <a:noFill/>
         </p:spPr>
         <p:txBody>
-          <a:bodyPr wrap="square" lIns="0" tIns="0" rIns="0" bIns="0" anchor="t">
+          <a:bodyPr wrap="square" anchor="t" lIns="0" rIns="0" tIns="0" bIns="0">
             <a:spAutoFit/>
           </a:bodyPr>
           <a:lstStyle/>
@@ -20143,7 +20717,7 @@
               </a:spcAft>
             </a:pPr>
             <a:r>
-              <a:rPr sz="850" b="1" i="0" spc="140" dirty="0">
+              <a:rPr sz="850" b="1" i="0" spc="140">
                 <a:solidFill>
                   <a:srgbClr val="046A38"/>
                 </a:solidFill>
@@ -20165,7 +20739,7 @@
               </a:spcAft>
             </a:pPr>
             <a:r>
-              <a:rPr sz="1150" b="0" i="0" dirty="0">
+              <a:rPr sz="1150" b="0" i="0">
                 <a:solidFill>
                   <a:srgbClr val="222427"/>
                 </a:solidFill>
@@ -20502,10 +21076,4 @@
   </a:objectDefaults>
   <a:extraClrSchemeLst/>
 </a:theme>
-</file>
-
-<file path=docMetadata/LabelInfo.xml><?xml version="1.0" encoding="utf-8"?>
-<clbl:labelList xmlns:clbl="http://schemas.microsoft.com/office/2020/mipLabelMetadata">
-  <clbl:label id="{ea60d57e-af5b-4752-ac57-3e4f28ca11dc}" enabled="1" method="Standard" siteId="{36da45f1-dd2c-4d1f-af13-5abe46b99921}" contentBits="0" removed="0"/>
-</clbl:labelList>
 </file>
--- a/docs/DEMO_DECK.pptx
+++ b/docs/DEMO_DECK.pptx
@@ -7841,7 +7841,7 @@
         <p:spPr>
           <a:xfrm>
             <a:off x="603504" y="1947672"/>
-            <a:ext cx="9482328" cy="786384"/>
+            <a:ext cx="9482328" cy="640080"/>
           </a:xfrm>
           <a:prstGeom prst="rect">
             <a:avLst/>
@@ -7887,7 +7887,7 @@
         <p:spPr>
           <a:xfrm>
             <a:off x="603504" y="1947672"/>
-            <a:ext cx="1783080" cy="786384"/>
+            <a:ext cx="1783080" cy="640080"/>
           </a:xfrm>
           <a:prstGeom prst="rect">
             <a:avLst/>
@@ -7931,7 +7931,7 @@
         <p:spPr>
           <a:xfrm>
             <a:off x="749808" y="1947672"/>
-            <a:ext cx="1554480" cy="786384"/>
+            <a:ext cx="1554480" cy="640080"/>
           </a:xfrm>
           <a:prstGeom prst="rect">
             <a:avLst/>
@@ -7975,7 +7975,7 @@
         </p:nvSpPr>
         <p:spPr>
           <a:xfrm>
-            <a:off x="2569464" y="2167128"/>
+            <a:off x="2569464" y="2093976"/>
             <a:ext cx="2126894" cy="347472"/>
           </a:xfrm>
           <a:prstGeom prst="rect">
@@ -8021,7 +8021,7 @@
         </p:nvSpPr>
         <p:spPr>
           <a:xfrm>
-            <a:off x="2660904" y="2167128"/>
+            <a:off x="2660904" y="2093976"/>
             <a:ext cx="1944014" cy="347472"/>
           </a:xfrm>
           <a:prstGeom prst="rect">
@@ -8066,7 +8066,7 @@
         </p:nvSpPr>
         <p:spPr>
           <a:xfrm>
-            <a:off x="4824374" y="2167128"/>
+            <a:off x="4824374" y="2093976"/>
             <a:ext cx="1523390" cy="347472"/>
           </a:xfrm>
           <a:prstGeom prst="rect">
@@ -8112,7 +8112,7 @@
         </p:nvSpPr>
         <p:spPr>
           <a:xfrm>
-            <a:off x="4915814" y="2167128"/>
+            <a:off x="4915814" y="2093976"/>
             <a:ext cx="1340510" cy="347472"/>
           </a:xfrm>
           <a:prstGeom prst="rect">
@@ -8157,7 +8157,7 @@
         </p:nvSpPr>
         <p:spPr>
           <a:xfrm>
-            <a:off x="6475780" y="2167128"/>
+            <a:off x="6475780" y="2093976"/>
             <a:ext cx="1161288" cy="347472"/>
           </a:xfrm>
           <a:prstGeom prst="rect">
@@ -8203,7 +8203,7 @@
         </p:nvSpPr>
         <p:spPr>
           <a:xfrm>
-            <a:off x="6567220" y="2167128"/>
+            <a:off x="6567220" y="2093976"/>
             <a:ext cx="978408" cy="347472"/>
           </a:xfrm>
           <a:prstGeom prst="rect">
@@ -8248,8 +8248,8 @@
         </p:nvSpPr>
         <p:spPr>
           <a:xfrm>
-            <a:off x="603504" y="2715768"/>
-            <a:ext cx="9482328" cy="219456"/>
+            <a:off x="603504" y="2551176"/>
+            <a:ext cx="9482328" cy="182880"/>
           </a:xfrm>
           <a:prstGeom prst="rect">
             <a:avLst/>
@@ -8274,7 +8274,7 @@
               </a:spcAft>
             </a:pPr>
             <a:r>
-              <a:rPr sz="900" b="0" i="0">
+              <a:rPr sz="800" b="0" i="0">
                 <a:solidFill>
                   <a:srgbClr val="8F9296"/>
                 </a:solidFill>
@@ -8293,8 +8293,8 @@
         </p:nvSpPr>
         <p:spPr>
           <a:xfrm>
-            <a:off x="603504" y="2953512"/>
-            <a:ext cx="9482328" cy="786384"/>
+            <a:off x="603504" y="2734056"/>
+            <a:ext cx="9482328" cy="640080"/>
           </a:xfrm>
           <a:prstGeom prst="rect">
             <a:avLst/>
@@ -8339,8 +8339,8 @@
         </p:nvSpPr>
         <p:spPr>
           <a:xfrm>
-            <a:off x="603504" y="2953512"/>
-            <a:ext cx="1783080" cy="786384"/>
+            <a:off x="603504" y="2734056"/>
+            <a:ext cx="1783080" cy="640080"/>
           </a:xfrm>
           <a:prstGeom prst="rect">
             <a:avLst/>
@@ -8383,8 +8383,8 @@
         </p:nvSpPr>
         <p:spPr>
           <a:xfrm>
-            <a:off x="749808" y="2953512"/>
-            <a:ext cx="1554480" cy="786384"/>
+            <a:off x="749808" y="2734056"/>
+            <a:ext cx="1554480" cy="640080"/>
           </a:xfrm>
           <a:prstGeom prst="rect">
             <a:avLst/>
@@ -8428,7 +8428,7 @@
         </p:nvSpPr>
         <p:spPr>
           <a:xfrm>
-            <a:off x="2569464" y="3172968"/>
+            <a:off x="2569464" y="2880360"/>
             <a:ext cx="3092500" cy="347472"/>
           </a:xfrm>
           <a:prstGeom prst="rect">
@@ -8474,7 +8474,7 @@
         </p:nvSpPr>
         <p:spPr>
           <a:xfrm>
-            <a:off x="2660904" y="3172968"/>
+            <a:off x="2660904" y="2880360"/>
             <a:ext cx="2909620" cy="347472"/>
           </a:xfrm>
           <a:prstGeom prst="rect">
@@ -8519,7 +8519,7 @@
         </p:nvSpPr>
         <p:spPr>
           <a:xfrm>
-            <a:off x="5789980" y="3172968"/>
+            <a:off x="5789980" y="2880360"/>
             <a:ext cx="1704441" cy="347472"/>
           </a:xfrm>
           <a:prstGeom prst="rect">
@@ -8565,7 +8565,7 @@
         </p:nvSpPr>
         <p:spPr>
           <a:xfrm>
-            <a:off x="5881420" y="3172968"/>
+            <a:off x="5881420" y="2880360"/>
             <a:ext cx="1521561" cy="347472"/>
           </a:xfrm>
           <a:prstGeom prst="rect">
@@ -8610,7 +8610,7 @@
         </p:nvSpPr>
         <p:spPr>
           <a:xfrm>
-            <a:off x="7622438" y="3172968"/>
+            <a:off x="7622438" y="2880360"/>
             <a:ext cx="2488996" cy="347472"/>
           </a:xfrm>
           <a:prstGeom prst="rect">
@@ -8656,7 +8656,7 @@
         </p:nvSpPr>
         <p:spPr>
           <a:xfrm>
-            <a:off x="7713878" y="3172968"/>
+            <a:off x="7713878" y="2880360"/>
             <a:ext cx="2306116" cy="347472"/>
           </a:xfrm>
           <a:prstGeom prst="rect">
@@ -8701,8 +8701,8 @@
         </p:nvSpPr>
         <p:spPr>
           <a:xfrm>
-            <a:off x="603504" y="3721608"/>
-            <a:ext cx="9482328" cy="219456"/>
+            <a:off x="603504" y="3337559"/>
+            <a:ext cx="9482328" cy="182880"/>
           </a:xfrm>
           <a:prstGeom prst="rect">
             <a:avLst/>
@@ -8727,7 +8727,7 @@
               </a:spcAft>
             </a:pPr>
             <a:r>
-              <a:rPr sz="900" b="0" i="0">
+              <a:rPr sz="800" b="0" i="0">
                 <a:solidFill>
                   <a:srgbClr val="8F9296"/>
                 </a:solidFill>
@@ -8746,8 +8746,8 @@
         </p:nvSpPr>
         <p:spPr>
           <a:xfrm>
-            <a:off x="603504" y="3959352"/>
-            <a:ext cx="9482328" cy="786384"/>
+            <a:off x="603504" y="3520439"/>
+            <a:ext cx="9482328" cy="640080"/>
           </a:xfrm>
           <a:prstGeom prst="rect">
             <a:avLst/>
@@ -8792,8 +8792,8 @@
         </p:nvSpPr>
         <p:spPr>
           <a:xfrm>
-            <a:off x="603504" y="3959352"/>
-            <a:ext cx="1783080" cy="786384"/>
+            <a:off x="603504" y="3520439"/>
+            <a:ext cx="1783080" cy="640080"/>
           </a:xfrm>
           <a:prstGeom prst="rect">
             <a:avLst/>
@@ -8836,8 +8836,8 @@
         </p:nvSpPr>
         <p:spPr>
           <a:xfrm>
-            <a:off x="749808" y="3959352"/>
-            <a:ext cx="1554480" cy="786384"/>
+            <a:off x="749808" y="3520439"/>
+            <a:ext cx="1554480" cy="640080"/>
           </a:xfrm>
           <a:prstGeom prst="rect">
             <a:avLst/>
@@ -8881,7 +8881,7 @@
         </p:nvSpPr>
         <p:spPr>
           <a:xfrm>
-            <a:off x="2569464" y="4178807"/>
+            <a:off x="2569464" y="3666743"/>
             <a:ext cx="859536" cy="347472"/>
           </a:xfrm>
           <a:prstGeom prst="rect">
@@ -8927,7 +8927,7 @@
         </p:nvSpPr>
         <p:spPr>
           <a:xfrm>
-            <a:off x="2660904" y="4178807"/>
+            <a:off x="2660904" y="3666743"/>
             <a:ext cx="676656" cy="347472"/>
           </a:xfrm>
           <a:prstGeom prst="rect">
@@ -8972,7 +8972,7 @@
         </p:nvSpPr>
         <p:spPr>
           <a:xfrm>
-            <a:off x="3557016" y="4178807"/>
+            <a:off x="3557016" y="3666743"/>
             <a:ext cx="1040587" cy="347472"/>
           </a:xfrm>
           <a:prstGeom prst="rect">
@@ -9018,7 +9018,7 @@
         </p:nvSpPr>
         <p:spPr>
           <a:xfrm>
-            <a:off x="3648456" y="4178807"/>
+            <a:off x="3648456" y="3666743"/>
             <a:ext cx="857707" cy="347472"/>
           </a:xfrm>
           <a:prstGeom prst="rect">
@@ -9063,7 +9063,7 @@
         </p:nvSpPr>
         <p:spPr>
           <a:xfrm>
-            <a:off x="4725619" y="4178807"/>
+            <a:off x="4725619" y="3666743"/>
             <a:ext cx="1402689" cy="347472"/>
           </a:xfrm>
           <a:prstGeom prst="rect">
@@ -9109,7 +9109,7 @@
         </p:nvSpPr>
         <p:spPr>
           <a:xfrm>
-            <a:off x="4817059" y="4178807"/>
+            <a:off x="4817059" y="3666743"/>
             <a:ext cx="1219809" cy="347472"/>
           </a:xfrm>
           <a:prstGeom prst="rect">
@@ -9154,7 +9154,7 @@
         </p:nvSpPr>
         <p:spPr>
           <a:xfrm>
-            <a:off x="6256324" y="4178807"/>
+            <a:off x="6256324" y="3666743"/>
             <a:ext cx="1281988" cy="347472"/>
           </a:xfrm>
           <a:prstGeom prst="rect">
@@ -9200,7 +9200,7 @@
         </p:nvSpPr>
         <p:spPr>
           <a:xfrm>
-            <a:off x="6347764" y="4178807"/>
+            <a:off x="6347764" y="3666743"/>
             <a:ext cx="1099108" cy="347472"/>
           </a:xfrm>
           <a:prstGeom prst="rect">
@@ -9245,7 +9245,7 @@
         </p:nvSpPr>
         <p:spPr>
           <a:xfrm>
-            <a:off x="7666329" y="4178807"/>
+            <a:off x="7666329" y="3666743"/>
             <a:ext cx="919886" cy="347472"/>
           </a:xfrm>
           <a:prstGeom prst="rect">
@@ -9291,7 +9291,7 @@
         </p:nvSpPr>
         <p:spPr>
           <a:xfrm>
-            <a:off x="7757769" y="4178807"/>
+            <a:off x="7757769" y="3666743"/>
             <a:ext cx="737006" cy="347472"/>
           </a:xfrm>
           <a:prstGeom prst="rect">
@@ -9336,7 +9336,7 @@
         </p:nvSpPr>
         <p:spPr>
           <a:xfrm>
-            <a:off x="8714232" y="4178807"/>
+            <a:off x="8714232" y="3666743"/>
             <a:ext cx="1161288" cy="347472"/>
           </a:xfrm>
           <a:prstGeom prst="rect">
@@ -9382,7 +9382,7 @@
         </p:nvSpPr>
         <p:spPr>
           <a:xfrm>
-            <a:off x="8805672" y="4178807"/>
+            <a:off x="8805672" y="3666743"/>
             <a:ext cx="978408" cy="347472"/>
           </a:xfrm>
           <a:prstGeom prst="rect">
@@ -9427,8 +9427,8 @@
         </p:nvSpPr>
         <p:spPr>
           <a:xfrm>
-            <a:off x="603504" y="4727448"/>
-            <a:ext cx="9482328" cy="219456"/>
+            <a:off x="603504" y="4123944"/>
+            <a:ext cx="9482328" cy="182880"/>
           </a:xfrm>
           <a:prstGeom prst="rect">
             <a:avLst/>
@@ -9453,7 +9453,7 @@
               </a:spcAft>
             </a:pPr>
             <a:r>
-              <a:rPr sz="900" b="0" i="0">
+              <a:rPr sz="800" b="0" i="0">
                 <a:solidFill>
                   <a:srgbClr val="8F9296"/>
                 </a:solidFill>
@@ -9472,8 +9472,8 @@
         </p:nvSpPr>
         <p:spPr>
           <a:xfrm>
-            <a:off x="603504" y="4965192"/>
-            <a:ext cx="9482328" cy="786384"/>
+            <a:off x="603504" y="4306824"/>
+            <a:ext cx="9482328" cy="640080"/>
           </a:xfrm>
           <a:prstGeom prst="rect">
             <a:avLst/>
@@ -9518,8 +9518,8 @@
         </p:nvSpPr>
         <p:spPr>
           <a:xfrm>
-            <a:off x="603504" y="4965192"/>
-            <a:ext cx="1783080" cy="786384"/>
+            <a:off x="603504" y="4306824"/>
+            <a:ext cx="1783080" cy="640080"/>
           </a:xfrm>
           <a:prstGeom prst="rect">
             <a:avLst/>
@@ -9562,8 +9562,8 @@
         </p:nvSpPr>
         <p:spPr>
           <a:xfrm>
-            <a:off x="749808" y="4965192"/>
-            <a:ext cx="1554480" cy="786384"/>
+            <a:off x="749808" y="4306824"/>
+            <a:ext cx="1554480" cy="640080"/>
           </a:xfrm>
           <a:prstGeom prst="rect">
             <a:avLst/>
@@ -9607,7 +9607,7 @@
         </p:nvSpPr>
         <p:spPr>
           <a:xfrm>
-            <a:off x="2569464" y="5184647"/>
+            <a:off x="2569464" y="4453127"/>
             <a:ext cx="919886" cy="347472"/>
           </a:xfrm>
           <a:prstGeom prst="rect">
@@ -9653,7 +9653,7 @@
         </p:nvSpPr>
         <p:spPr>
           <a:xfrm>
-            <a:off x="2660904" y="5184647"/>
+            <a:off x="2660904" y="4453127"/>
             <a:ext cx="737006" cy="347472"/>
           </a:xfrm>
           <a:prstGeom prst="rect">
@@ -9698,7 +9698,7 @@
         </p:nvSpPr>
         <p:spPr>
           <a:xfrm>
-            <a:off x="3617366" y="5184647"/>
+            <a:off x="3617366" y="4453127"/>
             <a:ext cx="1281988" cy="347472"/>
           </a:xfrm>
           <a:prstGeom prst="rect">
@@ -9744,7 +9744,7 @@
         </p:nvSpPr>
         <p:spPr>
           <a:xfrm>
-            <a:off x="3708806" y="5184647"/>
+            <a:off x="3708806" y="4453127"/>
             <a:ext cx="1099108" cy="347472"/>
           </a:xfrm>
           <a:prstGeom prst="rect">
@@ -9789,7 +9789,7 @@
         </p:nvSpPr>
         <p:spPr>
           <a:xfrm>
-            <a:off x="5027371" y="5184647"/>
+            <a:off x="5027371" y="4453127"/>
             <a:ext cx="859536" cy="347472"/>
           </a:xfrm>
           <a:prstGeom prst="rect">
@@ -9835,7 +9835,7 @@
         </p:nvSpPr>
         <p:spPr>
           <a:xfrm>
-            <a:off x="5118811" y="5184647"/>
+            <a:off x="5118811" y="4453127"/>
             <a:ext cx="676656" cy="347472"/>
           </a:xfrm>
           <a:prstGeom prst="rect">
@@ -9880,7 +9880,7 @@
         </p:nvSpPr>
         <p:spPr>
           <a:xfrm>
-            <a:off x="6014923" y="5184647"/>
+            <a:off x="6014923" y="4453127"/>
             <a:ext cx="618134" cy="347472"/>
           </a:xfrm>
           <a:prstGeom prst="rect">
@@ -9926,7 +9926,7 @@
         </p:nvSpPr>
         <p:spPr>
           <a:xfrm>
-            <a:off x="6106363" y="5184647"/>
+            <a:off x="6106363" y="4453127"/>
             <a:ext cx="435254" cy="347472"/>
           </a:xfrm>
           <a:prstGeom prst="rect">
@@ -9971,7 +9971,7 @@
         </p:nvSpPr>
         <p:spPr>
           <a:xfrm>
-            <a:off x="6761073" y="5184647"/>
+            <a:off x="6761073" y="4453127"/>
             <a:ext cx="738835" cy="347472"/>
           </a:xfrm>
           <a:prstGeom prst="rect">
@@ -10017,7 +10017,7 @@
         </p:nvSpPr>
         <p:spPr>
           <a:xfrm>
-            <a:off x="6852513" y="5184647"/>
+            <a:off x="6852513" y="4453127"/>
             <a:ext cx="555955" cy="347472"/>
           </a:xfrm>
           <a:prstGeom prst="rect">
@@ -10056,14 +10056,59 @@
       </p:sp>
       <p:sp>
         <p:nvSpPr>
-          <p:cNvPr id="59" name="Rectangle 58"/>
+          <p:cNvPr id="59" name="TextBox 58"/>
+          <p:cNvSpPr txBox="1"/>
+          <p:nvPr/>
+        </p:nvSpPr>
+        <p:spPr>
+          <a:xfrm>
+            <a:off x="603504" y="4910328"/>
+            <a:ext cx="9482328" cy="182880"/>
+          </a:xfrm>
+          <a:prstGeom prst="rect">
+            <a:avLst/>
+          </a:prstGeom>
+          <a:noFill/>
+        </p:spPr>
+        <p:txBody>
+          <a:bodyPr wrap="square" anchor="t" lIns="0" rIns="0" tIns="0" bIns="0">
+            <a:spAutoFit/>
+          </a:bodyPr>
+          <a:lstStyle/>
+          <a:p>
+            <a:pPr algn="ctr">
+              <a:lnSpc>
+                <a:spcPct val="108000"/>
+              </a:lnSpc>
+              <a:spcBef>
+                <a:spcPts val="0"/>
+              </a:spcBef>
+              <a:spcAft>
+                <a:spcPts val="300"/>
+              </a:spcAft>
+            </a:pPr>
+            <a:r>
+              <a:rPr sz="800" b="0" i="0">
+                <a:solidFill>
+                  <a:srgbClr val="8F9296"/>
+                </a:solidFill>
+                <a:latin typeface="Arial"/>
+              </a:rPr>
+              <a:t>▼</a:t>
+            </a:r>
+          </a:p>
+        </p:txBody>
+      </p:sp>
+      <p:sp>
+        <p:nvSpPr>
+          <p:cNvPr id="60" name="Rectangle 59"/>
           <p:cNvSpPr/>
           <p:nvPr/>
         </p:nvSpPr>
         <p:spPr>
           <a:xfrm>
-            <a:off x="603504" y="5971031"/>
-            <a:ext cx="9482328" cy="786384"/>
+            <a:off x="603504" y="5093208"/>
+            <a:ext cx="9482328" cy="640080"/>
           </a:xfrm>
           <a:prstGeom prst="rect">
             <a:avLst/>
@@ -10102,14 +10147,14 @@
       </p:sp>
       <p:sp>
         <p:nvSpPr>
-          <p:cNvPr id="60" name="Rectangle 59"/>
+          <p:cNvPr id="61" name="Rectangle 60"/>
           <p:cNvSpPr/>
           <p:nvPr/>
         </p:nvSpPr>
         <p:spPr>
           <a:xfrm>
-            <a:off x="603504" y="5971031"/>
-            <a:ext cx="1783080" cy="786384"/>
+            <a:off x="603504" y="5093208"/>
+            <a:ext cx="1783080" cy="640080"/>
           </a:xfrm>
           <a:prstGeom prst="rect">
             <a:avLst/>
@@ -10146,14 +10191,14 @@
       </p:sp>
       <p:sp>
         <p:nvSpPr>
-          <p:cNvPr id="61" name="TextBox 60"/>
+          <p:cNvPr id="62" name="TextBox 61"/>
           <p:cNvSpPr txBox="1"/>
           <p:nvPr/>
         </p:nvSpPr>
         <p:spPr>
           <a:xfrm>
-            <a:off x="749808" y="5971031"/>
-            <a:ext cx="1554480" cy="786384"/>
+            <a:off x="749808" y="5093208"/>
+            <a:ext cx="1554480" cy="640080"/>
           </a:xfrm>
           <a:prstGeom prst="rect">
             <a:avLst/>
@@ -10191,13 +10236,13 @@
       </p:sp>
       <p:sp>
         <p:nvSpPr>
-          <p:cNvPr id="62" name="Rectangle 61"/>
+          <p:cNvPr id="63" name="Rectangle 62"/>
           <p:cNvSpPr/>
           <p:nvPr/>
         </p:nvSpPr>
         <p:spPr>
           <a:xfrm>
-            <a:off x="2569464" y="6190487"/>
+            <a:off x="2569464" y="5239512"/>
             <a:ext cx="2126894" cy="347472"/>
           </a:xfrm>
           <a:prstGeom prst="rect">
@@ -10237,13 +10282,13 @@
       </p:sp>
       <p:sp>
         <p:nvSpPr>
-          <p:cNvPr id="63" name="TextBox 62"/>
+          <p:cNvPr id="64" name="TextBox 63"/>
           <p:cNvSpPr txBox="1"/>
           <p:nvPr/>
         </p:nvSpPr>
         <p:spPr>
           <a:xfrm>
-            <a:off x="2660904" y="6190487"/>
+            <a:off x="2660904" y="5239512"/>
             <a:ext cx="1944014" cy="347472"/>
           </a:xfrm>
           <a:prstGeom prst="rect">
@@ -10282,13 +10327,13 @@
       </p:sp>
       <p:sp>
         <p:nvSpPr>
-          <p:cNvPr id="64" name="Rectangle 63"/>
+          <p:cNvPr id="65" name="Rectangle 64"/>
           <p:cNvSpPr/>
           <p:nvPr/>
         </p:nvSpPr>
         <p:spPr>
           <a:xfrm>
-            <a:off x="4824374" y="6190487"/>
+            <a:off x="4824374" y="5239512"/>
             <a:ext cx="1945843" cy="347472"/>
           </a:xfrm>
           <a:prstGeom prst="rect">
@@ -10328,13 +10373,13 @@
       </p:sp>
       <p:sp>
         <p:nvSpPr>
-          <p:cNvPr id="65" name="TextBox 64"/>
+          <p:cNvPr id="66" name="TextBox 65"/>
           <p:cNvSpPr txBox="1"/>
           <p:nvPr/>
         </p:nvSpPr>
         <p:spPr>
           <a:xfrm>
-            <a:off x="4915814" y="6190487"/>
+            <a:off x="4915814" y="5239512"/>
             <a:ext cx="1762963" cy="347472"/>
           </a:xfrm>
           <a:prstGeom prst="rect">
@@ -10373,13 +10418,13 @@
       </p:sp>
       <p:sp>
         <p:nvSpPr>
-          <p:cNvPr id="66" name="Rectangle 65"/>
+          <p:cNvPr id="67" name="Rectangle 66"/>
           <p:cNvSpPr/>
           <p:nvPr/>
         </p:nvSpPr>
         <p:spPr>
           <a:xfrm>
-            <a:off x="6898233" y="6190487"/>
+            <a:off x="6898233" y="5239512"/>
             <a:ext cx="2368296" cy="347472"/>
           </a:xfrm>
           <a:prstGeom prst="rect">
@@ -10419,13 +10464,13 @@
       </p:sp>
       <p:sp>
         <p:nvSpPr>
-          <p:cNvPr id="67" name="TextBox 66"/>
+          <p:cNvPr id="68" name="TextBox 67"/>
           <p:cNvSpPr txBox="1"/>
           <p:nvPr/>
         </p:nvSpPr>
         <p:spPr>
           <a:xfrm>
-            <a:off x="6989673" y="6190487"/>
+            <a:off x="6989673" y="5239512"/>
             <a:ext cx="2185415" cy="347472"/>
           </a:xfrm>
           <a:prstGeom prst="rect">
@@ -10464,7 +10509,7 @@
       </p:sp>
       <p:sp>
         <p:nvSpPr>
-          <p:cNvPr id="68" name="Rectangle 67"/>
+          <p:cNvPr id="69" name="Rectangle 68"/>
           <p:cNvSpPr/>
           <p:nvPr/>
         </p:nvSpPr>
@@ -10508,7 +10553,7 @@
       </p:sp>
       <p:sp>
         <p:nvSpPr>
-          <p:cNvPr id="69" name="Rectangle 68"/>
+          <p:cNvPr id="70" name="Rectangle 69"/>
           <p:cNvSpPr/>
           <p:nvPr/>
         </p:nvSpPr>
@@ -10552,7 +10597,7 @@
       </p:sp>
       <p:sp>
         <p:nvSpPr>
-          <p:cNvPr id="70" name="TextBox 69"/>
+          <p:cNvPr id="71" name="TextBox 70"/>
           <p:cNvSpPr txBox="1"/>
           <p:nvPr/>
         </p:nvSpPr>
@@ -10612,7 +10657,25 @@
                 </a:solidFill>
                 <a:latin typeface="Arial"/>
               </a:rPr>
-              <a:t>Two “driving modes” — a smart agent team, or a simple assembly line — share the same proven tools underneath. And the AI brain is swappable, including a free offline one for zero-exposure evaluation.</a:t>
+              <a:t>Three front doors, one engine. The agent team does the judgement work; the </a:t>
+            </a:r>
+            <a:r>
+              <a:rPr sz="1150" b="1" i="0">
+                <a:solidFill>
+                  <a:srgbClr val="0E0E0E"/>
+                </a:solidFill>
+                <a:latin typeface="Arial"/>
+              </a:rPr>
+              <a:t>assurance layer</a:t>
+            </a:r>
+            <a:r>
+              <a:rPr sz="1150" b="0" i="0">
+                <a:solidFill>
+                  <a:srgbClr val="222427"/>
+                </a:solidFill>
+                <a:latin typeface="Arial"/>
+              </a:rPr>
+              <a:t> checks it afterwards using no AI at all. And the AI brain is swappable, including a free offline one for zero-exposure evaluation.</a:t>
             </a:r>
           </a:p>
         </p:txBody>
@@ -11526,7 +11589,7 @@
                 </a:solidFill>
                 <a:latin typeface="Arial"/>
               </a:rPr>
-              <a:t>Decides what becomes Apex, what should be a native Salesforce product, and what to skip — with a written rationale.</a:t>
+              <a:t>Converts everything, with a written rationale. Where a native Salesforce product fits better, it flags it for review — it never drops the logic.</a:t>
             </a:r>
           </a:p>
         </p:txBody>
@@ -11615,7 +11678,7 @@
                 </a:solidFill>
                 <a:latin typeface="Arial"/>
               </a:rPr>
-              <a:t>“Pricing rules? That's CPQ — don't hand-build it.”</a:t>
+              <a:t>“CPQ suits this pricing — but here's the code anyway.”</a:t>
             </a:r>
           </a:p>
         </p:txBody>
@@ -12887,7 +12950,7 @@
                 </a:solidFill>
                 <a:latin typeface="Arial"/>
               </a:rPr>
-              <a:t>Ten stages, end to end</a:t>
+              <a:t>Ten stages, and three places you decide</a:t>
             </a:r>
             <a:r>
               <a:rPr sz="3000" b="1" i="0">
@@ -13210,7 +13273,7 @@
                 </a:solidFill>
                 <a:latin typeface="Arial"/>
               </a:rPr>
-              <a:t>Crawl &amp; schedule</a:t>
+              <a:t>Preflight</a:t>
             </a:r>
           </a:p>
         </p:txBody>
@@ -13255,7 +13318,7 @@
                 </a:solidFill>
                 <a:latin typeface="Arial"/>
               </a:rPr>
-              <a:t>Group classes by domain; sort so dependencies convert first.</a:t>
+              <a:t>Is this really Hybris? Any credentials in the upload? No AI, no cost.</a:t>
             </a:r>
           </a:p>
         </p:txBody>
@@ -13391,7 +13454,7 @@
                 </a:solidFill>
                 <a:latin typeface="Arial"/>
               </a:rPr>
-              <a:t>Call graph</a:t>
+              <a:t>Scan &amp; schedule</a:t>
             </a:r>
           </a:p>
         </p:txBody>
@@ -13436,7 +13499,7 @@
                 </a:solidFill>
                 <a:latin typeface="Arial"/>
               </a:rPr>
-              <a:t>Map who-calls-whom for the visual dashboard.</a:t>
+              <a:t>Group by domain; sort so dependencies convert first.</a:t>
             </a:r>
           </a:p>
         </p:txBody>
@@ -13572,7 +13635,7 @@
                 </a:solidFill>
                 <a:latin typeface="Arial"/>
               </a:rPr>
-              <a:t>Ingest</a:t>
+              <a:t>Cost &amp; org fit</a:t>
             </a:r>
           </a:p>
         </p:txBody>
@@ -13617,7 +13680,7 @@
                 </a:solidFill>
                 <a:latin typeface="Arial"/>
               </a:rPr>
-              <a:t>Parse the Java and data-model definitions precisely.</a:t>
+              <a:t>A price range, and what collides in YOUR org — before a penny.</a:t>
             </a:r>
           </a:p>
         </p:txBody>
@@ -13715,7 +13778,96 @@
       </p:sp>
       <p:sp>
         <p:nvSpPr>
-          <p:cNvPr id="24" name="TextBox 23"/>
+          <p:cNvPr id="24" name="Rectangle 23"/>
+          <p:cNvSpPr/>
+          <p:nvPr/>
+        </p:nvSpPr>
+        <p:spPr>
+          <a:xfrm>
+            <a:off x="7637068" y="2066543"/>
+            <a:ext cx="384048" cy="219456"/>
+          </a:xfrm>
+          <a:prstGeom prst="rect">
+            <a:avLst/>
+          </a:prstGeom>
+          <a:solidFill>
+            <a:srgbClr val="A9622F"/>
+          </a:solidFill>
+          <a:ln>
+            <a:noFill/>
+          </a:ln>
+          <a:effectLst/>
+        </p:spPr>
+        <p:style>
+          <a:lnRef idx="1">
+            <a:schemeClr val="accent1"/>
+          </a:lnRef>
+          <a:fillRef idx="3">
+            <a:schemeClr val="accent1"/>
+          </a:fillRef>
+          <a:effectRef idx="2">
+            <a:schemeClr val="accent1"/>
+          </a:effectRef>
+          <a:fontRef idx="minor">
+            <a:schemeClr val="lt1"/>
+          </a:fontRef>
+        </p:style>
+        <p:txBody>
+          <a:bodyPr rtlCol="0" anchor="ctr"/>
+          <a:lstStyle/>
+          <a:p>
+            <a:pPr algn="ctr"/>
+          </a:p>
+        </p:txBody>
+      </p:sp>
+      <p:sp>
+        <p:nvSpPr>
+          <p:cNvPr id="25" name="TextBox 24"/>
+          <p:cNvSpPr txBox="1"/>
+          <p:nvPr/>
+        </p:nvSpPr>
+        <p:spPr>
+          <a:xfrm>
+            <a:off x="7637068" y="2057400"/>
+            <a:ext cx="384048" cy="219456"/>
+          </a:xfrm>
+          <a:prstGeom prst="rect">
+            <a:avLst/>
+          </a:prstGeom>
+          <a:noFill/>
+        </p:spPr>
+        <p:txBody>
+          <a:bodyPr wrap="square" anchor="ctr" lIns="0" rIns="0" tIns="0" bIns="0">
+            <a:spAutoFit/>
+          </a:bodyPr>
+          <a:lstStyle/>
+          <a:p>
+            <a:pPr algn="ctr">
+              <a:lnSpc>
+                <a:spcPct val="108000"/>
+              </a:lnSpc>
+              <a:spcBef>
+                <a:spcPts val="0"/>
+              </a:spcBef>
+              <a:spcAft>
+                <a:spcPts val="300"/>
+              </a:spcAft>
+            </a:pPr>
+            <a:r>
+              <a:rPr sz="800" b="1" i="0">
+                <a:solidFill>
+                  <a:srgbClr val="FFFFFF"/>
+                </a:solidFill>
+                <a:latin typeface="Courier New"/>
+              </a:rPr>
+              <a:t>YOU</a:t>
+            </a:r>
+          </a:p>
+        </p:txBody>
+      </p:sp>
+      <p:sp>
+        <p:nvSpPr>
+          <p:cNvPr id="26" name="TextBox 25"/>
           <p:cNvSpPr txBox="1"/>
           <p:nvPr/>
         </p:nvSpPr>
@@ -13753,14 +13905,14 @@
                 </a:solidFill>
                 <a:latin typeface="Arial"/>
               </a:rPr>
-              <a:t>Derive schema</a:t>
-            </a:r>
-          </a:p>
-        </p:txBody>
-      </p:sp>
-      <p:sp>
-        <p:nvSpPr>
-          <p:cNvPr id="25" name="TextBox 24"/>
+              <a:t>▸ REVIEW GATE 1</a:t>
+            </a:r>
+          </a:p>
+        </p:txBody>
+      </p:sp>
+      <p:sp>
+        <p:nvSpPr>
+          <p:cNvPr id="27" name="TextBox 26"/>
           <p:cNvSpPr txBox="1"/>
           <p:nvPr/>
         </p:nvSpPr>
@@ -13798,14 +13950,14 @@
                 </a:solidFill>
                 <a:latin typeface="Arial"/>
               </a:rPr>
-              <a:t>Build the target object/field catalog — the source of truth.</a:t>
-            </a:r>
-          </a:p>
-        </p:txBody>
-      </p:sp>
-      <p:sp>
-        <p:nvSpPr>
-          <p:cNvPr id="26" name="Rectangle 25"/>
+              <a:t>You approve what was found, before any AI is used.</a:t>
+            </a:r>
+          </a:p>
+        </p:txBody>
+      </p:sp>
+      <p:sp>
+        <p:nvSpPr>
+          <p:cNvPr id="28" name="Rectangle 27"/>
           <p:cNvSpPr/>
           <p:nvPr/>
         </p:nvSpPr>
@@ -13851,7 +14003,7 @@
       </p:sp>
       <p:sp>
         <p:nvSpPr>
-          <p:cNvPr id="27" name="TextBox 26"/>
+          <p:cNvPr id="29" name="TextBox 28"/>
           <p:cNvSpPr txBox="1"/>
           <p:nvPr/>
         </p:nvSpPr>
@@ -13896,14 +14048,14 @@
       </p:sp>
       <p:sp>
         <p:nvSpPr>
-          <p:cNvPr id="28" name="Rectangle 27"/>
+          <p:cNvPr id="30" name="Rectangle 29"/>
           <p:cNvSpPr/>
           <p:nvPr/>
         </p:nvSpPr>
         <p:spPr>
           <a:xfrm>
-            <a:off x="9628632" y="2066543"/>
-            <a:ext cx="329184" cy="219456"/>
+            <a:off x="9573767" y="2066543"/>
+            <a:ext cx="384048" cy="219456"/>
           </a:xfrm>
           <a:prstGeom prst="rect">
             <a:avLst/>
@@ -13940,14 +14092,14 @@
       </p:sp>
       <p:sp>
         <p:nvSpPr>
-          <p:cNvPr id="29" name="TextBox 28"/>
+          <p:cNvPr id="31" name="TextBox 30"/>
           <p:cNvSpPr txBox="1"/>
           <p:nvPr/>
         </p:nvSpPr>
         <p:spPr>
           <a:xfrm>
-            <a:off x="9628632" y="2057400"/>
-            <a:ext cx="329184" cy="219456"/>
+            <a:off x="9573767" y="2057400"/>
+            <a:ext cx="384048" cy="219456"/>
           </a:xfrm>
           <a:prstGeom prst="rect">
             <a:avLst/>
@@ -13985,7 +14137,7 @@
       </p:sp>
       <p:sp>
         <p:nvSpPr>
-          <p:cNvPr id="30" name="TextBox 29"/>
+          <p:cNvPr id="32" name="TextBox 31"/>
           <p:cNvSpPr txBox="1"/>
           <p:nvPr/>
         </p:nvSpPr>
@@ -14030,7 +14182,7 @@
       </p:sp>
       <p:sp>
         <p:nvSpPr>
-          <p:cNvPr id="31" name="TextBox 30"/>
+          <p:cNvPr id="33" name="TextBox 32"/>
           <p:cNvSpPr txBox="1"/>
           <p:nvPr/>
         </p:nvSpPr>
@@ -14068,14 +14220,14 @@
                 </a:solidFill>
                 <a:latin typeface="Arial"/>
               </a:rPr>
-              <a:t>AI summarises each class: purpose, queries, rules.</a:t>
-            </a:r>
-          </a:p>
-        </p:txBody>
-      </p:sp>
-      <p:sp>
-        <p:nvSpPr>
-          <p:cNvPr id="32" name="Rectangle 31"/>
+              <a:t>AI reads each class: purpose, business rules, risks.</a:t>
+            </a:r>
+          </a:p>
+        </p:txBody>
+      </p:sp>
+      <p:sp>
+        <p:nvSpPr>
+          <p:cNvPr id="34" name="Rectangle 33"/>
           <p:cNvSpPr/>
           <p:nvPr/>
         </p:nvSpPr>
@@ -14121,7 +14273,7 @@
       </p:sp>
       <p:sp>
         <p:nvSpPr>
-          <p:cNvPr id="33" name="TextBox 32"/>
+          <p:cNvPr id="35" name="TextBox 34"/>
           <p:cNvSpPr txBox="1"/>
           <p:nvPr/>
         </p:nvSpPr>
@@ -14166,14 +14318,14 @@
       </p:sp>
       <p:sp>
         <p:nvSpPr>
-          <p:cNvPr id="34" name="Rectangle 33"/>
+          <p:cNvPr id="36" name="Rectangle 35"/>
           <p:cNvSpPr/>
           <p:nvPr/>
         </p:nvSpPr>
         <p:spPr>
           <a:xfrm>
-            <a:off x="1881835" y="3703320"/>
-            <a:ext cx="329184" cy="219456"/>
+            <a:off x="1826971" y="3703320"/>
+            <a:ext cx="384048" cy="219456"/>
           </a:xfrm>
           <a:prstGeom prst="rect">
             <a:avLst/>
@@ -14210,14 +14362,14 @@
       </p:sp>
       <p:sp>
         <p:nvSpPr>
-          <p:cNvPr id="35" name="TextBox 34"/>
+          <p:cNvPr id="37" name="TextBox 36"/>
           <p:cNvSpPr txBox="1"/>
           <p:nvPr/>
         </p:nvSpPr>
         <p:spPr>
           <a:xfrm>
-            <a:off x="1881835" y="3694176"/>
-            <a:ext cx="329184" cy="219456"/>
+            <a:off x="1826971" y="3694176"/>
+            <a:ext cx="384048" cy="219456"/>
           </a:xfrm>
           <a:prstGeom prst="rect">
             <a:avLst/>
@@ -14255,7 +14407,7 @@
       </p:sp>
       <p:sp>
         <p:nvSpPr>
-          <p:cNvPr id="36" name="TextBox 35"/>
+          <p:cNvPr id="38" name="TextBox 37"/>
           <p:cNvSpPr txBox="1"/>
           <p:nvPr/>
         </p:nvSpPr>
@@ -14293,14 +14445,14 @@
                 </a:solidFill>
                 <a:latin typeface="Arial"/>
               </a:rPr>
-              <a:t>Generate</a:t>
-            </a:r>
-          </a:p>
-        </p:txBody>
-      </p:sp>
-      <p:sp>
-        <p:nvSpPr>
-          <p:cNvPr id="37" name="TextBox 36"/>
+              <a:t>Plan  ▸ GATE 2</a:t>
+            </a:r>
+          </a:p>
+        </p:txBody>
+      </p:sp>
+      <p:sp>
+        <p:nvSpPr>
+          <p:cNvPr id="39" name="TextBox 38"/>
           <p:cNvSpPr txBox="1"/>
           <p:nvPr/>
         </p:nvSpPr>
@@ -14338,14 +14490,14 @@
                 </a:solidFill>
                 <a:latin typeface="Arial"/>
               </a:rPr>
-              <a:t>AI writes the Apex + tests, grounded in the schema.</a:t>
-            </a:r>
-          </a:p>
-        </p:txBody>
-      </p:sp>
-      <p:sp>
-        <p:nvSpPr>
-          <p:cNvPr id="38" name="Rectangle 37"/>
+              <a:t>AI plans every target; you approve or flip any of them.</a:t>
+            </a:r>
+          </a:p>
+        </p:txBody>
+      </p:sp>
+      <p:sp>
+        <p:nvSpPr>
+          <p:cNvPr id="40" name="Rectangle 39"/>
           <p:cNvSpPr/>
           <p:nvPr/>
         </p:nvSpPr>
@@ -14391,7 +14543,7 @@
       </p:sp>
       <p:sp>
         <p:nvSpPr>
-          <p:cNvPr id="39" name="TextBox 38"/>
+          <p:cNvPr id="41" name="TextBox 40"/>
           <p:cNvSpPr txBox="1"/>
           <p:nvPr/>
         </p:nvSpPr>
@@ -14436,14 +14588,14 @@
       </p:sp>
       <p:sp>
         <p:nvSpPr>
-          <p:cNvPr id="40" name="Rectangle 39"/>
+          <p:cNvPr id="42" name="Rectangle 41"/>
           <p:cNvSpPr/>
           <p:nvPr/>
         </p:nvSpPr>
         <p:spPr>
           <a:xfrm>
-            <a:off x="3818534" y="3703320"/>
-            <a:ext cx="329184" cy="219456"/>
+            <a:off x="3763670" y="3703320"/>
+            <a:ext cx="384048" cy="219456"/>
           </a:xfrm>
           <a:prstGeom prst="rect">
             <a:avLst/>
@@ -14480,14 +14632,14 @@
       </p:sp>
       <p:sp>
         <p:nvSpPr>
-          <p:cNvPr id="41" name="TextBox 40"/>
+          <p:cNvPr id="43" name="TextBox 42"/>
           <p:cNvSpPr txBox="1"/>
           <p:nvPr/>
         </p:nvSpPr>
         <p:spPr>
           <a:xfrm>
-            <a:off x="3818534" y="3694176"/>
-            <a:ext cx="329184" cy="219456"/>
+            <a:off x="3763670" y="3694176"/>
+            <a:ext cx="384048" cy="219456"/>
           </a:xfrm>
           <a:prstGeom prst="rect">
             <a:avLst/>
@@ -14525,7 +14677,7 @@
       </p:sp>
       <p:sp>
         <p:nvSpPr>
-          <p:cNvPr id="42" name="TextBox 41"/>
+          <p:cNvPr id="44" name="TextBox 43"/>
           <p:cNvSpPr txBox="1"/>
           <p:nvPr/>
         </p:nvSpPr>
@@ -14563,14 +14715,14 @@
                 </a:solidFill>
                 <a:latin typeface="Arial"/>
               </a:rPr>
-              <a:t>Validate &amp; repair</a:t>
-            </a:r>
-          </a:p>
-        </p:txBody>
-      </p:sp>
-      <p:sp>
-        <p:nvSpPr>
-          <p:cNvPr id="43" name="TextBox 42"/>
+              <a:t>Build &amp; review</a:t>
+            </a:r>
+          </a:p>
+        </p:txBody>
+      </p:sp>
+      <p:sp>
+        <p:nvSpPr>
+          <p:cNvPr id="45" name="TextBox 44"/>
           <p:cNvSpPr txBox="1"/>
           <p:nvPr/>
         </p:nvSpPr>
@@ -14608,14 +14760,14 @@
                 </a:solidFill>
                 <a:latin typeface="Arial"/>
               </a:rPr>
-              <a:t>Safety checks; failures loop back to the AI to fix.</a:t>
-            </a:r>
-          </a:p>
-        </p:txBody>
-      </p:sp>
-      <p:sp>
-        <p:nvSpPr>
-          <p:cNvPr id="44" name="Rectangle 43"/>
+              <a:t>AI writes Apex/LWC + tests; a second AI challenges it.</a:t>
+            </a:r>
+          </a:p>
+        </p:txBody>
+      </p:sp>
+      <p:sp>
+        <p:nvSpPr>
+          <p:cNvPr id="46" name="Rectangle 45"/>
           <p:cNvSpPr/>
           <p:nvPr/>
         </p:nvSpPr>
@@ -14661,7 +14813,7 @@
       </p:sp>
       <p:sp>
         <p:nvSpPr>
-          <p:cNvPr id="45" name="TextBox 44"/>
+          <p:cNvPr id="47" name="TextBox 46"/>
           <p:cNvSpPr txBox="1"/>
           <p:nvPr/>
         </p:nvSpPr>
@@ -14706,7 +14858,96 @@
       </p:sp>
       <p:sp>
         <p:nvSpPr>
-          <p:cNvPr id="46" name="TextBox 45"/>
+          <p:cNvPr id="48" name="Rectangle 47"/>
+          <p:cNvSpPr/>
+          <p:nvPr/>
+        </p:nvSpPr>
+        <p:spPr>
+          <a:xfrm>
+            <a:off x="5700369" y="3703320"/>
+            <a:ext cx="384048" cy="219456"/>
+          </a:xfrm>
+          <a:prstGeom prst="rect">
+            <a:avLst/>
+          </a:prstGeom>
+          <a:solidFill>
+            <a:srgbClr val="A9622F"/>
+          </a:solidFill>
+          <a:ln>
+            <a:noFill/>
+          </a:ln>
+          <a:effectLst/>
+        </p:spPr>
+        <p:style>
+          <a:lnRef idx="1">
+            <a:schemeClr val="accent1"/>
+          </a:lnRef>
+          <a:fillRef idx="3">
+            <a:schemeClr val="accent1"/>
+          </a:fillRef>
+          <a:effectRef idx="2">
+            <a:schemeClr val="accent1"/>
+          </a:effectRef>
+          <a:fontRef idx="minor">
+            <a:schemeClr val="lt1"/>
+          </a:fontRef>
+        </p:style>
+        <p:txBody>
+          <a:bodyPr rtlCol="0" anchor="ctr"/>
+          <a:lstStyle/>
+          <a:p>
+            <a:pPr algn="ctr"/>
+          </a:p>
+        </p:txBody>
+      </p:sp>
+      <p:sp>
+        <p:nvSpPr>
+          <p:cNvPr id="49" name="TextBox 48"/>
+          <p:cNvSpPr txBox="1"/>
+          <p:nvPr/>
+        </p:nvSpPr>
+        <p:spPr>
+          <a:xfrm>
+            <a:off x="5700369" y="3694176"/>
+            <a:ext cx="384048" cy="219456"/>
+          </a:xfrm>
+          <a:prstGeom prst="rect">
+            <a:avLst/>
+          </a:prstGeom>
+          <a:noFill/>
+        </p:spPr>
+        <p:txBody>
+          <a:bodyPr wrap="square" anchor="ctr" lIns="0" rIns="0" tIns="0" bIns="0">
+            <a:spAutoFit/>
+          </a:bodyPr>
+          <a:lstStyle/>
+          <a:p>
+            <a:pPr algn="ctr">
+              <a:lnSpc>
+                <a:spcPct val="108000"/>
+              </a:lnSpc>
+              <a:spcBef>
+                <a:spcPts val="0"/>
+              </a:spcBef>
+              <a:spcAft>
+                <a:spcPts val="300"/>
+              </a:spcAft>
+            </a:pPr>
+            <a:r>
+              <a:rPr sz="800" b="1" i="0">
+                <a:solidFill>
+                  <a:srgbClr val="FFFFFF"/>
+                </a:solidFill>
+                <a:latin typeface="Courier New"/>
+              </a:rPr>
+              <a:t>YOU</a:t>
+            </a:r>
+          </a:p>
+        </p:txBody>
+      </p:sp>
+      <p:sp>
+        <p:nvSpPr>
+          <p:cNvPr id="50" name="TextBox 49"/>
           <p:cNvSpPr txBox="1"/>
           <p:nvPr/>
         </p:nvSpPr>
@@ -14744,14 +14985,14 @@
                 </a:solidFill>
                 <a:latin typeface="Arial"/>
               </a:rPr>
-              <a:t>Reconcile &amp; metadata</a:t>
-            </a:r>
-          </a:p>
-        </p:txBody>
-      </p:sp>
-      <p:sp>
-        <p:nvSpPr>
-          <p:cNvPr id="47" name="TextBox 46"/>
+              <a:t>▸ REVIEW GATE 3</a:t>
+            </a:r>
+          </a:p>
+        </p:txBody>
+      </p:sp>
+      <p:sp>
+        <p:nvSpPr>
+          <p:cNvPr id="51" name="TextBox 50"/>
           <p:cNvSpPr txBox="1"/>
           <p:nvPr/>
         </p:nvSpPr>
@@ -14789,14 +15030,14 @@
                 </a:solidFill>
                 <a:latin typeface="Arial"/>
               </a:rPr>
-              <a:t>Fill schema gaps with evidence; emit objects &amp; fields.</a:t>
-            </a:r>
-          </a:p>
-        </p:txBody>
-      </p:sp>
-      <p:sp>
-        <p:nvSpPr>
-          <p:cNvPr id="48" name="Rectangle 47"/>
+              <a:t>You approve the code, or send it back with feedback.</a:t>
+            </a:r>
+          </a:p>
+        </p:txBody>
+      </p:sp>
+      <p:sp>
+        <p:nvSpPr>
+          <p:cNvPr id="52" name="Rectangle 51"/>
           <p:cNvSpPr/>
           <p:nvPr/>
         </p:nvSpPr>
@@ -14842,7 +15083,7 @@
       </p:sp>
       <p:sp>
         <p:nvSpPr>
-          <p:cNvPr id="49" name="TextBox 48"/>
+          <p:cNvPr id="53" name="TextBox 52"/>
           <p:cNvSpPr txBox="1"/>
           <p:nvPr/>
         </p:nvSpPr>
@@ -14887,7 +15128,96 @@
       </p:sp>
       <p:sp>
         <p:nvSpPr>
-          <p:cNvPr id="50" name="TextBox 49"/>
+          <p:cNvPr id="54" name="Rectangle 53"/>
+          <p:cNvSpPr/>
+          <p:nvPr/>
+        </p:nvSpPr>
+        <p:spPr>
+          <a:xfrm>
+            <a:off x="7637068" y="3703320"/>
+            <a:ext cx="384048" cy="219456"/>
+          </a:xfrm>
+          <a:prstGeom prst="rect">
+            <a:avLst/>
+          </a:prstGeom>
+          <a:solidFill>
+            <a:srgbClr val="0E0E0E"/>
+          </a:solidFill>
+          <a:ln>
+            <a:noFill/>
+          </a:ln>
+          <a:effectLst/>
+        </p:spPr>
+        <p:style>
+          <a:lnRef idx="1">
+            <a:schemeClr val="accent1"/>
+          </a:lnRef>
+          <a:fillRef idx="3">
+            <a:schemeClr val="accent1"/>
+          </a:fillRef>
+          <a:effectRef idx="2">
+            <a:schemeClr val="accent1"/>
+          </a:effectRef>
+          <a:fontRef idx="minor">
+            <a:schemeClr val="lt1"/>
+          </a:fontRef>
+        </p:style>
+        <p:txBody>
+          <a:bodyPr rtlCol="0" anchor="ctr"/>
+          <a:lstStyle/>
+          <a:p>
+            <a:pPr algn="ctr"/>
+          </a:p>
+        </p:txBody>
+      </p:sp>
+      <p:sp>
+        <p:nvSpPr>
+          <p:cNvPr id="55" name="TextBox 54"/>
+          <p:cNvSpPr txBox="1"/>
+          <p:nvPr/>
+        </p:nvSpPr>
+        <p:spPr>
+          <a:xfrm>
+            <a:off x="7637068" y="3694176"/>
+            <a:ext cx="384048" cy="219456"/>
+          </a:xfrm>
+          <a:prstGeom prst="rect">
+            <a:avLst/>
+          </a:prstGeom>
+          <a:noFill/>
+        </p:spPr>
+        <p:txBody>
+          <a:bodyPr wrap="square" anchor="ctr" lIns="0" rIns="0" tIns="0" bIns="0">
+            <a:spAutoFit/>
+          </a:bodyPr>
+          <a:lstStyle/>
+          <a:p>
+            <a:pPr algn="ctr">
+              <a:lnSpc>
+                <a:spcPct val="108000"/>
+              </a:lnSpc>
+              <a:spcBef>
+                <a:spcPts val="0"/>
+              </a:spcBef>
+              <a:spcAft>
+                <a:spcPts val="300"/>
+              </a:spcAft>
+            </a:pPr>
+            <a:r>
+              <a:rPr sz="800" b="1" i="0">
+                <a:solidFill>
+                  <a:srgbClr val="FFFFFF"/>
+                </a:solidFill>
+                <a:latin typeface="Courier New"/>
+              </a:rPr>
+              <a:t>AI</a:t>
+            </a:r>
+          </a:p>
+        </p:txBody>
+      </p:sp>
+      <p:sp>
+        <p:nvSpPr>
+          <p:cNvPr id="56" name="TextBox 55"/>
           <p:cNvSpPr txBox="1"/>
           <p:nvPr/>
         </p:nvSpPr>
@@ -14925,14 +15255,14 @@
                 </a:solidFill>
                 <a:latin typeface="Arial"/>
               </a:rPr>
-              <a:t>Data &amp; jobs</a:t>
-            </a:r>
-          </a:p>
-        </p:txBody>
-      </p:sp>
-      <p:sp>
-        <p:nvSpPr>
-          <p:cNvPr id="51" name="TextBox 50"/>
+              <a:t>Verify</a:t>
+            </a:r>
+          </a:p>
+        </p:txBody>
+      </p:sp>
+      <p:sp>
+        <p:nvSpPr>
+          <p:cNvPr id="57" name="TextBox 56"/>
           <p:cNvSpPr txBox="1"/>
           <p:nvPr/>
         </p:nvSpPr>
@@ -14970,14 +15300,14 @@
                 </a:solidFill>
                 <a:latin typeface="Arial"/>
               </a:rPr>
-              <a:t>ImpEx → CSVs; cron triggers → scheduling runbook.</a:t>
-            </a:r>
-          </a:p>
-        </p:txBody>
-      </p:sp>
-      <p:sp>
-        <p:nvSpPr>
-          <p:cNvPr id="52" name="Rectangle 51"/>
+              <a:t>Real-org deploy + self-heal; data and schedules emitted.</a:t>
+            </a:r>
+          </a:p>
+        </p:txBody>
+      </p:sp>
+      <p:sp>
+        <p:nvSpPr>
+          <p:cNvPr id="58" name="Rectangle 57"/>
           <p:cNvSpPr/>
           <p:nvPr/>
         </p:nvSpPr>
@@ -15023,7 +15353,7 @@
       </p:sp>
       <p:sp>
         <p:nvSpPr>
-          <p:cNvPr id="53" name="TextBox 52"/>
+          <p:cNvPr id="59" name="TextBox 58"/>
           <p:cNvSpPr txBox="1"/>
           <p:nvPr/>
         </p:nvSpPr>
@@ -15068,96 +15398,7 @@
       </p:sp>
       <p:sp>
         <p:nvSpPr>
-          <p:cNvPr id="54" name="Rectangle 53"/>
-          <p:cNvSpPr/>
-          <p:nvPr/>
-        </p:nvSpPr>
-        <p:spPr>
-          <a:xfrm>
-            <a:off x="9628632" y="3703320"/>
-            <a:ext cx="329184" cy="219456"/>
-          </a:xfrm>
-          <a:prstGeom prst="rect">
-            <a:avLst/>
-          </a:prstGeom>
-          <a:solidFill>
-            <a:srgbClr val="0E0E0E"/>
-          </a:solidFill>
-          <a:ln>
-            <a:noFill/>
-          </a:ln>
-          <a:effectLst/>
-        </p:spPr>
-        <p:style>
-          <a:lnRef idx="1">
-            <a:schemeClr val="accent1"/>
-          </a:lnRef>
-          <a:fillRef idx="3">
-            <a:schemeClr val="accent1"/>
-          </a:fillRef>
-          <a:effectRef idx="2">
-            <a:schemeClr val="accent1"/>
-          </a:effectRef>
-          <a:fontRef idx="minor">
-            <a:schemeClr val="lt1"/>
-          </a:fontRef>
-        </p:style>
-        <p:txBody>
-          <a:bodyPr rtlCol="0" anchor="ctr"/>
-          <a:lstStyle/>
-          <a:p>
-            <a:pPr algn="ctr"/>
-          </a:p>
-        </p:txBody>
-      </p:sp>
-      <p:sp>
-        <p:nvSpPr>
-          <p:cNvPr id="55" name="TextBox 54"/>
-          <p:cNvSpPr txBox="1"/>
-          <p:nvPr/>
-        </p:nvSpPr>
-        <p:spPr>
-          <a:xfrm>
-            <a:off x="9628632" y="3694176"/>
-            <a:ext cx="329184" cy="219456"/>
-          </a:xfrm>
-          <a:prstGeom prst="rect">
-            <a:avLst/>
-          </a:prstGeom>
-          <a:noFill/>
-        </p:spPr>
-        <p:txBody>
-          <a:bodyPr wrap="square" anchor="ctr" lIns="0" rIns="0" tIns="0" bIns="0">
-            <a:spAutoFit/>
-          </a:bodyPr>
-          <a:lstStyle/>
-          <a:p>
-            <a:pPr algn="ctr">
-              <a:lnSpc>
-                <a:spcPct val="108000"/>
-              </a:lnSpc>
-              <a:spcBef>
-                <a:spcPts val="0"/>
-              </a:spcBef>
-              <a:spcAft>
-                <a:spcPts val="300"/>
-              </a:spcAft>
-            </a:pPr>
-            <a:r>
-              <a:rPr sz="800" b="1" i="0">
-                <a:solidFill>
-                  <a:srgbClr val="FFFFFF"/>
-                </a:solidFill>
-                <a:latin typeface="Courier New"/>
-              </a:rPr>
-              <a:t>AI</a:t>
-            </a:r>
-          </a:p>
-        </p:txBody>
-      </p:sp>
-      <p:sp>
-        <p:nvSpPr>
-          <p:cNvPr id="56" name="TextBox 55"/>
+          <p:cNvPr id="60" name="TextBox 59"/>
           <p:cNvSpPr txBox="1"/>
           <p:nvPr/>
         </p:nvSpPr>
@@ -15195,14 +15436,14 @@
                 </a:solidFill>
                 <a:latin typeface="Arial"/>
               </a:rPr>
-              <a:t>Verify &amp; report</a:t>
-            </a:r>
-          </a:p>
-        </p:txBody>
-      </p:sp>
-      <p:sp>
-        <p:nvSpPr>
-          <p:cNvPr id="57" name="TextBox 56"/>
+              <a:t>Prove it</a:t>
+            </a:r>
+          </a:p>
+        </p:txBody>
+      </p:sp>
+      <p:sp>
+        <p:nvSpPr>
+          <p:cNvPr id="61" name="TextBox 60"/>
           <p:cNvSpPr txBox="1"/>
           <p:nvPr/>
         </p:nvSpPr>
@@ -15240,14 +15481,14 @@
                 </a:solidFill>
                 <a:latin typeface="Arial"/>
               </a:rPr>
-              <a:t>Real-org deploy + self-heal; confidence scores.</a:t>
-            </a:r>
-          </a:p>
-        </p:txBody>
-      </p:sp>
-      <p:sp>
-        <p:nvSpPr>
-          <p:cNvPr id="58" name="Rectangle 57"/>
+              <a:t>Rule ledger, your tests replayed, provenance, sign-off.</a:t>
+            </a:r>
+          </a:p>
+        </p:txBody>
+      </p:sp>
+      <p:sp>
+        <p:nvSpPr>
+          <p:cNvPr id="62" name="Rectangle 61"/>
           <p:cNvSpPr/>
           <p:nvPr/>
         </p:nvSpPr>
@@ -15291,7 +15532,7 @@
       </p:sp>
       <p:sp>
         <p:nvSpPr>
-          <p:cNvPr id="59" name="Rectangle 58"/>
+          <p:cNvPr id="63" name="Rectangle 62"/>
           <p:cNvSpPr/>
           <p:nvPr/>
         </p:nvSpPr>
@@ -15335,7 +15576,7 @@
       </p:sp>
       <p:sp>
         <p:nvSpPr>
-          <p:cNvPr id="60" name="TextBox 59"/>
+          <p:cNvPr id="64" name="TextBox 63"/>
           <p:cNvSpPr txBox="1"/>
           <p:nvPr/>
         </p:nvSpPr>
@@ -15413,7 +15654,7 @@
                 </a:solidFill>
                 <a:latin typeface="Arial"/>
               </a:rPr>
-              <a:t> is used only where judgement is needed — understanding and writing code. Everything mechanical is ordinary tested software: fast, free, repeatable.</a:t>
+              <a:t> is used only where judgement is needed — understanding and writing code. Everything mechanical, including all four checks before the first gate, is ordinary tested software: fast, free, repeatable.</a:t>
             </a:r>
           </a:p>
         </p:txBody>
@@ -15609,7 +15850,7 @@
                 </a:solidFill>
                 <a:latin typeface="Arial"/>
               </a:rPr>
-              <a:t>It doesn't stop at “the AI wrote code.” It proves the code runs</a:t>
+              <a:t>It doesn't stop at “the AI wrote code.” It proves the behaviour survived</a:t>
             </a:r>
             <a:r>
               <a:rPr sz="2300" b="1" i="0">
@@ -16294,7 +16535,7 @@
                 </a:solidFill>
                 <a:latin typeface="Arial"/>
               </a:rPr>
-              <a:t>Three healing modes (below)</a:t>
+              <a:t>Missing fields, compile errors, thin coverage</a:t>
             </a:r>
           </a:p>
         </p:txBody>
@@ -16527,14 +16768,59 @@
       </p:sp>
       <p:sp>
         <p:nvSpPr>
-          <p:cNvPr id="26" name="Rectangle 25"/>
+          <p:cNvPr id="26" name="TextBox 25"/>
+          <p:cNvSpPr txBox="1"/>
+          <p:nvPr/>
+        </p:nvSpPr>
+        <p:spPr>
+          <a:xfrm>
+            <a:off x="603504" y="3383280"/>
+            <a:ext cx="9482328" cy="274320"/>
+          </a:xfrm>
+          <a:prstGeom prst="rect">
+            <a:avLst/>
+          </a:prstGeom>
+          <a:noFill/>
+        </p:spPr>
+        <p:txBody>
+          <a:bodyPr wrap="square" anchor="t" lIns="0" rIns="0" tIns="0" bIns="0">
+            <a:spAutoFit/>
+          </a:bodyPr>
+          <a:lstStyle/>
+          <a:p>
+            <a:pPr algn="ctr">
+              <a:lnSpc>
+                <a:spcPct val="108000"/>
+              </a:lnSpc>
+              <a:spcBef>
+                <a:spcPts val="0"/>
+              </a:spcBef>
+              <a:spcAft>
+                <a:spcPts val="300"/>
+              </a:spcAft>
+            </a:pPr>
+            <a:r>
+              <a:rPr sz="900" b="1" i="0" spc="100">
+                <a:solidFill>
+                  <a:srgbClr val="A9622F"/>
+                </a:solidFill>
+                <a:latin typeface="Courier New"/>
+              </a:rPr>
+              <a:t>AND THEN IT PROVES THE BEHAVIOUR SURVIVED</a:t>
+            </a:r>
+          </a:p>
+        </p:txBody>
+      </p:sp>
+      <p:sp>
+        <p:nvSpPr>
+          <p:cNvPr id="27" name="Rectangle 26"/>
           <p:cNvSpPr/>
           <p:nvPr/>
         </p:nvSpPr>
         <p:spPr>
           <a:xfrm>
-            <a:off x="603504" y="3593592"/>
-            <a:ext cx="2977895" cy="2194560"/>
+            <a:off x="603504" y="3730752"/>
+            <a:ext cx="2977895" cy="2084831"/>
           </a:xfrm>
           <a:prstGeom prst="rect">
             <a:avLst/>
@@ -16573,20 +16859,20 @@
       </p:sp>
       <p:sp>
         <p:nvSpPr>
-          <p:cNvPr id="27" name="Rectangle 26"/>
+          <p:cNvPr id="28" name="Rectangle 27"/>
           <p:cNvSpPr/>
           <p:nvPr/>
         </p:nvSpPr>
         <p:spPr>
           <a:xfrm>
-            <a:off x="603504" y="3593592"/>
+            <a:off x="603504" y="3730752"/>
             <a:ext cx="2977895" cy="50292"/>
           </a:xfrm>
           <a:prstGeom prst="rect">
             <a:avLst/>
           </a:prstGeom>
           <a:solidFill>
-            <a:srgbClr val="0E0E0E"/>
+            <a:srgbClr val="86BC25"/>
           </a:solidFill>
           <a:ln>
             <a:noFill/>
@@ -16617,14 +16903,14 @@
       </p:sp>
       <p:sp>
         <p:nvSpPr>
-          <p:cNvPr id="28" name="TextBox 27"/>
+          <p:cNvPr id="29" name="TextBox 28"/>
           <p:cNvSpPr txBox="1"/>
           <p:nvPr/>
         </p:nvSpPr>
         <p:spPr>
           <a:xfrm>
-            <a:off x="804672" y="3803904"/>
-            <a:ext cx="2575560" cy="320040"/>
+            <a:off x="804672" y="3913632"/>
+            <a:ext cx="2575560" cy="457200"/>
           </a:xfrm>
           <a:prstGeom prst="rect">
             <a:avLst/>
@@ -16639,7 +16925,7 @@
           <a:p>
             <a:pPr algn="l">
               <a:lnSpc>
-                <a:spcPct val="108000"/>
+                <a:spcPct val="110000"/>
               </a:lnSpc>
               <a:spcBef>
                 <a:spcPts val="0"/>
@@ -16649,27 +16935,27 @@
               </a:spcAft>
             </a:pPr>
             <a:r>
-              <a:rPr sz="1250" b="1" i="0">
+              <a:rPr sz="1200" b="1" i="0">
                 <a:solidFill>
                   <a:srgbClr val="0E0E0E"/>
                 </a:solidFill>
                 <a:latin typeface="Arial"/>
               </a:rPr>
-              <a:t>Metadata healing</a:t>
-            </a:r>
-          </a:p>
-        </p:txBody>
-      </p:sp>
-      <p:sp>
-        <p:nvSpPr>
-          <p:cNvPr id="29" name="TextBox 28"/>
+              <a:t>Every business rule is tracked</a:t>
+            </a:r>
+          </a:p>
+        </p:txBody>
+      </p:sp>
+      <p:sp>
+        <p:nvSpPr>
+          <p:cNvPr id="30" name="TextBox 29"/>
           <p:cNvSpPr txBox="1"/>
           <p:nvPr/>
         </p:nvSpPr>
         <p:spPr>
           <a:xfrm>
-            <a:off x="804672" y="4187952"/>
-            <a:ext cx="2575560" cy="1463040"/>
+            <a:off x="804672" y="4389120"/>
+            <a:ext cx="2575560" cy="1371600"/>
           </a:xfrm>
           <a:prstGeom prst="rect">
             <a:avLst/>
@@ -16684,7 +16970,7 @@
           <a:p>
             <a:pPr algn="l">
               <a:lnSpc>
-                <a:spcPct val="126000"/>
+                <a:spcPct val="124000"/>
               </a:lnSpc>
               <a:spcBef>
                 <a:spcPts val="0"/>
@@ -16694,27 +16980,27 @@
               </a:spcAft>
             </a:pPr>
             <a:r>
-              <a:rPr sz="1030" b="0" i="0">
+              <a:rPr sz="960" b="0" i="0">
                 <a:solidFill>
                   <a:srgbClr val="53565A"/>
                 </a:solidFill>
                 <a:latin typeface="Arial"/>
               </a:rPr>
-              <a:t>“Missing field” error? If the field is genuinely used in the original Java — proven by evidence — it's added to the data model. Never guessed.</a:t>
-            </a:r>
-          </a:p>
-        </p:txBody>
-      </p:sp>
-      <p:sp>
-        <p:nvSpPr>
-          <p:cNvPr id="30" name="Rectangle 29"/>
+              <a:t>Each rule found in your Java is followed through to the finished code and lands in one of four buckets — asserted, implemented, at risk, or dropped. “Dropped” is the one no other tool shows you.</a:t>
+            </a:r>
+          </a:p>
+        </p:txBody>
+      </p:sp>
+      <p:sp>
+        <p:nvSpPr>
+          <p:cNvPr id="31" name="Rectangle 30"/>
           <p:cNvSpPr/>
           <p:nvPr/>
         </p:nvSpPr>
         <p:spPr>
           <a:xfrm>
-            <a:off x="3855719" y="3593592"/>
-            <a:ext cx="2977895" cy="2194560"/>
+            <a:off x="3855719" y="3730752"/>
+            <a:ext cx="2977895" cy="2084831"/>
           </a:xfrm>
           <a:prstGeom prst="rect">
             <a:avLst/>
@@ -16753,20 +17039,20 @@
       </p:sp>
       <p:sp>
         <p:nvSpPr>
-          <p:cNvPr id="31" name="Rectangle 30"/>
+          <p:cNvPr id="32" name="Rectangle 31"/>
           <p:cNvSpPr/>
           <p:nvPr/>
         </p:nvSpPr>
         <p:spPr>
           <a:xfrm>
-            <a:off x="3855719" y="3593592"/>
+            <a:off x="3855719" y="3730752"/>
             <a:ext cx="2977895" cy="50292"/>
           </a:xfrm>
           <a:prstGeom prst="rect">
             <a:avLst/>
           </a:prstGeom>
           <a:solidFill>
-            <a:srgbClr val="0E0E0E"/>
+            <a:srgbClr val="86BC25"/>
           </a:solidFill>
           <a:ln>
             <a:noFill/>
@@ -16797,14 +17083,14 @@
       </p:sp>
       <p:sp>
         <p:nvSpPr>
-          <p:cNvPr id="32" name="TextBox 31"/>
+          <p:cNvPr id="33" name="TextBox 32"/>
           <p:cNvSpPr txBox="1"/>
           <p:nvPr/>
         </p:nvSpPr>
         <p:spPr>
           <a:xfrm>
-            <a:off x="4056887" y="3803904"/>
-            <a:ext cx="2575560" cy="320040"/>
+            <a:off x="4056887" y="3913632"/>
+            <a:ext cx="2575560" cy="457200"/>
           </a:xfrm>
           <a:prstGeom prst="rect">
             <a:avLst/>
@@ -16819,7 +17105,7 @@
           <a:p>
             <a:pPr algn="l">
               <a:lnSpc>
-                <a:spcPct val="108000"/>
+                <a:spcPct val="110000"/>
               </a:lnSpc>
               <a:spcBef>
                 <a:spcPts val="0"/>
@@ -16829,27 +17115,27 @@
               </a:spcAft>
             </a:pPr>
             <a:r>
-              <a:rPr sz="1250" b="1" i="0">
+              <a:rPr sz="1200" b="1" i="0">
                 <a:solidFill>
                   <a:srgbClr val="0E0E0E"/>
                 </a:solidFill>
                 <a:latin typeface="Arial"/>
               </a:rPr>
-              <a:t>Code repair</a:t>
-            </a:r>
-          </a:p>
-        </p:txBody>
-      </p:sp>
-      <p:sp>
-        <p:nvSpPr>
-          <p:cNvPr id="33" name="TextBox 32"/>
+              <a:t>Your own tests, replayed</a:t>
+            </a:r>
+          </a:p>
+        </p:txBody>
+      </p:sp>
+      <p:sp>
+        <p:nvSpPr>
+          <p:cNvPr id="34" name="TextBox 33"/>
           <p:cNvSpPr txBox="1"/>
           <p:nvPr/>
         </p:nvSpPr>
         <p:spPr>
           <a:xfrm>
-            <a:off x="4056887" y="4187952"/>
-            <a:ext cx="2575560" cy="1463040"/>
+            <a:off x="4056887" y="4389120"/>
+            <a:ext cx="2575560" cy="1371600"/>
           </a:xfrm>
           <a:prstGeom prst="rect">
             <a:avLst/>
@@ -16864,7 +17150,7 @@
           <a:p>
             <a:pPr algn="l">
               <a:lnSpc>
-                <a:spcPct val="126000"/>
+                <a:spcPct val="124000"/>
               </a:lnSpc>
               <a:spcBef>
                 <a:spcPts val="0"/>
@@ -16874,27 +17160,27 @@
               </a:spcAft>
             </a:pPr>
             <a:r>
-              <a:rPr sz="1030" b="0" i="0">
+              <a:rPr sz="960" b="0" i="0">
                 <a:solidFill>
                   <a:srgbClr val="53565A"/>
                 </a:solidFill>
                 <a:latin typeface="Arial"/>
               </a:rPr>
-              <a:t>Compile errors are fed back to the AI with the real error message, and the class is rewritten and re-tried.</a:t>
-            </a:r>
-          </a:p>
-        </p:txBody>
-      </p:sp>
-      <p:sp>
-        <p:nvSpPr>
-          <p:cNvPr id="34" name="Rectangle 33"/>
+              <a:t>We mine your existing JUnit suite for what the old code actually did, then replay it against the new Apex. The AI may set the test up, but it is never allowed to write the expected answer.</a:t>
+            </a:r>
+          </a:p>
+        </p:txBody>
+      </p:sp>
+      <p:sp>
+        <p:nvSpPr>
+          <p:cNvPr id="35" name="Rectangle 34"/>
           <p:cNvSpPr/>
           <p:nvPr/>
         </p:nvSpPr>
         <p:spPr>
           <a:xfrm>
-            <a:off x="7107935" y="3593592"/>
-            <a:ext cx="2977895" cy="2194560"/>
+            <a:off x="7107935" y="3730752"/>
+            <a:ext cx="2977895" cy="2084831"/>
           </a:xfrm>
           <a:prstGeom prst="rect">
             <a:avLst/>
@@ -16933,20 +17219,20 @@
       </p:sp>
       <p:sp>
         <p:nvSpPr>
-          <p:cNvPr id="35" name="Rectangle 34"/>
+          <p:cNvPr id="36" name="Rectangle 35"/>
           <p:cNvSpPr/>
           <p:nvPr/>
         </p:nvSpPr>
         <p:spPr>
           <a:xfrm>
-            <a:off x="7107935" y="3593592"/>
+            <a:off x="7107935" y="3730752"/>
             <a:ext cx="2977895" cy="50292"/>
           </a:xfrm>
           <a:prstGeom prst="rect">
             <a:avLst/>
           </a:prstGeom>
           <a:solidFill>
-            <a:srgbClr val="0E0E0E"/>
+            <a:srgbClr val="86BC25"/>
           </a:solidFill>
           <a:ln>
             <a:noFill/>
@@ -16977,14 +17263,14 @@
       </p:sp>
       <p:sp>
         <p:nvSpPr>
-          <p:cNvPr id="36" name="TextBox 35"/>
+          <p:cNvPr id="37" name="TextBox 36"/>
           <p:cNvSpPr txBox="1"/>
           <p:nvPr/>
         </p:nvSpPr>
         <p:spPr>
           <a:xfrm>
-            <a:off x="7309103" y="3803904"/>
-            <a:ext cx="2575560" cy="320040"/>
+            <a:off x="7309103" y="3913632"/>
+            <a:ext cx="2575560" cy="457200"/>
           </a:xfrm>
           <a:prstGeom prst="rect">
             <a:avLst/>
@@ -16999,7 +17285,7 @@
           <a:p>
             <a:pPr algn="l">
               <a:lnSpc>
-                <a:spcPct val="108000"/>
+                <a:spcPct val="110000"/>
               </a:lnSpc>
               <a:spcBef>
                 <a:spcPts val="0"/>
@@ -17009,27 +17295,27 @@
               </a:spcAft>
             </a:pPr>
             <a:r>
-              <a:rPr sz="1250" b="1" i="0">
+              <a:rPr sz="1200" b="1" i="0">
                 <a:solidFill>
                   <a:srgbClr val="0E0E0E"/>
                 </a:solidFill>
                 <a:latin typeface="Arial"/>
               </a:rPr>
-              <a:t>Coverage healing</a:t>
-            </a:r>
-          </a:p>
-        </p:txBody>
-      </p:sp>
-      <p:sp>
-        <p:nvSpPr>
-          <p:cNvPr id="37" name="TextBox 36"/>
+              <a:t>And what it can't prove</a:t>
+            </a:r>
+          </a:p>
+        </p:txBody>
+      </p:sp>
+      <p:sp>
+        <p:nvSpPr>
+          <p:cNvPr id="38" name="TextBox 37"/>
           <p:cNvSpPr txBox="1"/>
           <p:nvPr/>
         </p:nvSpPr>
         <p:spPr>
           <a:xfrm>
-            <a:off x="7309103" y="4187952"/>
-            <a:ext cx="2575560" cy="1463040"/>
+            <a:off x="7309103" y="4389120"/>
+            <a:ext cx="2575560" cy="1371600"/>
           </a:xfrm>
           <a:prstGeom prst="rect">
             <a:avLst/>
@@ -17044,7 +17330,7 @@
           <a:p>
             <a:pPr algn="l">
               <a:lnSpc>
-                <a:spcPct val="126000"/>
+                <a:spcPct val="124000"/>
               </a:lnSpc>
               <a:spcBef>
                 <a:spcPts val="0"/>
@@ -17054,20 +17340,20 @@
               </a:spcAft>
             </a:pPr>
             <a:r>
-              <a:rPr sz="1030" b="0" i="0">
+              <a:rPr sz="960" b="0" i="0">
                 <a:solidFill>
                   <a:srgbClr val="53565A"/>
                 </a:solidFill>
                 <a:latin typeface="Arial"/>
               </a:rPr>
-              <a:t>Salesforce requires 75% test coverage to deploy. Below it? The tool writes more tests — error paths, bulk scenarios — until it clears the bar.</a:t>
-            </a:r>
-          </a:p>
-        </p:txBody>
-      </p:sp>
-      <p:sp>
-        <p:nvSpPr>
-          <p:cNvPr id="38" name="Rectangle 37"/>
+              <a:t>The sign-off contract lists the gaps as prominently as the wins — untested rules, methods with no traceable origin, whether an org ever compiled it. There is no “100%” badge anywhere.</a:t>
+            </a:r>
+          </a:p>
+        </p:txBody>
+      </p:sp>
+      <p:sp>
+        <p:nvSpPr>
+          <p:cNvPr id="39" name="Rectangle 38"/>
           <p:cNvSpPr/>
           <p:nvPr/>
         </p:nvSpPr>
@@ -17111,7 +17397,7 @@
       </p:sp>
       <p:sp>
         <p:nvSpPr>
-          <p:cNvPr id="39" name="Rectangle 38"/>
+          <p:cNvPr id="40" name="Rectangle 39"/>
           <p:cNvSpPr/>
           <p:nvPr/>
         </p:nvSpPr>
@@ -17155,7 +17441,7 @@
       </p:sp>
       <p:sp>
         <p:nvSpPr>
-          <p:cNvPr id="40" name="TextBox 39"/>
+          <p:cNvPr id="41" name="TextBox 40"/>
           <p:cNvSpPr txBox="1"/>
           <p:nvPr/>
         </p:nvSpPr>
@@ -17215,7 +17501,25 @@
                 </a:solidFill>
                 <a:latin typeface="Arial"/>
               </a:rPr>
-              <a:t>The AI can only use fields that provably exist, a second AI challenges every piece, and the code must actually compile against a real org. Correctness comes from the loop — not from trusting the model.</a:t>
+              <a:t>Any tool can hand you Apex. The question your architect will ask is </a:t>
+            </a:r>
+            <a:r>
+              <a:rPr sz="1150" b="1" i="0">
+                <a:solidFill>
+                  <a:srgbClr val="0E0E0E"/>
+                </a:solidFill>
+                <a:latin typeface="Arial"/>
+              </a:rPr>
+              <a:t>“how do I know it still does what it did?”</a:t>
+            </a:r>
+            <a:r>
+              <a:rPr sz="1150" b="0" i="0">
+                <a:solidFill>
+                  <a:srgbClr val="222427"/>
+                </a:solidFill>
+                <a:latin typeface="Arial"/>
+              </a:rPr>
+              <a:t> — and that is what the whole right-hand side of this slide answers.</a:t>
             </a:r>
           </a:p>
         </p:txBody>
@@ -17658,7 +17962,7 @@
         <p:spPr>
           <a:xfrm>
             <a:off x="786384" y="2157984"/>
-            <a:ext cx="1260043" cy="274320"/>
+            <a:ext cx="1600200" cy="274320"/>
           </a:xfrm>
           <a:prstGeom prst="rect">
             <a:avLst/>
@@ -17733,7 +18037,7 @@
                 </a:solidFill>
                 <a:latin typeface="Courier New"/>
               </a:rPr>
-              <a:t>force-app/…/classes</a:t>
+              <a:t>force-app/…/classes · lwc</a:t>
             </a:r>
           </a:p>
         </p:txBody>
@@ -17778,7 +18082,7 @@
                 </a:solidFill>
                 <a:latin typeface="Arial"/>
               </a:rPr>
-              <a:t>Apex code + tests</a:t>
+              <a:t>Apex, LWC + tests</a:t>
             </a:r>
           </a:p>
         </p:txBody>
@@ -17823,7 +18127,7 @@
                 </a:solidFill>
                 <a:latin typeface="Arial"/>
               </a:rPr>
-              <a:t>Selectors, Services, REST controllers, scheduled jobs — each with its own test class.</a:t>
+              <a:t>Selectors, Services, controllers, scheduled jobs and Lightning Web Components — each with its own test.</a:t>
             </a:r>
           </a:p>
         </p:txBody>
@@ -18108,7 +18412,7 @@
         <p:spPr>
           <a:xfrm>
             <a:off x="7290815" y="2157984"/>
-            <a:ext cx="1600200" cy="274320"/>
+            <a:ext cx="1316736" cy="274320"/>
           </a:xfrm>
           <a:prstGeom prst="rect">
             <a:avLst/>
@@ -18183,7 +18487,7 @@
                 </a:solidFill>
                 <a:latin typeface="Courier New"/>
               </a:rPr>
-              <a:t>data/ · DATA_MIGRATION.md</a:t>
+              <a:t>data/ · CRON_JOBS.md</a:t>
             </a:r>
           </a:p>
         </p:txBody>
@@ -18228,7 +18532,7 @@
                 </a:solidFill>
                 <a:latin typeface="Arial"/>
               </a:rPr>
-              <a:t>The data</a:t>
+              <a:t>Data &amp; schedules</a:t>
             </a:r>
           </a:p>
         </p:txBody>
@@ -18273,7 +18577,7 @@
                 </a:solidFill>
                 <a:latin typeface="Arial"/>
               </a:rPr>
-              <a:t>Load-ready CSVs plus a safe, re-runnable import runbook.</a:t>
+              <a:t>Load-ready CSVs with a re-runnable import runbook; every timed job translated, same timing.</a:t>
             </a:r>
           </a:p>
         </p:txBody>
@@ -18333,7 +18637,7 @@
         <p:spPr>
           <a:xfrm>
             <a:off x="786384" y="3849624"/>
-            <a:ext cx="1770278" cy="274320"/>
+            <a:ext cx="806500" cy="274320"/>
           </a:xfrm>
           <a:prstGeom prst="rect">
             <a:avLst/>
@@ -18408,7 +18712,7 @@
                 </a:solidFill>
                 <a:latin typeface="Courier New"/>
               </a:rPr>
-              <a:t>CRON_JOBS.md · schedule.apex</a:t>
+              <a:t>SIGN_OFF.md</a:t>
             </a:r>
           </a:p>
         </p:txBody>
@@ -18453,7 +18757,7 @@
                 </a:solidFill>
                 <a:latin typeface="Arial"/>
               </a:rPr>
-              <a:t>Schedules</a:t>
+              <a:t>The audit</a:t>
             </a:r>
           </a:p>
         </p:txBody>
@@ -18498,7 +18802,7 @@
                 </a:solidFill>
                 <a:latin typeface="Arial"/>
               </a:rPr>
-              <a:t>Every timed job translated, same timing, with a ready-to-run script.</a:t>
+              <a:t>Who approved which stage, on what evidence — and, just as prominently, what it does not certify.</a:t>
             </a:r>
           </a:p>
         </p:txBody>
@@ -18558,7 +18862,7 @@
         <p:spPr>
           <a:xfrm>
             <a:off x="4038599" y="3849624"/>
-            <a:ext cx="1146657" cy="274320"/>
+            <a:ext cx="1826971" cy="274320"/>
           </a:xfrm>
           <a:prstGeom prst="rect">
             <a:avLst/>
@@ -18633,7 +18937,7 @@
                 </a:solidFill>
                 <a:latin typeface="Courier New"/>
               </a:rPr>
-              <a:t>MIGRATION_PLAN.md</a:t>
+              <a:t>TRIAGE.md · BUSINESS_RULES.md</a:t>
             </a:r>
           </a:p>
         </p:txBody>
@@ -18678,7 +18982,7 @@
                 </a:solidFill>
                 <a:latin typeface="Arial"/>
               </a:rPr>
-              <a:t>The decisions</a:t>
+              <a:t>Where to look</a:t>
             </a:r>
           </a:p>
         </p:txBody>
@@ -18723,7 +19027,7 @@
                 </a:solidFill>
                 <a:latin typeface="Arial"/>
               </a:rPr>
-              <a:t>The Planner's call on every class, the Critic's findings, the full decision log.</a:t>
+              <a:t>Every file ranked by how much it needs you, and every business rule with its verdict.</a:t>
             </a:r>
           </a:p>
         </p:txBody>
@@ -19403,7 +19707,25 @@
                 </a:solidFill>
                 <a:latin typeface="Arial"/>
               </a:rPr>
-              <a:t>Not just code — a complete package: the system, its data, its schedules, and the paper trail that tells your reviewers exactly where to look.</a:t>
+              <a:t>Not just code — a complete package: the system, its data, its schedules, and </a:t>
+            </a:r>
+            <a:r>
+              <a:rPr sz="1150" b="1" i="0">
+                <a:solidFill>
+                  <a:srgbClr val="0E0E0E"/>
+                </a:solidFill>
+                <a:latin typeface="Arial"/>
+              </a:rPr>
+              <a:t>the receipts</a:t>
+            </a:r>
+            <a:r>
+              <a:rPr sz="1150" b="0" i="0">
+                <a:solidFill>
+                  <a:srgbClr val="222427"/>
+                </a:solidFill>
+                <a:latin typeface="Arial"/>
+              </a:rPr>
+              <a:t> that tell your reviewers exactly where to look and what is still unproven.</a:t>
             </a:r>
           </a:p>
         </p:txBody>
@@ -20144,7 +20466,7 @@
                 </a:solidFill>
                 <a:latin typeface="Arial"/>
               </a:rPr>
-              <a:t>An AI reviewer checks rule preservation; a parity score proves it</a:t>
+              <a:t>Every rule tracked to a verdict — including the ones nothing carries</a:t>
             </a:r>
           </a:p>
         </p:txBody>
@@ -20546,7 +20868,7 @@
                 </a:solidFill>
                 <a:latin typeface="Arial"/>
               </a:rPr>
-              <a:t>A decision log and a confidence score on every class</a:t>
+              <a:t>A signed audit: who approved what, on what evidence</a:t>
             </a:r>
           </a:p>
         </p:txBody>
@@ -20597,7 +20919,141 @@
       </p:sp>
       <p:sp>
         <p:nvSpPr>
-          <p:cNvPr id="28" name="Rectangle 27"/>
+          <p:cNvPr id="28" name="TextBox 27"/>
+          <p:cNvSpPr txBox="1"/>
+          <p:nvPr/>
+        </p:nvSpPr>
+        <p:spPr>
+          <a:xfrm>
+            <a:off x="694944" y="5696712"/>
+            <a:ext cx="4466844" cy="548640"/>
+          </a:xfrm>
+          <a:prstGeom prst="rect">
+            <a:avLst/>
+          </a:prstGeom>
+          <a:noFill/>
+        </p:spPr>
+        <p:txBody>
+          <a:bodyPr wrap="square" anchor="ctr" lIns="0" rIns="0" tIns="0" bIns="0">
+            <a:spAutoFit/>
+          </a:bodyPr>
+          <a:lstStyle/>
+          <a:p>
+            <a:pPr algn="l">
+              <a:lnSpc>
+                <a:spcPct val="112000"/>
+              </a:lnSpc>
+              <a:spcBef>
+                <a:spcPts val="0"/>
+              </a:spcBef>
+              <a:spcAft>
+                <a:spcPts val="300"/>
+              </a:spcAft>
+            </a:pPr>
+            <a:r>
+              <a:rPr sz="1150" b="1" i="0">
+                <a:solidFill>
+                  <a:srgbClr val="B3282D"/>
+                </a:solidFill>
+                <a:latin typeface="Arial"/>
+              </a:rPr>
+              <a:t>“It converted 100% of files”</a:t>
+            </a:r>
+          </a:p>
+        </p:txBody>
+      </p:sp>
+      <p:sp>
+        <p:nvSpPr>
+          <p:cNvPr id="29" name="TextBox 28"/>
+          <p:cNvSpPr txBox="1"/>
+          <p:nvPr/>
+        </p:nvSpPr>
+        <p:spPr>
+          <a:xfrm>
+            <a:off x="5436107" y="5696712"/>
+            <a:ext cx="4466844" cy="548640"/>
+          </a:xfrm>
+          <a:prstGeom prst="rect">
+            <a:avLst/>
+          </a:prstGeom>
+          <a:noFill/>
+        </p:spPr>
+        <p:txBody>
+          <a:bodyPr wrap="square" anchor="ctr" lIns="0" rIns="0" tIns="0" bIns="0">
+            <a:spAutoFit/>
+          </a:bodyPr>
+          <a:lstStyle/>
+          <a:p>
+            <a:pPr algn="l">
+              <a:lnSpc>
+                <a:spcPct val="112000"/>
+              </a:lnSpc>
+              <a:spcBef>
+                <a:spcPts val="0"/>
+              </a:spcBef>
+              <a:spcAft>
+                <a:spcPts val="300"/>
+              </a:spcAft>
+            </a:pPr>
+            <a:r>
+              <a:rPr sz="1150" b="1" i="0">
+                <a:solidFill>
+                  <a:srgbClr val="046A38"/>
+                </a:solidFill>
+                <a:latin typeface="Arial"/>
+              </a:rPr>
+              <a:t>A number that means something — rules preserved, not files touched</a:t>
+            </a:r>
+          </a:p>
+        </p:txBody>
+      </p:sp>
+      <p:sp>
+        <p:nvSpPr>
+          <p:cNvPr id="30" name="Rectangle 29"/>
+          <p:cNvSpPr/>
+          <p:nvPr/>
+        </p:nvSpPr>
+        <p:spPr>
+          <a:xfrm>
+            <a:off x="603504" y="6300216"/>
+            <a:ext cx="9482328" cy="10972"/>
+          </a:xfrm>
+          <a:prstGeom prst="rect">
+            <a:avLst/>
+          </a:prstGeom>
+          <a:solidFill>
+            <a:srgbClr val="D2D2CF"/>
+          </a:solidFill>
+          <a:ln>
+            <a:noFill/>
+          </a:ln>
+          <a:effectLst/>
+        </p:spPr>
+        <p:style>
+          <a:lnRef idx="1">
+            <a:schemeClr val="accent1"/>
+          </a:lnRef>
+          <a:fillRef idx="3">
+            <a:schemeClr val="accent1"/>
+          </a:fillRef>
+          <a:effectRef idx="2">
+            <a:schemeClr val="accent1"/>
+          </a:effectRef>
+          <a:fontRef idx="minor">
+            <a:schemeClr val="lt1"/>
+          </a:fontRef>
+        </p:style>
+        <p:txBody>
+          <a:bodyPr rtlCol="0" anchor="ctr"/>
+          <a:lstStyle/>
+          <a:p>
+            <a:pPr algn="ctr"/>
+          </a:p>
+        </p:txBody>
+      </p:sp>
+      <p:sp>
+        <p:nvSpPr>
+          <p:cNvPr id="31" name="Rectangle 30"/>
           <p:cNvSpPr/>
           <p:nvPr/>
         </p:nvSpPr>
@@ -20641,7 +21097,7 @@
       </p:sp>
       <p:sp>
         <p:nvSpPr>
-          <p:cNvPr id="29" name="Rectangle 28"/>
+          <p:cNvPr id="32" name="Rectangle 31"/>
           <p:cNvSpPr/>
           <p:nvPr/>
         </p:nvSpPr>
@@ -20685,7 +21141,7 @@
       </p:sp>
       <p:sp>
         <p:nvSpPr>
-          <p:cNvPr id="30" name="TextBox 29"/>
+          <p:cNvPr id="33" name="TextBox 32"/>
           <p:cNvSpPr txBox="1"/>
           <p:nvPr/>
         </p:nvSpPr>

--- a/docs/DEMO_DECK.pptx
+++ b/docs/DEMO_DECK.pptx
@@ -3357,7 +3357,7 @@
                 </a:solidFill>
                 <a:latin typeface="Courier New"/>
               </a:rPr>
-              <a:t>MIGRATION ACCELERATOR · EXECUTIVE OVERVIEW</a:t>
+              <a:t>PORTAGE · TWO PIPELINES, ONE ENGINE · EXECUTIVE OVERVIEW</a:t>
             </a:r>
           </a:p>
         </p:txBody>
@@ -3522,7 +3522,7 @@
                 </a:solidFill>
                 <a:latin typeface="Arial"/>
               </a:rPr>
-              <a:t>Migrating a complete Hybris estate is a multi-month program. This accelerator removes the biggest bottleneck — it uses AI to do the manual code-move, and then proves the result actually works, before your experts spend a minute on it.</a:t>
+              <a:t>Migrating a commerce estate is a multi-month program. Portage removes the biggest bottleneck — it uses AI to do the manual code-move, then proves the result actually works before your experts spend a minute on it. Two migrations run today: SAP Hybris to Salesforce, shown here, and Adobe Commerce to SAP Hybris.</a:t>
             </a:r>
           </a:p>
         </p:txBody>
@@ -4224,7 +4224,7 @@
                 </a:solidFill>
                 <a:latin typeface="Courier New"/>
               </a:rPr>
-              <a:t>H2A MIGRATOR · ACCELERATOR</a:t>
+              <a:t>PORTAGE · MIGRATION ACCELERATOR</a:t>
             </a:r>
           </a:p>
         </p:txBody>
@@ -4921,7 +4921,7 @@
                 </a:solidFill>
                 <a:latin typeface="Courier New"/>
               </a:rPr>
-              <a:t>H2A MIGRATOR · ACCELERATOR</a:t>
+              <a:t>PORTAGE · MIGRATION ACCELERATOR</a:t>
             </a:r>
           </a:p>
         </p:txBody>
@@ -5326,7 +5326,7 @@
                 </a:solidFill>
                 <a:latin typeface="Courier New"/>
               </a:rPr>
-              <a:t>H2A MIGRATOR · ACCELERATOR</a:t>
+              <a:t>PORTAGE · MIGRATION ACCELERATOR</a:t>
             </a:r>
           </a:p>
         </p:txBody>
@@ -6426,7 +6426,7 @@
                 </a:solidFill>
                 <a:latin typeface="Courier New"/>
               </a:rPr>
-              <a:t>H2A MIGRATOR · ACCELERATOR</a:t>
+              <a:t>PORTAGE · MIGRATION ACCELERATOR</a:t>
             </a:r>
           </a:p>
         </p:txBody>
@@ -7738,7 +7738,7 @@
                 </a:solidFill>
                 <a:latin typeface="Courier New"/>
               </a:rPr>
-              <a:t>H2A MIGRATOR · ACCELERATOR</a:t>
+              <a:t>PORTAGE · MIGRATION ACCELERATOR</a:t>
             </a:r>
           </a:p>
         </p:txBody>
@@ -10969,7 +10969,7 @@
                 </a:solidFill>
                 <a:latin typeface="Courier New"/>
               </a:rPr>
-              <a:t>H2A MIGRATOR · ACCELERATOR</a:t>
+              <a:t>PORTAGE · MIGRATION ACCELERATOR</a:t>
             </a:r>
           </a:p>
         </p:txBody>
@@ -12665,7 +12665,7 @@
                 </a:solidFill>
                 <a:latin typeface="Courier New"/>
               </a:rPr>
-              <a:t>H2A MIGRATOR · ACCELERATOR</a:t>
+              <a:t>PORTAGE · MIGRATION ACCELERATOR</a:t>
             </a:r>
           </a:p>
         </p:txBody>
@@ -13048,7 +13048,7 @@
                 </a:solidFill>
                 <a:latin typeface="Courier New"/>
               </a:rPr>
-              <a:t>H2A MIGRATOR · ACCELERATOR</a:t>
+              <a:t>PORTAGE · MIGRATION ACCELERATOR</a:t>
             </a:r>
           </a:p>
         </p:txBody>
@@ -15948,7 +15948,7 @@
                 </a:solidFill>
                 <a:latin typeface="Courier New"/>
               </a:rPr>
-              <a:t>H2A MIGRATOR · ACCELERATOR</a:t>
+              <a:t>PORTAGE · MIGRATION ACCELERATOR</a:t>
             </a:r>
           </a:p>
         </p:txBody>
@@ -17813,7 +17813,7 @@
                 </a:solidFill>
                 <a:latin typeface="Courier New"/>
               </a:rPr>
-              <a:t>H2A MIGRATOR · ACCELERATOR</a:t>
+              <a:t>PORTAGE · MIGRATION ACCELERATOR</a:t>
             </a:r>
           </a:p>
         </p:txBody>
@@ -20019,7 +20019,7 @@
                 </a:solidFill>
                 <a:latin typeface="Courier New"/>
               </a:rPr>
-              <a:t>H2A MIGRATOR · ACCELERATOR</a:t>
+              <a:t>PORTAGE · MIGRATION ACCELERATOR</a:t>
             </a:r>
           </a:p>
         </p:txBody>
